--- a/skills/pptx-deck/examples/component-gallery/component-gallery.pptx
+++ b/skills/pptx-deck/examples/component-gallery/component-gallery.pptx
@@ -242,13 +242,13 @@
     <a:lstStyle/>
     <a:p>
       <a:pPr>
-        <a:defRPr sz="1400">
+        <a:defRPr sz="1600">
           <a:solidFill>
             <a:schemeClr val="dk1"/>
           </a:solidFill>
         </a:defRPr>
       </a:pPr>
-      <a:endParaRPr lang="en-US" sz="1400">
+      <a:endParaRPr lang="en-US" sz="1600">
         <a:solidFill>
           <a:schemeClr val="dk1"/>
         </a:solidFill>
@@ -458,13 +458,13 @@
     <a:lstStyle/>
     <a:p>
       <a:pPr>
-        <a:defRPr sz="1400">
+        <a:defRPr sz="1600">
           <a:solidFill>
             <a:schemeClr val="dk1"/>
           </a:solidFill>
         </a:defRPr>
       </a:pPr>
-      <a:endParaRPr lang="en-US" sz="1400">
+      <a:endParaRPr lang="en-US" sz="1600">
         <a:solidFill>
           <a:schemeClr val="dk1"/>
         </a:solidFill>
@@ -2326,15 +2326,15 @@
         </p:nvSpPr>
         <p:spPr>
           <a:xfrm>
-            <a:off x="457200" y="365760"/>
-            <a:ext cx="11274552" cy="1051560"/>
+            <a:off x="822960" y="2377440"/>
+            <a:ext cx="10515600" cy="685800"/>
           </a:xfrm>
         </p:spPr>
         <p:txBody>
           <a:bodyPr anchor="t"/>
           <a:lstStyle>
             <a:lvl1pPr algn="l">
-              <a:defRPr sz="2800" b="1">
+              <a:defRPr sz="4000" b="1">
                 <a:solidFill>
                   <a:schemeClr val="dk2"/>
                 </a:solidFill>
@@ -2362,20 +2362,18 @@
         </p:nvSpPr>
         <p:spPr>
           <a:xfrm>
-            <a:off x="1371600" y="3886200"/>
-            <a:ext cx="6400800" cy="1752600"/>
+            <a:off x="822960" y="3172968"/>
+            <a:ext cx="10515600" cy="502920"/>
           </a:xfrm>
         </p:spPr>
         <p:txBody>
-          <a:bodyPr/>
+          <a:bodyPr anchor="t"/>
           <a:lstStyle>
-            <a:lvl1pPr marL="0" indent="0" algn="ctr">
+            <a:lvl1pPr marL="0" indent="0" algn="l">
               <a:buNone/>
-              <a:defRPr>
+              <a:defRPr sz="1800">
                 <a:solidFill>
-                  <a:schemeClr val="tx1">
-                    <a:tint val="75000"/>
-                  </a:schemeClr>
+                  <a:srgbClr val="595F6B"/>
                 </a:solidFill>
               </a:defRPr>
             </a:lvl1pPr>
@@ -2534,6 +2532,33 @@
           </a:p>
         </p:txBody>
       </p:sp>
+      <p:sp>
+        <p:nvSpPr>
+          <p:cNvPr id="7" name="Title Slide Accent"/>
+          <p:cNvSpPr/>
+          <p:nvPr/>
+        </p:nvSpPr>
+        <p:spPr>
+          <a:xfrm>
+            <a:off x="822960" y="2084831"/>
+            <a:ext cx="1097280" cy="54864"/>
+          </a:xfrm>
+          <a:prstGeom prst="rect">
+            <a:avLst/>
+          </a:prstGeom>
+          <a:solidFill>
+            <a:schemeClr val="accent2"/>
+          </a:solidFill>
+          <a:ln>
+            <a:noFill/>
+          </a:ln>
+        </p:spPr>
+        <p:txBody>
+          <a:bodyPr/>
+          <a:lstStyle/>
+          <a:p/>
+        </p:txBody>
+      </p:sp>
     </p:spTree>
     <p:extLst>
       <p:ext uri="{BB962C8B-B14F-4D97-AF65-F5344CB8AC3E}">
@@ -3114,15 +3139,15 @@
         </p:nvSpPr>
         <p:spPr>
           <a:xfrm>
-            <a:off x="457200" y="365760"/>
-            <a:ext cx="11274552" cy="1051560"/>
+            <a:off x="822960" y="2377440"/>
+            <a:ext cx="10515600" cy="685800"/>
           </a:xfrm>
         </p:spPr>
         <p:txBody>
           <a:bodyPr anchor="t"/>
           <a:lstStyle>
             <a:lvl1pPr algn="l">
-              <a:defRPr sz="2800" b="1" cap="all">
+              <a:defRPr sz="4000" b="1" cap="all">
                 <a:solidFill>
                   <a:schemeClr val="dk2"/>
                 </a:solidFill>
@@ -3320,6 +3345,33 @@
             </a:fld>
             <a:endParaRPr lang="en-US"/>
           </a:p>
+        </p:txBody>
+      </p:sp>
+      <p:sp>
+        <p:nvSpPr>
+          <p:cNvPr id="7" name="Section Header Accent"/>
+          <p:cNvSpPr/>
+          <p:nvPr/>
+        </p:nvSpPr>
+        <p:spPr>
+          <a:xfrm>
+            <a:off x="822960" y="2084831"/>
+            <a:ext cx="1097280" cy="54864"/>
+          </a:xfrm>
+          <a:prstGeom prst="rect">
+            <a:avLst/>
+          </a:prstGeom>
+          <a:solidFill>
+            <a:schemeClr val="accent2"/>
+          </a:solidFill>
+          <a:ln>
+            <a:noFill/>
+          </a:ln>
+        </p:spPr>
+        <p:txBody>
+          <a:bodyPr/>
+          <a:lstStyle/>
+          <a:p/>
         </p:txBody>
       </p:sp>
     </p:spTree>
@@ -5355,10 +5407,10 @@
         </p:nvGrpSpPr>
         <p:grpSpPr>
           <a:xfrm>
-            <a:off x="457200" y="1645920"/>
-            <a:ext cx="2686050" cy="1691640"/>
+            <a:off x="457200" y="2895600"/>
+            <a:ext cx="2686050" cy="2026920"/>
             <a:chOff x="0" y="0"/>
-            <a:chExt cx="2686050" cy="1691640"/>
+            <a:chExt cx="2686050" cy="2026920"/>
           </a:xfrm>
         </p:grpSpPr>
         <p:sp>
@@ -5392,7 +5444,7 @@
                 </a:spcAft>
               </a:pPr>
               <a:r>
-                <a:rPr sz="1400" b="1">
+                <a:rPr sz="1600" b="1">
                   <a:solidFill>
                     <a:schemeClr val="lt1"/>
                   </a:solidFill>
@@ -5413,7 +5465,7 @@
           <p:spPr>
             <a:xfrm>
               <a:off x="36576" y="868680"/>
-              <a:ext cx="2539746" cy="822960"/>
+              <a:ext cx="2539746" cy="1158240"/>
             </a:xfrm>
             <a:prstGeom prst="rect">
               <a:avLst/>
@@ -5438,7 +5490,7 @@
                 </a:spcAft>
               </a:pPr>
               <a:r>
-                <a:rPr sz="1400" b="0">
+                <a:rPr sz="1600" b="0">
                   <a:solidFill>
                     <a:schemeClr val="dk1">
                       <a:lumMod val="65000"/>
@@ -5462,10 +5514,10 @@
         </p:nvGrpSpPr>
         <p:grpSpPr>
           <a:xfrm>
-            <a:off x="3344418" y="1645920"/>
-            <a:ext cx="2686050" cy="1691640"/>
+            <a:off x="3344418" y="2895600"/>
+            <a:ext cx="2686050" cy="2026920"/>
             <a:chOff x="0" y="0"/>
-            <a:chExt cx="2686050" cy="1691640"/>
+            <a:chExt cx="2686050" cy="2026920"/>
           </a:xfrm>
         </p:grpSpPr>
         <p:sp>
@@ -5499,7 +5551,7 @@
                 </a:spcAft>
               </a:pPr>
               <a:r>
-                <a:rPr sz="1400" b="1">
+                <a:rPr sz="1600" b="1">
                   <a:solidFill>
                     <a:schemeClr val="lt1"/>
                   </a:solidFill>
@@ -5520,7 +5572,7 @@
           <p:spPr>
             <a:xfrm>
               <a:off x="36576" y="868680"/>
-              <a:ext cx="2539746" cy="822960"/>
+              <a:ext cx="2539746" cy="1158240"/>
             </a:xfrm>
             <a:prstGeom prst="rect">
               <a:avLst/>
@@ -5545,7 +5597,7 @@
                 </a:spcAft>
               </a:pPr>
               <a:r>
-                <a:rPr sz="1400" b="0">
+                <a:rPr sz="1600" b="0">
                   <a:solidFill>
                     <a:schemeClr val="dk1">
                       <a:lumMod val="65000"/>
@@ -5569,10 +5621,10 @@
         </p:nvGrpSpPr>
         <p:grpSpPr>
           <a:xfrm>
-            <a:off x="6231636" y="1645920"/>
-            <a:ext cx="2686050" cy="1691640"/>
+            <a:off x="6231636" y="2895600"/>
+            <a:ext cx="2686050" cy="2026920"/>
             <a:chOff x="0" y="0"/>
-            <a:chExt cx="2686050" cy="1691640"/>
+            <a:chExt cx="2686050" cy="2026920"/>
           </a:xfrm>
         </p:grpSpPr>
         <p:sp>
@@ -5606,7 +5658,7 @@
                 </a:spcAft>
               </a:pPr>
               <a:r>
-                <a:rPr sz="1400" b="1">
+                <a:rPr sz="1600" b="1">
                   <a:solidFill>
                     <a:schemeClr val="dk1"/>
                   </a:solidFill>
@@ -5627,7 +5679,7 @@
           <p:spPr>
             <a:xfrm>
               <a:off x="36576" y="868680"/>
-              <a:ext cx="2539746" cy="822960"/>
+              <a:ext cx="2539746" cy="1158240"/>
             </a:xfrm>
             <a:prstGeom prst="rect">
               <a:avLst/>
@@ -5652,7 +5704,7 @@
                 </a:spcAft>
               </a:pPr>
               <a:r>
-                <a:rPr sz="1400" b="0">
+                <a:rPr sz="1600" b="0">
                   <a:solidFill>
                     <a:schemeClr val="dk1">
                       <a:lumMod val="65000"/>
@@ -5676,10 +5728,10 @@
         </p:nvGrpSpPr>
         <p:grpSpPr>
           <a:xfrm>
-            <a:off x="9118854" y="1645920"/>
-            <a:ext cx="2686050" cy="1691640"/>
+            <a:off x="9118854" y="2895600"/>
+            <a:ext cx="2686050" cy="2026920"/>
             <a:chOff x="0" y="0"/>
-            <a:chExt cx="2686050" cy="1691640"/>
+            <a:chExt cx="2686050" cy="2026920"/>
           </a:xfrm>
         </p:grpSpPr>
         <p:sp>
@@ -5713,7 +5765,7 @@
                 </a:spcAft>
               </a:pPr>
               <a:r>
-                <a:rPr sz="1400" b="1">
+                <a:rPr sz="1600" b="1">
                   <a:solidFill>
                     <a:schemeClr val="lt1"/>
                   </a:solidFill>
@@ -5734,7 +5786,7 @@
           <p:spPr>
             <a:xfrm>
               <a:off x="36576" y="868680"/>
-              <a:ext cx="2539746" cy="822960"/>
+              <a:ext cx="2539746" cy="1158240"/>
             </a:xfrm>
             <a:prstGeom prst="rect">
               <a:avLst/>
@@ -5759,7 +5811,7 @@
                 </a:spcAft>
               </a:pPr>
               <a:r>
-                <a:rPr sz="1400" b="0">
+                <a:rPr sz="1600" b="0">
                   <a:solidFill>
                     <a:schemeClr val="dk1">
                       <a:lumMod val="65000"/>
@@ -5827,7 +5879,7 @@
         </p:nvCxnSpPr>
         <p:spPr>
           <a:xfrm>
-            <a:off x="2674620" y="2057400"/>
+            <a:off x="2674620" y="3287268"/>
             <a:ext cx="3008376" cy="0"/>
           </a:xfrm>
           <a:prstGeom prst="line">
@@ -5850,10 +5902,10 @@
         </p:nvGrpSpPr>
         <p:grpSpPr>
           <a:xfrm>
-            <a:off x="457200" y="1645920"/>
-            <a:ext cx="3611879" cy="1975104"/>
+            <a:off x="457200" y="2875788"/>
+            <a:ext cx="3611879" cy="2066544"/>
             <a:chOff x="0" y="0"/>
-            <a:chExt cx="3611879" cy="1975104"/>
+            <a:chExt cx="3611879" cy="2066544"/>
           </a:xfrm>
         </p:grpSpPr>
         <p:sp>
@@ -5887,7 +5939,7 @@
                 </a:spcAft>
               </a:pPr>
               <a:r>
-                <a:rPr sz="1400" b="1">
+                <a:rPr sz="1600" b="1">
                   <a:solidFill>
                     <a:schemeClr val="lt1"/>
                   </a:solidFill>
@@ -5908,7 +5960,7 @@
           <p:spPr>
             <a:xfrm>
               <a:off x="0" y="932688"/>
-              <a:ext cx="3611879" cy="396239"/>
+              <a:ext cx="3611879" cy="426720"/>
             </a:xfrm>
             <a:prstGeom prst="rect">
               <a:avLst/>
@@ -5933,7 +5985,7 @@
                 </a:spcAft>
               </a:pPr>
               <a:r>
-                <a:rPr sz="1400" b="1">
+                <a:rPr sz="1600" b="1">
                   <a:solidFill>
                     <a:schemeClr val="dk1"/>
                   </a:solidFill>
@@ -5953,8 +6005,8 @@
           </p:nvSpPr>
           <p:spPr>
             <a:xfrm>
-              <a:off x="18288" y="1365504"/>
-              <a:ext cx="3575303" cy="609600"/>
+              <a:off x="18288" y="1395984"/>
+              <a:ext cx="3575303" cy="670560"/>
             </a:xfrm>
             <a:prstGeom prst="rect">
               <a:avLst/>
@@ -5979,7 +6031,7 @@
                 </a:spcAft>
               </a:pPr>
               <a:r>
-                <a:rPr sz="1400" b="0">
+                <a:rPr sz="1600" b="0">
                   <a:solidFill>
                     <a:schemeClr val="dk1">
                       <a:lumMod val="65000"/>
@@ -6003,7 +6055,7 @@
         </p:nvCxnSpPr>
         <p:spPr>
           <a:xfrm>
-            <a:off x="6505956" y="2057400"/>
+            <a:off x="6505956" y="3287268"/>
             <a:ext cx="3008376" cy="0"/>
           </a:xfrm>
           <a:prstGeom prst="line">
@@ -6026,10 +6078,10 @@
         </p:nvGrpSpPr>
         <p:grpSpPr>
           <a:xfrm>
-            <a:off x="4288536" y="1645920"/>
-            <a:ext cx="3611879" cy="1975104"/>
+            <a:off x="4288536" y="2875788"/>
+            <a:ext cx="3611879" cy="2066544"/>
             <a:chOff x="0" y="0"/>
-            <a:chExt cx="3611879" cy="1975104"/>
+            <a:chExt cx="3611879" cy="2066544"/>
           </a:xfrm>
         </p:grpSpPr>
         <p:sp>
@@ -6063,7 +6115,7 @@
                 </a:spcAft>
               </a:pPr>
               <a:r>
-                <a:rPr sz="1400" b="1">
+                <a:rPr sz="1600" b="1">
                   <a:solidFill>
                     <a:schemeClr val="lt1"/>
                   </a:solidFill>
@@ -6084,7 +6136,7 @@
           <p:spPr>
             <a:xfrm>
               <a:off x="0" y="932688"/>
-              <a:ext cx="3611879" cy="396239"/>
+              <a:ext cx="3611879" cy="426720"/>
             </a:xfrm>
             <a:prstGeom prst="rect">
               <a:avLst/>
@@ -6109,7 +6161,7 @@
                 </a:spcAft>
               </a:pPr>
               <a:r>
-                <a:rPr sz="1400" b="1">
+                <a:rPr sz="1600" b="1">
                   <a:solidFill>
                     <a:schemeClr val="dk1"/>
                   </a:solidFill>
@@ -6129,8 +6181,8 @@
           </p:nvSpPr>
           <p:spPr>
             <a:xfrm>
-              <a:off x="18287" y="1365504"/>
-              <a:ext cx="3575303" cy="609600"/>
+              <a:off x="18287" y="1395984"/>
+              <a:ext cx="3575303" cy="670560"/>
             </a:xfrm>
             <a:prstGeom prst="rect">
               <a:avLst/>
@@ -6155,7 +6207,7 @@
                 </a:spcAft>
               </a:pPr>
               <a:r>
-                <a:rPr sz="1400" b="0">
+                <a:rPr sz="1600" b="0">
                   <a:solidFill>
                     <a:schemeClr val="dk1">
                       <a:lumMod val="65000"/>
@@ -6179,10 +6231,10 @@
         </p:nvGrpSpPr>
         <p:grpSpPr>
           <a:xfrm>
-            <a:off x="8119871" y="1645920"/>
-            <a:ext cx="3611879" cy="1975104"/>
+            <a:off x="8119871" y="2875788"/>
+            <a:ext cx="3611879" cy="2066544"/>
             <a:chOff x="0" y="0"/>
-            <a:chExt cx="3611879" cy="1975104"/>
+            <a:chExt cx="3611879" cy="2066544"/>
           </a:xfrm>
         </p:grpSpPr>
         <p:sp>
@@ -6216,7 +6268,7 @@
                 </a:spcAft>
               </a:pPr>
               <a:r>
-                <a:rPr sz="1400" b="1">
+                <a:rPr sz="1600" b="1">
                   <a:solidFill>
                     <a:schemeClr val="lt1"/>
                   </a:solidFill>
@@ -6237,7 +6289,7 @@
           <p:spPr>
             <a:xfrm>
               <a:off x="0" y="932688"/>
-              <a:ext cx="3611879" cy="396239"/>
+              <a:ext cx="3611879" cy="426720"/>
             </a:xfrm>
             <a:prstGeom prst="rect">
               <a:avLst/>
@@ -6262,7 +6314,7 @@
                 </a:spcAft>
               </a:pPr>
               <a:r>
-                <a:rPr sz="1400" b="1">
+                <a:rPr sz="1600" b="1">
                   <a:solidFill>
                     <a:schemeClr val="dk1"/>
                   </a:solidFill>
@@ -6282,8 +6334,8 @@
           </p:nvSpPr>
           <p:spPr>
             <a:xfrm>
-              <a:off x="18288" y="1365504"/>
-              <a:ext cx="3575303" cy="609600"/>
+              <a:off x="18288" y="1395984"/>
+              <a:ext cx="3575303" cy="670560"/>
             </a:xfrm>
             <a:prstGeom prst="rect">
               <a:avLst/>
@@ -6308,7 +6360,7 @@
                 </a:spcAft>
               </a:pPr>
               <a:r>
-                <a:rPr sz="1400" b="0">
+                <a:rPr sz="1600" b="0">
                   <a:solidFill>
                     <a:schemeClr val="dk1">
                       <a:lumMod val="65000"/>
@@ -6376,10 +6428,10 @@
         </p:nvGrpSpPr>
         <p:grpSpPr>
           <a:xfrm>
-            <a:off x="457200" y="1645920"/>
-            <a:ext cx="3575304" cy="1261872"/>
+            <a:off x="457200" y="2889504"/>
+            <a:ext cx="3575304" cy="1353312"/>
             <a:chOff x="0" y="0"/>
-            <a:chExt cx="3575304" cy="1261872"/>
+            <a:chExt cx="3575304" cy="1353312"/>
           </a:xfrm>
         </p:grpSpPr>
         <p:sp>
@@ -6391,11 +6443,11 @@
           <p:spPr>
             <a:xfrm>
               <a:off x="0" y="0"/>
-              <a:ext cx="3575304" cy="1261872"/>
+              <a:ext cx="3575304" cy="1353312"/>
             </a:xfrm>
             <a:prstGeom prst="roundRect">
               <a:avLst>
-                <a:gd name="adj" fmla="val 4348"/>
+                <a:gd name="adj" fmla="val 4054"/>
               </a:avLst>
             </a:prstGeom>
             <a:solidFill>
@@ -6424,7 +6476,7 @@
           <p:spPr>
             <a:xfrm>
               <a:off x="109728" y="73152"/>
-              <a:ext cx="3355848" cy="396239"/>
+              <a:ext cx="3355848" cy="426720"/>
             </a:xfrm>
             <a:prstGeom prst="rect">
               <a:avLst/>
@@ -6449,7 +6501,7 @@
                 </a:spcAft>
               </a:pPr>
               <a:r>
-                <a:rPr sz="1400" b="1">
+                <a:rPr sz="1600" b="1">
                   <a:solidFill>
                     <a:schemeClr val="dk1"/>
                   </a:solidFill>
@@ -6469,8 +6521,8 @@
           </p:nvSpPr>
           <p:spPr>
             <a:xfrm>
-              <a:off x="109728" y="505967"/>
-              <a:ext cx="3355848" cy="682752"/>
+              <a:off x="109728" y="536448"/>
+              <a:ext cx="3355848" cy="743712"/>
             </a:xfrm>
             <a:prstGeom prst="rect">
               <a:avLst/>
@@ -6495,7 +6547,7 @@
                 </a:spcAft>
               </a:pPr>
               <a:r>
-                <a:rPr sz="1400" b="0">
+                <a:rPr sz="1600" b="0">
                   <a:solidFill>
                     <a:schemeClr val="dk1"/>
                   </a:solidFill>
@@ -6516,7 +6568,7 @@
         </p:nvSpPr>
         <p:spPr>
           <a:xfrm rot="5400000">
-            <a:off x="4069080" y="2167128"/>
+            <a:off x="4069080" y="3456432"/>
             <a:ext cx="219456" cy="219456"/>
           </a:xfrm>
           <a:prstGeom prst="triangle">
@@ -6542,10 +6594,10 @@
         </p:nvGrpSpPr>
         <p:grpSpPr>
           <a:xfrm>
-            <a:off x="4306824" y="1645920"/>
-            <a:ext cx="3575304" cy="1261872"/>
+            <a:off x="4306824" y="2889504"/>
+            <a:ext cx="3575304" cy="1353312"/>
             <a:chOff x="0" y="0"/>
-            <a:chExt cx="3575304" cy="1261872"/>
+            <a:chExt cx="3575304" cy="1353312"/>
           </a:xfrm>
         </p:grpSpPr>
         <p:sp>
@@ -6557,11 +6609,11 @@
           <p:spPr>
             <a:xfrm>
               <a:off x="0" y="0"/>
-              <a:ext cx="3575304" cy="1261872"/>
+              <a:ext cx="3575304" cy="1353312"/>
             </a:xfrm>
             <a:prstGeom prst="roundRect">
               <a:avLst>
-                <a:gd name="adj" fmla="val 4348"/>
+                <a:gd name="adj" fmla="val 4054"/>
               </a:avLst>
             </a:prstGeom>
             <a:solidFill>
@@ -6590,7 +6642,7 @@
           <p:spPr>
             <a:xfrm>
               <a:off x="109728" y="73152"/>
-              <a:ext cx="3355848" cy="396239"/>
+              <a:ext cx="3355848" cy="426720"/>
             </a:xfrm>
             <a:prstGeom prst="rect">
               <a:avLst/>
@@ -6615,7 +6667,7 @@
                 </a:spcAft>
               </a:pPr>
               <a:r>
-                <a:rPr sz="1400" b="1">
+                <a:rPr sz="1600" b="1">
                   <a:solidFill>
                     <a:schemeClr val="dk1"/>
                   </a:solidFill>
@@ -6635,8 +6687,8 @@
           </p:nvSpPr>
           <p:spPr>
             <a:xfrm>
-              <a:off x="109728" y="505967"/>
-              <a:ext cx="3355848" cy="682752"/>
+              <a:off x="109728" y="536448"/>
+              <a:ext cx="3355848" cy="743712"/>
             </a:xfrm>
             <a:prstGeom prst="rect">
               <a:avLst/>
@@ -6661,7 +6713,7 @@
                 </a:spcAft>
               </a:pPr>
               <a:r>
-                <a:rPr sz="1400" b="0">
+                <a:rPr sz="1600" b="0">
                   <a:solidFill>
                     <a:schemeClr val="dk1"/>
                   </a:solidFill>
@@ -6682,7 +6734,7 @@
         </p:nvSpPr>
         <p:spPr>
           <a:xfrm rot="5400000">
-            <a:off x="7918704" y="2167128"/>
+            <a:off x="7918704" y="3456432"/>
             <a:ext cx="219456" cy="219456"/>
           </a:xfrm>
           <a:prstGeom prst="triangle">
@@ -6708,10 +6760,10 @@
         </p:nvGrpSpPr>
         <p:grpSpPr>
           <a:xfrm>
-            <a:off x="8156448" y="1645920"/>
-            <a:ext cx="3575304" cy="1261872"/>
+            <a:off x="8156448" y="2889504"/>
+            <a:ext cx="3575304" cy="1353312"/>
             <a:chOff x="0" y="0"/>
-            <a:chExt cx="3575304" cy="1261872"/>
+            <a:chExt cx="3575304" cy="1353312"/>
           </a:xfrm>
         </p:grpSpPr>
         <p:sp>
@@ -6723,11 +6775,11 @@
           <p:spPr>
             <a:xfrm>
               <a:off x="0" y="0"/>
-              <a:ext cx="3575304" cy="1261872"/>
+              <a:ext cx="3575304" cy="1353312"/>
             </a:xfrm>
             <a:prstGeom prst="roundRect">
               <a:avLst>
-                <a:gd name="adj" fmla="val 4348"/>
+                <a:gd name="adj" fmla="val 4054"/>
               </a:avLst>
             </a:prstGeom>
             <a:solidFill>
@@ -6756,7 +6808,7 @@
           <p:spPr>
             <a:xfrm>
               <a:off x="109727" y="73152"/>
-              <a:ext cx="3355848" cy="396239"/>
+              <a:ext cx="3355848" cy="426720"/>
             </a:xfrm>
             <a:prstGeom prst="rect">
               <a:avLst/>
@@ -6781,7 +6833,7 @@
                 </a:spcAft>
               </a:pPr>
               <a:r>
-                <a:rPr sz="1400" b="1">
+                <a:rPr sz="1600" b="1">
                   <a:solidFill>
                     <a:schemeClr val="dk1"/>
                   </a:solidFill>
@@ -6801,8 +6853,8 @@
           </p:nvSpPr>
           <p:spPr>
             <a:xfrm>
-              <a:off x="109727" y="505967"/>
-              <a:ext cx="3355848" cy="682752"/>
+              <a:off x="109727" y="536448"/>
+              <a:ext cx="3355848" cy="743712"/>
             </a:xfrm>
             <a:prstGeom prst="rect">
               <a:avLst/>
@@ -6827,7 +6879,7 @@
                 </a:spcAft>
               </a:pPr>
               <a:r>
-                <a:rPr sz="1400" b="0">
+                <a:rPr sz="1600" b="0">
                   <a:solidFill>
                     <a:schemeClr val="dk1"/>
                   </a:solidFill>
@@ -6848,7 +6900,7 @@
         </p:nvSpPr>
         <p:spPr>
           <a:xfrm>
-            <a:off x="457200" y="3136392"/>
+            <a:off x="457200" y="4471416"/>
             <a:ext cx="11274552" cy="457200"/>
           </a:xfrm>
           <a:prstGeom prst="roundRect">
@@ -6883,7 +6935,7 @@
         </p:nvSpPr>
         <p:spPr>
           <a:xfrm>
-            <a:off x="457200" y="3136392"/>
+            <a:off x="457200" y="4471416"/>
             <a:ext cx="82296" cy="457200"/>
           </a:xfrm>
           <a:prstGeom prst="rect">
@@ -6909,7 +6961,7 @@
         </p:nvSpPr>
         <p:spPr>
           <a:xfrm>
-            <a:off x="603504" y="3136392"/>
+            <a:off x="603504" y="4471416"/>
             <a:ext cx="11073384" cy="457200"/>
           </a:xfrm>
           <a:prstGeom prst="rect">
@@ -6935,7 +6987,7 @@
               </a:spcAft>
             </a:pPr>
             <a:r>
-              <a:rPr sz="1400" b="1">
+              <a:rPr sz="1600" b="1">
                 <a:solidFill>
                   <a:schemeClr val="dk1"/>
                 </a:solidFill>
@@ -6999,10 +7051,10 @@
         </p:nvGrpSpPr>
         <p:grpSpPr>
           <a:xfrm>
-            <a:off x="457200" y="1645920"/>
-            <a:ext cx="5308092" cy="1952752"/>
+            <a:off x="457200" y="2724404"/>
+            <a:ext cx="5308092" cy="2369312"/>
             <a:chOff x="0" y="0"/>
-            <a:chExt cx="5308092" cy="1952752"/>
+            <a:chExt cx="5308092" cy="2369312"/>
           </a:xfrm>
         </p:grpSpPr>
         <p:sp>
@@ -7014,11 +7066,11 @@
           <p:spPr>
             <a:xfrm>
               <a:off x="0" y="0"/>
-              <a:ext cx="5308092" cy="1952752"/>
+              <a:ext cx="5308092" cy="2369312"/>
             </a:xfrm>
             <a:prstGeom prst="roundRect">
               <a:avLst>
-                <a:gd name="adj" fmla="val 2810"/>
+                <a:gd name="adj" fmla="val 2316"/>
               </a:avLst>
             </a:prstGeom>
             <a:solidFill>
@@ -7074,7 +7126,7 @@
                 </a:spcAft>
               </a:pPr>
               <a:r>
-                <a:rPr sz="1800" b="1">
+                <a:rPr sz="2000" b="1">
                   <a:solidFill>
                     <a:schemeClr val="lt1"/>
                   </a:solidFill>
@@ -7095,7 +7147,7 @@
           <p:spPr>
             <a:xfrm>
               <a:off x="155448" y="530352"/>
-              <a:ext cx="4997196" cy="1367535"/>
+              <a:ext cx="4997196" cy="1784096"/>
             </a:xfrm>
             <a:prstGeom prst="rect">
               <a:avLst/>
@@ -7121,7 +7173,7 @@
                 <a:buChar char="•"/>
               </a:pPr>
               <a:r>
-                <a:rPr sz="1400" b="0">
+                <a:rPr sz="1600" b="0">
                   <a:solidFill>
                     <a:schemeClr val="dk1"/>
                   </a:solidFill>
@@ -7142,7 +7194,7 @@
                 <a:buChar char="•"/>
               </a:pPr>
               <a:r>
-                <a:rPr sz="1400" b="0">
+                <a:rPr sz="1600" b="0">
                   <a:solidFill>
                     <a:schemeClr val="dk1"/>
                   </a:solidFill>
@@ -7163,7 +7215,7 @@
                 <a:buChar char="•"/>
               </a:pPr>
               <a:r>
-                <a:rPr sz="1400" b="0">
+                <a:rPr sz="1600" b="0">
                   <a:solidFill>
                     <a:schemeClr val="dk1"/>
                   </a:solidFill>
@@ -7184,7 +7236,7 @@
                 <a:buChar char="•"/>
               </a:pPr>
               <a:r>
-                <a:rPr sz="1400" b="0">
+                <a:rPr sz="1600" b="0">
                   <a:solidFill>
                     <a:schemeClr val="dk1"/>
                   </a:solidFill>
@@ -7192,6 +7244,27 @@
                   <a:ea typeface="Yu Gothic"/>
                 </a:rPr>
                 <a:t>進捗を横断して把握しにくい</a:t>
+              </a:r>
+            </a:p>
+            <a:p>
+              <a:pPr algn="l" marL="201168" indent="-109728">
+                <a:lnSpc>
+                  <a:spcPct val="100000"/>
+                </a:lnSpc>
+                <a:spcAft>
+                  <a:spcPts val="400"/>
+                </a:spcAft>
+                <a:buChar char="•"/>
+              </a:pPr>
+              <a:r>
+                <a:rPr sz="1600" b="0">
+                  <a:solidFill>
+                    <a:schemeClr val="dk1"/>
+                  </a:solidFill>
+                  <a:latin typeface="Yu Gothic"/>
+                  <a:ea typeface="Yu Gothic"/>
+                </a:rPr>
+                <a:t>対応の重複に気付きにくい</a:t>
               </a:r>
             </a:p>
           </p:txBody>
@@ -7205,10 +7278,10 @@
         </p:nvGrpSpPr>
         <p:grpSpPr>
           <a:xfrm>
-            <a:off x="6423659" y="1645920"/>
-            <a:ext cx="5308092" cy="1952752"/>
+            <a:off x="6423659" y="2724404"/>
+            <a:ext cx="5308092" cy="2369312"/>
             <a:chOff x="0" y="0"/>
-            <a:chExt cx="5308092" cy="1952752"/>
+            <a:chExt cx="5308092" cy="2369312"/>
           </a:xfrm>
         </p:grpSpPr>
         <p:sp>
@@ -7220,11 +7293,11 @@
           <p:spPr>
             <a:xfrm>
               <a:off x="0" y="0"/>
-              <a:ext cx="5308092" cy="1952752"/>
+              <a:ext cx="5308092" cy="2369312"/>
             </a:xfrm>
             <a:prstGeom prst="roundRect">
               <a:avLst>
-                <a:gd name="adj" fmla="val 2810"/>
+                <a:gd name="adj" fmla="val 2316"/>
               </a:avLst>
             </a:prstGeom>
             <a:solidFill>
@@ -7275,7 +7348,7 @@
                 </a:spcAft>
               </a:pPr>
               <a:r>
-                <a:rPr sz="1800" b="1">
+                <a:rPr sz="2000" b="1">
                   <a:solidFill>
                     <a:schemeClr val="accent2"/>
                   </a:solidFill>
@@ -7296,7 +7369,7 @@
           <p:spPr>
             <a:xfrm>
               <a:off x="155448" y="530352"/>
-              <a:ext cx="4997196" cy="1367535"/>
+              <a:ext cx="4997196" cy="1784096"/>
             </a:xfrm>
             <a:prstGeom prst="rect">
               <a:avLst/>
@@ -7322,7 +7395,7 @@
                 <a:buChar char="•"/>
               </a:pPr>
               <a:r>
-                <a:rPr sz="1400" b="0">
+                <a:rPr sz="1600" b="0">
                   <a:solidFill>
                     <a:schemeClr val="dk1"/>
                   </a:solidFill>
@@ -7343,7 +7416,7 @@
                 <a:buChar char="•"/>
               </a:pPr>
               <a:r>
-                <a:rPr sz="1400" b="0">
+                <a:rPr sz="1600" b="0">
                   <a:solidFill>
                     <a:schemeClr val="dk1"/>
                   </a:solidFill>
@@ -7364,7 +7437,7 @@
                 <a:buChar char="•"/>
               </a:pPr>
               <a:r>
-                <a:rPr sz="1400" b="0">
+                <a:rPr sz="1600" b="0">
                   <a:solidFill>
                     <a:schemeClr val="dk1"/>
                   </a:solidFill>
@@ -7385,7 +7458,7 @@
                 <a:buChar char="•"/>
               </a:pPr>
               <a:r>
-                <a:rPr sz="1400" b="0">
+                <a:rPr sz="1600" b="0">
                   <a:solidFill>
                     <a:schemeClr val="dk1"/>
                   </a:solidFill>
@@ -7395,6 +7468,27 @@
                 <a:t>進捗を共通台帳で確認</a:t>
               </a:r>
             </a:p>
+            <a:p>
+              <a:pPr algn="l" marL="201168" indent="-109728">
+                <a:lnSpc>
+                  <a:spcPct val="100000"/>
+                </a:lnSpc>
+                <a:spcAft>
+                  <a:spcPts val="400"/>
+                </a:spcAft>
+                <a:buChar char="•"/>
+              </a:pPr>
+              <a:r>
+                <a:rPr sz="1600" b="0">
+                  <a:solidFill>
+                    <a:schemeClr val="dk1"/>
+                  </a:solidFill>
+                  <a:latin typeface="Yu Gothic"/>
+                  <a:ea typeface="Yu Gothic"/>
+                </a:rPr>
+                <a:t>改善に必要な傾向を集計</a:t>
+              </a:r>
+            </a:p>
           </p:txBody>
         </p:sp>
       </p:grpSp>
@@ -7406,7 +7500,7 @@
         </p:nvSpPr>
         <p:spPr>
           <a:xfrm>
-            <a:off x="5911596" y="2466075"/>
+            <a:off x="5911596" y="3719515"/>
             <a:ext cx="365760" cy="256032"/>
           </a:xfrm>
           <a:prstGeom prst="rightArrow">
@@ -7476,10 +7570,10 @@
         </p:nvGrpSpPr>
         <p:grpSpPr>
           <a:xfrm>
-            <a:off x="457200" y="1645920"/>
-            <a:ext cx="5399532" cy="1952752"/>
+            <a:off x="457200" y="2724404"/>
+            <a:ext cx="5399532" cy="2369312"/>
             <a:chOff x="0" y="0"/>
-            <a:chExt cx="5399532" cy="1952752"/>
+            <a:chExt cx="5399532" cy="2369312"/>
           </a:xfrm>
         </p:grpSpPr>
         <p:sp>
@@ -7491,11 +7585,11 @@
           <p:spPr>
             <a:xfrm>
               <a:off x="0" y="0"/>
-              <a:ext cx="5399532" cy="1952752"/>
+              <a:ext cx="5399532" cy="2369312"/>
             </a:xfrm>
             <a:prstGeom prst="roundRect">
               <a:avLst>
-                <a:gd name="adj" fmla="val 2810"/>
+                <a:gd name="adj" fmla="val 2316"/>
               </a:avLst>
             </a:prstGeom>
             <a:solidFill>
@@ -7548,7 +7642,7 @@
                 </a:spcAft>
               </a:pPr>
               <a:r>
-                <a:rPr sz="1800" b="1">
+                <a:rPr sz="2000" b="1">
                   <a:solidFill>
                     <a:schemeClr val="lt1"/>
                   </a:solidFill>
@@ -7569,7 +7663,7 @@
           <p:spPr>
             <a:xfrm>
               <a:off x="155448" y="530352"/>
-              <a:ext cx="5088636" cy="1367535"/>
+              <a:ext cx="5088636" cy="1784096"/>
             </a:xfrm>
             <a:prstGeom prst="rect">
               <a:avLst/>
@@ -7595,7 +7689,7 @@
                 <a:buChar char="•"/>
               </a:pPr>
               <a:r>
-                <a:rPr sz="1400" b="0">
+                <a:rPr sz="1600" b="0">
                   <a:solidFill>
                     <a:schemeClr val="dk1"/>
                   </a:solidFill>
@@ -7616,7 +7710,7 @@
                 <a:buChar char="•"/>
               </a:pPr>
               <a:r>
-                <a:rPr sz="1400" b="0">
+                <a:rPr sz="1600" b="0">
                   <a:solidFill>
                     <a:schemeClr val="dk1"/>
                   </a:solidFill>
@@ -7637,7 +7731,7 @@
                 <a:buChar char="•"/>
               </a:pPr>
               <a:r>
-                <a:rPr sz="1400" b="0">
+                <a:rPr sz="1600" b="0">
                   <a:solidFill>
                     <a:schemeClr val="dk1"/>
                   </a:solidFill>
@@ -7658,7 +7752,7 @@
                 <a:buChar char="•"/>
               </a:pPr>
               <a:r>
-                <a:rPr sz="1400" b="0">
+                <a:rPr sz="1600" b="0">
                   <a:solidFill>
                     <a:schemeClr val="dk1"/>
                   </a:solidFill>
@@ -7666,6 +7760,27 @@
                   <a:ea typeface="Yu Gothic"/>
                 </a:rPr>
                 <a:t>不足情報の確認</a:t>
+              </a:r>
+            </a:p>
+            <a:p>
+              <a:pPr algn="l" marL="201168" indent="-109728">
+                <a:lnSpc>
+                  <a:spcPct val="100000"/>
+                </a:lnSpc>
+                <a:spcAft>
+                  <a:spcPts val="400"/>
+                </a:spcAft>
+                <a:buChar char="•"/>
+              </a:pPr>
+              <a:r>
+                <a:rPr sz="1600" b="0">
+                  <a:solidFill>
+                    <a:schemeClr val="dk1"/>
+                  </a:solidFill>
+                  <a:latin typeface="Yu Gothic"/>
+                  <a:ea typeface="Yu Gothic"/>
+                </a:rPr>
+                <a:t>定型案内をFAQへ誘導</a:t>
               </a:r>
             </a:p>
           </p:txBody>
@@ -7679,10 +7794,10 @@
         </p:nvGrpSpPr>
         <p:grpSpPr>
           <a:xfrm>
-            <a:off x="6332220" y="1645920"/>
-            <a:ext cx="5399532" cy="1952752"/>
+            <a:off x="6332220" y="2724404"/>
+            <a:ext cx="5399532" cy="2369312"/>
             <a:chOff x="0" y="0"/>
-            <a:chExt cx="5399532" cy="1952752"/>
+            <a:chExt cx="5399532" cy="2369312"/>
           </a:xfrm>
         </p:grpSpPr>
         <p:sp>
@@ -7694,11 +7809,11 @@
           <p:spPr>
             <a:xfrm>
               <a:off x="0" y="0"/>
-              <a:ext cx="5399532" cy="1952752"/>
+              <a:ext cx="5399532" cy="2369312"/>
             </a:xfrm>
             <a:prstGeom prst="roundRect">
               <a:avLst>
-                <a:gd name="adj" fmla="val 2810"/>
+                <a:gd name="adj" fmla="val 2316"/>
               </a:avLst>
             </a:prstGeom>
             <a:solidFill>
@@ -7751,7 +7866,7 @@
                 </a:spcAft>
               </a:pPr>
               <a:r>
-                <a:rPr sz="1800" b="1">
+                <a:rPr sz="2000" b="1">
                   <a:solidFill>
                     <a:schemeClr val="lt1"/>
                   </a:solidFill>
@@ -7772,7 +7887,7 @@
           <p:spPr>
             <a:xfrm>
               <a:off x="155448" y="530352"/>
-              <a:ext cx="5088636" cy="1367535"/>
+              <a:ext cx="5088636" cy="1784096"/>
             </a:xfrm>
             <a:prstGeom prst="rect">
               <a:avLst/>
@@ -7798,7 +7913,7 @@
                 <a:buChar char="•"/>
               </a:pPr>
               <a:r>
-                <a:rPr sz="1400" b="0">
+                <a:rPr sz="1600" b="0">
                   <a:solidFill>
                     <a:schemeClr val="dk1"/>
                   </a:solidFill>
@@ -7819,7 +7934,7 @@
                 <a:buChar char="•"/>
               </a:pPr>
               <a:r>
-                <a:rPr sz="1400" b="0">
+                <a:rPr sz="1600" b="0">
                   <a:solidFill>
                     <a:schemeClr val="dk1"/>
                   </a:solidFill>
@@ -7840,7 +7955,7 @@
                 <a:buChar char="•"/>
               </a:pPr>
               <a:r>
-                <a:rPr sz="1400" b="0">
+                <a:rPr sz="1600" b="0">
                   <a:solidFill>
                     <a:schemeClr val="dk1"/>
                   </a:solidFill>
@@ -7861,7 +7976,7 @@
                 <a:buChar char="•"/>
               </a:pPr>
               <a:r>
-                <a:rPr sz="1400" b="0">
+                <a:rPr sz="1600" b="0">
                   <a:solidFill>
                     <a:schemeClr val="dk1"/>
                   </a:solidFill>
@@ -7871,6 +7986,27 @@
                 <a:t>FAQへの知見反映</a:t>
               </a:r>
             </a:p>
+            <a:p>
+              <a:pPr algn="l" marL="201168" indent="-109728">
+                <a:lnSpc>
+                  <a:spcPct val="100000"/>
+                </a:lnSpc>
+                <a:spcAft>
+                  <a:spcPts val="400"/>
+                </a:spcAft>
+                <a:buChar char="•"/>
+              </a:pPr>
+              <a:r>
+                <a:rPr sz="1600" b="0">
+                  <a:solidFill>
+                    <a:schemeClr val="dk1"/>
+                  </a:solidFill>
+                  <a:latin typeface="Yu Gothic"/>
+                  <a:ea typeface="Yu Gothic"/>
+                </a:rPr>
+                <a:t>再発防止の改善を提案</a:t>
+              </a:r>
+            </a:p>
           </p:txBody>
         </p:sp>
       </p:grpSp>
@@ -7882,7 +8018,7 @@
         </p:nvSpPr>
         <p:spPr>
           <a:xfrm>
-            <a:off x="5765292" y="2466075"/>
+            <a:off x="5765292" y="3719515"/>
             <a:ext cx="658368" cy="658368"/>
           </a:xfrm>
           <a:prstGeom prst="ellipse">
@@ -7908,7 +8044,7 @@
         </p:nvSpPr>
         <p:spPr>
           <a:xfrm>
-            <a:off x="5765292" y="2466075"/>
+            <a:off x="5765292" y="3719515"/>
             <a:ext cx="658368" cy="658368"/>
           </a:xfrm>
           <a:prstGeom prst="rect">
@@ -7920,7 +8056,7 @@
           </a:ln>
         </p:spPr>
         <p:txBody>
-          <a:bodyPr wrap="square" anchor="t" lIns="109728" rIns="109728" tIns="73152" bIns="73152">
+          <a:bodyPr wrap="square" anchor="ctr" lIns="109728" rIns="109728" tIns="73152" bIns="73152">
             <a:spAutoFit/>
           </a:bodyPr>
           <a:lstStyle/>
@@ -7934,7 +8070,7 @@
               </a:spcAft>
             </a:pPr>
             <a:r>
-              <a:rPr sz="1200" b="1">
+              <a:rPr sz="1300" b="1">
                 <a:solidFill>
                   <a:schemeClr val="lt1"/>
                 </a:solidFill>
@@ -7999,7 +8135,7 @@
         <p:spPr>
           <a:xfrm>
             <a:off x="457200" y="1645920"/>
-            <a:ext cx="11274552" cy="420624"/>
+            <a:ext cx="11274552" cy="451104"/>
           </a:xfrm>
           <a:prstGeom prst="rect">
             <a:avLst/>
@@ -8024,7 +8160,7 @@
               </a:spcAft>
             </a:pPr>
             <a:r>
-              <a:rPr sz="1800" b="1">
+              <a:rPr sz="2000" b="1">
                 <a:solidFill>
                   <a:schemeClr val="dk1"/>
                 </a:solidFill>
@@ -8044,10 +8180,10 @@
         </p:nvGrpSpPr>
         <p:grpSpPr>
           <a:xfrm>
-            <a:off x="1303019" y="2382012"/>
-            <a:ext cx="5116068" cy="1426463"/>
+            <a:off x="1303019" y="2412492"/>
+            <a:ext cx="5116068" cy="1411223"/>
             <a:chOff x="0" y="0"/>
-            <a:chExt cx="5116068" cy="1426463"/>
+            <a:chExt cx="5116068" cy="1411223"/>
           </a:xfrm>
         </p:grpSpPr>
         <p:sp>
@@ -8059,7 +8195,7 @@
           <p:spPr>
             <a:xfrm>
               <a:off x="0" y="0"/>
-              <a:ext cx="5116068" cy="1426463"/>
+              <a:ext cx="5116068" cy="1411223"/>
             </a:xfrm>
             <a:prstGeom prst="rect">
               <a:avLst/>
@@ -8138,7 +8274,7 @@
           <p:spPr>
             <a:xfrm>
               <a:off x="86869" y="397764"/>
-              <a:ext cx="4942331" cy="978407"/>
+              <a:ext cx="4942331" cy="963167"/>
             </a:xfrm>
             <a:prstGeom prst="rect">
               <a:avLst/>
@@ -8164,7 +8300,7 @@
                 <a:buChar char="•"/>
               </a:pPr>
               <a:r>
-                <a:rPr sz="1400" b="0">
+                <a:rPr sz="1600" b="0">
                   <a:solidFill>
                     <a:schemeClr val="dk1"/>
                   </a:solidFill>
@@ -8185,7 +8321,7 @@
                 <a:buChar char="•"/>
               </a:pPr>
               <a:r>
-                <a:rPr sz="1400" b="0">
+                <a:rPr sz="1600" b="0">
                   <a:solidFill>
                     <a:schemeClr val="dk1"/>
                   </a:solidFill>
@@ -8206,10 +8342,10 @@
         </p:nvGrpSpPr>
         <p:grpSpPr>
           <a:xfrm>
-            <a:off x="6464808" y="2382012"/>
-            <a:ext cx="5116068" cy="1426463"/>
+            <a:off x="6464808" y="2412492"/>
+            <a:ext cx="5116068" cy="1411223"/>
             <a:chOff x="0" y="0"/>
-            <a:chExt cx="5116068" cy="1426463"/>
+            <a:chExt cx="5116068" cy="1411223"/>
           </a:xfrm>
         </p:grpSpPr>
         <p:sp>
@@ -8221,7 +8357,7 @@
           <p:spPr>
             <a:xfrm>
               <a:off x="0" y="0"/>
-              <a:ext cx="5116068" cy="1426463"/>
+              <a:ext cx="5116068" cy="1411223"/>
             </a:xfrm>
             <a:prstGeom prst="rect">
               <a:avLst/>
@@ -8298,7 +8434,7 @@
           <p:spPr>
             <a:xfrm>
               <a:off x="86868" y="397764"/>
-              <a:ext cx="4942331" cy="978407"/>
+              <a:ext cx="4942331" cy="963167"/>
             </a:xfrm>
             <a:prstGeom prst="rect">
               <a:avLst/>
@@ -8387,10 +8523,10 @@
         </p:nvGrpSpPr>
         <p:grpSpPr>
           <a:xfrm>
-            <a:off x="1303019" y="3854196"/>
-            <a:ext cx="5116068" cy="1426463"/>
+            <a:off x="1303019" y="3869436"/>
+            <a:ext cx="5116068" cy="1411223"/>
             <a:chOff x="0" y="0"/>
-            <a:chExt cx="5116068" cy="1426463"/>
+            <a:chExt cx="5116068" cy="1411223"/>
           </a:xfrm>
         </p:grpSpPr>
         <p:sp>
@@ -8402,7 +8538,7 @@
           <p:spPr>
             <a:xfrm>
               <a:off x="0" y="0"/>
-              <a:ext cx="5116068" cy="1426463"/>
+              <a:ext cx="5116068" cy="1411223"/>
             </a:xfrm>
             <a:prstGeom prst="rect">
               <a:avLst/>
@@ -8434,7 +8570,7 @@
           </p:nvSpPr>
           <p:spPr>
             <a:xfrm>
-              <a:off x="86869" y="50291"/>
+              <a:off x="86869" y="50292"/>
               <a:ext cx="4942331" cy="347472"/>
             </a:xfrm>
             <a:prstGeom prst="rect">
@@ -8480,8 +8616,8 @@
           </p:nvSpPr>
           <p:spPr>
             <a:xfrm>
-              <a:off x="86869" y="397763"/>
-              <a:ext cx="4942331" cy="978407"/>
+              <a:off x="86869" y="397764"/>
+              <a:ext cx="4942331" cy="963167"/>
             </a:xfrm>
             <a:prstGeom prst="rect">
               <a:avLst/>
@@ -8507,7 +8643,7 @@
                 <a:buChar char="•"/>
               </a:pPr>
               <a:r>
-                <a:rPr sz="1400" b="0">
+                <a:rPr sz="1600" b="0">
                   <a:solidFill>
                     <a:schemeClr val="dk1"/>
                   </a:solidFill>
@@ -8528,7 +8664,7 @@
                 <a:buChar char="•"/>
               </a:pPr>
               <a:r>
-                <a:rPr sz="1400" b="0">
+                <a:rPr sz="1600" b="0">
                   <a:solidFill>
                     <a:schemeClr val="dk1"/>
                   </a:solidFill>
@@ -8549,10 +8685,10 @@
         </p:nvGrpSpPr>
         <p:grpSpPr>
           <a:xfrm>
-            <a:off x="6464808" y="3854196"/>
-            <a:ext cx="5116068" cy="1426463"/>
+            <a:off x="6464808" y="3869436"/>
+            <a:ext cx="5116068" cy="1411223"/>
             <a:chOff x="0" y="0"/>
-            <a:chExt cx="5116068" cy="1426463"/>
+            <a:chExt cx="5116068" cy="1411223"/>
           </a:xfrm>
         </p:grpSpPr>
         <p:sp>
@@ -8564,7 +8700,7 @@
           <p:spPr>
             <a:xfrm>
               <a:off x="0" y="0"/>
-              <a:ext cx="5116068" cy="1426463"/>
+              <a:ext cx="5116068" cy="1411223"/>
             </a:xfrm>
             <a:prstGeom prst="rect">
               <a:avLst/>
@@ -8596,7 +8732,7 @@
           </p:nvSpPr>
           <p:spPr>
             <a:xfrm>
-              <a:off x="86868" y="50291"/>
+              <a:off x="86868" y="50292"/>
               <a:ext cx="4942331" cy="347472"/>
             </a:xfrm>
             <a:prstGeom prst="rect">
@@ -8642,8 +8778,8 @@
           </p:nvSpPr>
           <p:spPr>
             <a:xfrm>
-              <a:off x="86868" y="397763"/>
-              <a:ext cx="4942331" cy="978407"/>
+              <a:off x="86868" y="397764"/>
+              <a:ext cx="4942331" cy="963167"/>
             </a:xfrm>
             <a:prstGeom prst="rect">
               <a:avLst/>
@@ -8669,7 +8805,7 @@
                 <a:buChar char="•"/>
               </a:pPr>
               <a:r>
-                <a:rPr sz="1400" b="0">
+                <a:rPr sz="1600" b="0">
                   <a:solidFill>
                     <a:schemeClr val="dk1"/>
                   </a:solidFill>
@@ -8690,7 +8826,7 @@
                 <a:buChar char="•"/>
               </a:pPr>
               <a:r>
-                <a:rPr sz="1400" b="0">
+                <a:rPr sz="1600" b="0">
                   <a:solidFill>
                     <a:schemeClr val="dk1"/>
                   </a:solidFill>
@@ -8711,8 +8847,8 @@
         </p:nvCxnSpPr>
         <p:spPr>
           <a:xfrm>
-            <a:off x="6441948" y="2359152"/>
-            <a:ext cx="0" cy="2944367"/>
+            <a:off x="6441948" y="2389632"/>
+            <a:ext cx="0" cy="2913887"/>
           </a:xfrm>
           <a:prstGeom prst="line">
             <a:avLst/>
@@ -8734,7 +8870,7 @@
         </p:nvCxnSpPr>
         <p:spPr>
           <a:xfrm>
-            <a:off x="1280160" y="3831335"/>
+            <a:off x="1280160" y="3846576"/>
             <a:ext cx="10323576" cy="0"/>
           </a:xfrm>
           <a:prstGeom prst="line">
@@ -8856,7 +8992,7 @@
         <p:spPr>
           <a:xfrm>
             <a:off x="1280160" y="5696711"/>
-            <a:ext cx="10323576" cy="310896"/>
+            <a:ext cx="10323576" cy="365760"/>
           </a:xfrm>
           <a:prstGeom prst="rect">
             <a:avLst/>
@@ -8881,7 +9017,7 @@
               </a:spcAft>
             </a:pPr>
             <a:r>
-              <a:rPr sz="1000" b="1">
+              <a:rPr sz="1300" b="1">
                 <a:solidFill>
                   <a:schemeClr val="dk1"/>
                 </a:solidFill>
@@ -8901,8 +9037,8 @@
         </p:nvSpPr>
         <p:spPr>
           <a:xfrm>
-            <a:off x="457200" y="2359152"/>
-            <a:ext cx="329184" cy="2944367"/>
+            <a:off x="457200" y="2389632"/>
+            <a:ext cx="329184" cy="2913887"/>
           </a:xfrm>
           <a:prstGeom prst="rect">
             <a:avLst/>
@@ -8913,7 +9049,7 @@
           </a:ln>
         </p:spPr>
         <p:txBody>
-          <a:bodyPr wrap="square" anchor="t" lIns="109728" rIns="109728" tIns="73152" bIns="73152" vert="vert270">
+          <a:bodyPr wrap="square" anchor="ctr" lIns="109728" rIns="109728" tIns="73152" bIns="73152" vert="vert270">
             <a:spAutoFit/>
           </a:bodyPr>
           <a:lstStyle/>
@@ -8927,7 +9063,7 @@
               </a:spcAft>
             </a:pPr>
             <a:r>
-              <a:rPr sz="1200" b="1">
+              <a:rPr sz="1300" b="1">
                 <a:solidFill>
                   <a:schemeClr val="dk1"/>
                 </a:solidFill>
@@ -8947,7 +9083,7 @@
         </p:nvSpPr>
         <p:spPr>
           <a:xfrm>
-            <a:off x="786384" y="2404872"/>
+            <a:off x="786384" y="2435352"/>
             <a:ext cx="457200" cy="329184"/>
           </a:xfrm>
           <a:prstGeom prst="rect">
@@ -9090,9 +9226,9 @@
         <p:grpSpPr>
           <a:xfrm>
             <a:off x="1821420" y="1645920"/>
-            <a:ext cx="9837179" cy="694944"/>
+            <a:ext cx="9837179" cy="1484376"/>
             <a:chOff x="0" y="0"/>
-            <a:chExt cx="9837179" cy="694944"/>
+            <a:chExt cx="9837179" cy="1484376"/>
           </a:xfrm>
         </p:grpSpPr>
         <p:sp>
@@ -9104,7 +9240,7 @@
           <p:spPr>
             <a:xfrm>
               <a:off x="0" y="0"/>
-              <a:ext cx="3472562" cy="694944"/>
+              <a:ext cx="3472562" cy="1484376"/>
             </a:xfrm>
             <a:prstGeom prst="triangle">
               <a:avLst/>
@@ -9134,7 +9270,7 @@
                 </a:spcAft>
               </a:pPr>
               <a:r>
-                <a:rPr sz="1400" b="1">
+                <a:rPr sz="1600" b="1">
                   <a:solidFill>
                     <a:schemeClr val="lt1"/>
                   </a:solidFill>
@@ -9155,7 +9291,7 @@
           <p:spPr>
             <a:xfrm>
               <a:off x="5220831" y="0"/>
-              <a:ext cx="4616348" cy="694944"/>
+              <a:ext cx="4616348" cy="1484376"/>
             </a:xfrm>
             <a:prstGeom prst="rect">
               <a:avLst/>
@@ -9166,7 +9302,7 @@
             </a:ln>
           </p:spPr>
           <p:txBody>
-            <a:bodyPr wrap="square" anchor="t" lIns="109728" rIns="109728" tIns="73152" bIns="73152">
+            <a:bodyPr wrap="square" anchor="ctr" lIns="109728" rIns="109728" tIns="73152" bIns="73152">
               <a:spAutoFit/>
             </a:bodyPr>
             <a:lstStyle/>
@@ -9180,7 +9316,7 @@
                 </a:spcAft>
               </a:pPr>
               <a:r>
-                <a:rPr sz="1400" b="0">
+                <a:rPr sz="1600" b="0">
                   <a:solidFill>
                     <a:schemeClr val="dk1"/>
                   </a:solidFill>
@@ -9201,7 +9337,7 @@
         </p:nvCxnSpPr>
         <p:spPr>
           <a:xfrm>
-            <a:off x="5293982" y="1993392"/>
+            <a:off x="5293982" y="2388108"/>
             <a:ext cx="1693405" cy="0"/>
           </a:xfrm>
           <a:prstGeom prst="line">
@@ -9224,10 +9360,10 @@
         </p:nvGrpSpPr>
         <p:grpSpPr>
           <a:xfrm>
-            <a:off x="1139310" y="2377440"/>
-            <a:ext cx="10519289" cy="694944"/>
+            <a:off x="1139310" y="3166872"/>
+            <a:ext cx="10519289" cy="1484376"/>
             <a:chOff x="0" y="0"/>
-            <a:chExt cx="10519289" cy="694944"/>
+            <a:chExt cx="10519289" cy="1484376"/>
           </a:xfrm>
         </p:grpSpPr>
         <p:sp>
@@ -9239,7 +9375,7 @@
           <p:spPr>
             <a:xfrm>
               <a:off x="0" y="0"/>
-              <a:ext cx="4836782" cy="694944"/>
+              <a:ext cx="4836782" cy="1484376"/>
             </a:xfrm>
             <a:prstGeom prst="trapezoid">
               <a:avLst/>
@@ -9269,7 +9405,7 @@
                 </a:spcAft>
               </a:pPr>
               <a:r>
-                <a:rPr sz="1400" b="1">
+                <a:rPr sz="1600" b="1">
                   <a:solidFill>
                     <a:schemeClr val="lt1"/>
                   </a:solidFill>
@@ -9290,7 +9426,7 @@
           <p:spPr>
             <a:xfrm>
               <a:off x="5902941" y="0"/>
-              <a:ext cx="4616348" cy="694944"/>
+              <a:ext cx="4616348" cy="1484376"/>
             </a:xfrm>
             <a:prstGeom prst="rect">
               <a:avLst/>
@@ -9301,7 +9437,7 @@
             </a:ln>
           </p:spPr>
           <p:txBody>
-            <a:bodyPr wrap="square" anchor="t" lIns="109728" rIns="109728" tIns="73152" bIns="73152">
+            <a:bodyPr wrap="square" anchor="ctr" lIns="109728" rIns="109728" tIns="73152" bIns="73152">
               <a:spAutoFit/>
             </a:bodyPr>
             <a:lstStyle/>
@@ -9315,7 +9451,7 @@
                 </a:spcAft>
               </a:pPr>
               <a:r>
-                <a:rPr sz="1400" b="0">
+                <a:rPr sz="1600" b="0">
                   <a:solidFill>
                     <a:schemeClr val="dk1"/>
                   </a:solidFill>
@@ -9336,7 +9472,7 @@
         </p:nvCxnSpPr>
         <p:spPr>
           <a:xfrm>
-            <a:off x="5976093" y="2724912"/>
+            <a:off x="5976093" y="3909060"/>
             <a:ext cx="1011294" cy="0"/>
           </a:xfrm>
           <a:prstGeom prst="line">
@@ -9359,10 +9495,10 @@
         </p:nvGrpSpPr>
         <p:grpSpPr>
           <a:xfrm>
-            <a:off x="457200" y="3108960"/>
-            <a:ext cx="11201399" cy="694944"/>
+            <a:off x="457200" y="4687824"/>
+            <a:ext cx="11201399" cy="1484376"/>
             <a:chOff x="0" y="0"/>
-            <a:chExt cx="11201399" cy="694944"/>
+            <a:chExt cx="11201399" cy="1484376"/>
           </a:xfrm>
         </p:grpSpPr>
         <p:sp>
@@ -9374,7 +9510,7 @@
           <p:spPr>
             <a:xfrm>
               <a:off x="0" y="0"/>
-              <a:ext cx="6201003" cy="694944"/>
+              <a:ext cx="6201003" cy="1484376"/>
             </a:xfrm>
             <a:prstGeom prst="trapezoid">
               <a:avLst/>
@@ -9404,7 +9540,7 @@
                 </a:spcAft>
               </a:pPr>
               <a:r>
-                <a:rPr sz="1400" b="1">
+                <a:rPr sz="1600" b="1">
                   <a:solidFill>
                     <a:schemeClr val="lt1"/>
                   </a:solidFill>
@@ -9425,7 +9561,7 @@
           <p:spPr>
             <a:xfrm>
               <a:off x="6585051" y="0"/>
-              <a:ext cx="4616348" cy="694944"/>
+              <a:ext cx="4616348" cy="1484376"/>
             </a:xfrm>
             <a:prstGeom prst="rect">
               <a:avLst/>
@@ -9436,7 +9572,7 @@
             </a:ln>
           </p:spPr>
           <p:txBody>
-            <a:bodyPr wrap="square" anchor="t" lIns="109728" rIns="109728" tIns="73152" bIns="73152">
+            <a:bodyPr wrap="square" anchor="ctr" lIns="109728" rIns="109728" tIns="73152" bIns="73152">
               <a:spAutoFit/>
             </a:bodyPr>
             <a:lstStyle/>
@@ -9450,7 +9586,7 @@
                 </a:spcAft>
               </a:pPr>
               <a:r>
-                <a:rPr sz="1400" b="0">
+                <a:rPr sz="1600" b="0">
                   <a:solidFill>
                     <a:schemeClr val="dk1"/>
                   </a:solidFill>
@@ -9471,7 +9607,7 @@
         </p:nvCxnSpPr>
         <p:spPr>
           <a:xfrm>
-            <a:off x="6658203" y="3456432"/>
+            <a:off x="6658203" y="5430012"/>
             <a:ext cx="329184" cy="0"/>
           </a:xfrm>
           <a:prstGeom prst="line">
@@ -9539,9 +9675,9 @@
         <p:grpSpPr>
           <a:xfrm>
             <a:off x="457200" y="1645920"/>
-            <a:ext cx="11201399" cy="694944"/>
+            <a:ext cx="11201399" cy="1484376"/>
             <a:chOff x="0" y="0"/>
-            <a:chExt cx="11201399" cy="694944"/>
+            <a:chExt cx="11201399" cy="1484376"/>
           </a:xfrm>
         </p:grpSpPr>
         <p:sp>
@@ -9553,7 +9689,7 @@
           <p:spPr>
             <a:xfrm rot="10800000">
               <a:off x="0" y="0"/>
-              <a:ext cx="6201003" cy="694944"/>
+              <a:ext cx="6201003" cy="1484376"/>
             </a:xfrm>
             <a:prstGeom prst="trapezoid">
               <a:avLst/>
@@ -9587,7 +9723,7 @@
           <p:spPr>
             <a:xfrm>
               <a:off x="620100" y="0"/>
-              <a:ext cx="4960802" cy="694944"/>
+              <a:ext cx="4960802" cy="1484376"/>
             </a:xfrm>
             <a:prstGeom prst="rect">
               <a:avLst/>
@@ -9598,7 +9734,7 @@
             </a:ln>
           </p:spPr>
           <p:txBody>
-            <a:bodyPr wrap="square" anchor="t" lIns="109728" rIns="109728" tIns="73152" bIns="73152">
+            <a:bodyPr wrap="square" anchor="ctr" lIns="109728" rIns="109728" tIns="73152" bIns="73152">
               <a:spAutoFit/>
             </a:bodyPr>
             <a:lstStyle/>
@@ -9612,7 +9748,7 @@
                 </a:spcAft>
               </a:pPr>
               <a:r>
-                <a:rPr sz="1400" b="1">
+                <a:rPr sz="1600" b="1">
                   <a:solidFill>
                     <a:schemeClr val="lt1"/>
                   </a:solidFill>
@@ -9633,7 +9769,7 @@
           <p:spPr>
             <a:xfrm>
               <a:off x="6585051" y="0"/>
-              <a:ext cx="4616348" cy="694944"/>
+              <a:ext cx="4616348" cy="1484376"/>
             </a:xfrm>
             <a:prstGeom prst="rect">
               <a:avLst/>
@@ -9644,7 +9780,7 @@
             </a:ln>
           </p:spPr>
           <p:txBody>
-            <a:bodyPr wrap="square" anchor="t" lIns="109728" rIns="109728" tIns="73152" bIns="73152">
+            <a:bodyPr wrap="square" anchor="ctr" lIns="109728" rIns="109728" tIns="73152" bIns="73152">
               <a:spAutoFit/>
             </a:bodyPr>
             <a:lstStyle/>
@@ -9658,7 +9794,7 @@
                 </a:spcAft>
               </a:pPr>
               <a:r>
-                <a:rPr sz="1400" b="0">
+                <a:rPr sz="1600" b="0">
                   <a:solidFill>
                     <a:schemeClr val="dk1"/>
                   </a:solidFill>
@@ -9679,7 +9815,7 @@
         </p:nvCxnSpPr>
         <p:spPr>
           <a:xfrm>
-            <a:off x="6658203" y="1993392"/>
+            <a:off x="6658203" y="2388108"/>
             <a:ext cx="329184" cy="0"/>
           </a:xfrm>
           <a:prstGeom prst="line">
@@ -9702,10 +9838,10 @@
         </p:nvGrpSpPr>
         <p:grpSpPr>
           <a:xfrm>
-            <a:off x="1139310" y="2377440"/>
-            <a:ext cx="10519289" cy="694944"/>
+            <a:off x="1139310" y="3166872"/>
+            <a:ext cx="10519289" cy="1484376"/>
             <a:chOff x="0" y="0"/>
-            <a:chExt cx="10519289" cy="694944"/>
+            <a:chExt cx="10519289" cy="1484376"/>
           </a:xfrm>
         </p:grpSpPr>
         <p:sp>
@@ -9717,7 +9853,7 @@
           <p:spPr>
             <a:xfrm rot="10800000">
               <a:off x="0" y="0"/>
-              <a:ext cx="4836782" cy="694944"/>
+              <a:ext cx="4836782" cy="1484376"/>
             </a:xfrm>
             <a:prstGeom prst="trapezoid">
               <a:avLst/>
@@ -9751,7 +9887,7 @@
           <p:spPr>
             <a:xfrm>
               <a:off x="483678" y="0"/>
-              <a:ext cx="3869426" cy="694944"/>
+              <a:ext cx="3869426" cy="1484376"/>
             </a:xfrm>
             <a:prstGeom prst="rect">
               <a:avLst/>
@@ -9762,7 +9898,7 @@
             </a:ln>
           </p:spPr>
           <p:txBody>
-            <a:bodyPr wrap="square" anchor="t" lIns="109728" rIns="109728" tIns="73152" bIns="73152">
+            <a:bodyPr wrap="square" anchor="ctr" lIns="109728" rIns="109728" tIns="73152" bIns="73152">
               <a:spAutoFit/>
             </a:bodyPr>
             <a:lstStyle/>
@@ -9776,7 +9912,7 @@
                 </a:spcAft>
               </a:pPr>
               <a:r>
-                <a:rPr sz="1400" b="1">
+                <a:rPr sz="1600" b="1">
                   <a:solidFill>
                     <a:schemeClr val="lt1"/>
                   </a:solidFill>
@@ -9797,7 +9933,7 @@
           <p:spPr>
             <a:xfrm>
               <a:off x="5902941" y="0"/>
-              <a:ext cx="4616348" cy="694944"/>
+              <a:ext cx="4616348" cy="1484376"/>
             </a:xfrm>
             <a:prstGeom prst="rect">
               <a:avLst/>
@@ -9808,7 +9944,7 @@
             </a:ln>
           </p:spPr>
           <p:txBody>
-            <a:bodyPr wrap="square" anchor="t" lIns="109728" rIns="109728" tIns="73152" bIns="73152">
+            <a:bodyPr wrap="square" anchor="ctr" lIns="109728" rIns="109728" tIns="73152" bIns="73152">
               <a:spAutoFit/>
             </a:bodyPr>
             <a:lstStyle/>
@@ -9822,7 +9958,7 @@
                 </a:spcAft>
               </a:pPr>
               <a:r>
-                <a:rPr sz="1400" b="0">
+                <a:rPr sz="1600" b="0">
                   <a:solidFill>
                     <a:schemeClr val="dk1"/>
                   </a:solidFill>
@@ -9843,7 +9979,7 @@
         </p:nvCxnSpPr>
         <p:spPr>
           <a:xfrm>
-            <a:off x="5976093" y="2724912"/>
+            <a:off x="5976093" y="3909060"/>
             <a:ext cx="1011294" cy="0"/>
           </a:xfrm>
           <a:prstGeom prst="line">
@@ -9866,10 +10002,10 @@
         </p:nvGrpSpPr>
         <p:grpSpPr>
           <a:xfrm>
-            <a:off x="1821420" y="3108960"/>
-            <a:ext cx="9837179" cy="694944"/>
+            <a:off x="1821420" y="4687824"/>
+            <a:ext cx="9837179" cy="1484376"/>
             <a:chOff x="0" y="0"/>
-            <a:chExt cx="9837179" cy="694944"/>
+            <a:chExt cx="9837179" cy="1484376"/>
           </a:xfrm>
         </p:grpSpPr>
         <p:sp>
@@ -9881,7 +10017,7 @@
           <p:spPr>
             <a:xfrm rot="10800000">
               <a:off x="0" y="0"/>
-              <a:ext cx="3472562" cy="694944"/>
+              <a:ext cx="3472562" cy="1484376"/>
             </a:xfrm>
             <a:prstGeom prst="trapezoid">
               <a:avLst/>
@@ -9915,7 +10051,7 @@
           <p:spPr>
             <a:xfrm>
               <a:off x="347256" y="0"/>
-              <a:ext cx="2778049" cy="694944"/>
+              <a:ext cx="2778049" cy="1484376"/>
             </a:xfrm>
             <a:prstGeom prst="rect">
               <a:avLst/>
@@ -9926,7 +10062,7 @@
             </a:ln>
           </p:spPr>
           <p:txBody>
-            <a:bodyPr wrap="square" anchor="t" lIns="109728" rIns="109728" tIns="73152" bIns="73152">
+            <a:bodyPr wrap="square" anchor="ctr" lIns="109728" rIns="109728" tIns="73152" bIns="73152">
               <a:spAutoFit/>
             </a:bodyPr>
             <a:lstStyle/>
@@ -9940,7 +10076,7 @@
                 </a:spcAft>
               </a:pPr>
               <a:r>
-                <a:rPr sz="1400" b="1">
+                <a:rPr sz="1600" b="1">
                   <a:solidFill>
                     <a:schemeClr val="lt1"/>
                   </a:solidFill>
@@ -9961,7 +10097,7 @@
           <p:spPr>
             <a:xfrm>
               <a:off x="5220831" y="0"/>
-              <a:ext cx="4616348" cy="694944"/>
+              <a:ext cx="4616348" cy="1484376"/>
             </a:xfrm>
             <a:prstGeom prst="rect">
               <a:avLst/>
@@ -9972,7 +10108,7 @@
             </a:ln>
           </p:spPr>
           <p:txBody>
-            <a:bodyPr wrap="square" anchor="t" lIns="109728" rIns="109728" tIns="73152" bIns="73152">
+            <a:bodyPr wrap="square" anchor="ctr" lIns="109728" rIns="109728" tIns="73152" bIns="73152">
               <a:spAutoFit/>
             </a:bodyPr>
             <a:lstStyle/>
@@ -9986,7 +10122,7 @@
                 </a:spcAft>
               </a:pPr>
               <a:r>
-                <a:rPr sz="1400" b="0">
+                <a:rPr sz="1600" b="0">
                   <a:solidFill>
                     <a:schemeClr val="dk1"/>
                   </a:solidFill>
@@ -10007,7 +10143,7 @@
         </p:nvCxnSpPr>
         <p:spPr>
           <a:xfrm>
-            <a:off x="5293982" y="3456432"/>
+            <a:off x="5293982" y="5430012"/>
             <a:ext cx="1693405" cy="0"/>
           </a:xfrm>
           <a:prstGeom prst="line">
@@ -10074,8 +10210,8 @@
         </p:nvCxnSpPr>
         <p:spPr>
           <a:xfrm>
-            <a:off x="7008876" y="2251684"/>
-            <a:ext cx="2185335" cy="468694"/>
+            <a:off x="6761988" y="2980944"/>
+            <a:ext cx="228275" cy="228275"/>
           </a:xfrm>
           <a:prstGeom prst="line">
             <a:avLst/>
@@ -10096,8 +10232,8 @@
         </p:nvCxnSpPr>
         <p:spPr>
           <a:xfrm flipH="1">
-            <a:off x="7053579" y="3122193"/>
-            <a:ext cx="2185335" cy="468694"/>
+            <a:off x="6794316" y="4576572"/>
+            <a:ext cx="228276" cy="228275"/>
           </a:xfrm>
           <a:prstGeom prst="line">
             <a:avLst/>
@@ -10118,8 +10254,8 @@
         </p:nvCxnSpPr>
         <p:spPr>
           <a:xfrm flipH="1" flipV="1">
-            <a:off x="2994740" y="3131781"/>
-            <a:ext cx="2185336" cy="468694"/>
+            <a:off x="5198688" y="4608900"/>
+            <a:ext cx="228276" cy="228276"/>
           </a:xfrm>
           <a:prstGeom prst="line">
             <a:avLst/>
@@ -10140,8 +10276,8 @@
         </p:nvCxnSpPr>
         <p:spPr>
           <a:xfrm flipV="1">
-            <a:off x="2950037" y="2261272"/>
-            <a:ext cx="2185335" cy="468694"/>
+            <a:off x="5166360" y="3013272"/>
+            <a:ext cx="228275" cy="228276"/>
           </a:xfrm>
           <a:prstGeom prst="line">
             <a:avLst/>
@@ -10162,10 +10298,10 @@
         </p:nvGrpSpPr>
         <p:grpSpPr>
           <a:xfrm>
-            <a:off x="5180076" y="1680667"/>
-            <a:ext cx="1828800" cy="749808"/>
+            <a:off x="5180076" y="1645920"/>
+            <a:ext cx="1828800" cy="1335024"/>
             <a:chOff x="0" y="0"/>
-            <a:chExt cx="1828800" cy="749808"/>
+            <a:chExt cx="1828800" cy="1335024"/>
           </a:xfrm>
         </p:grpSpPr>
         <p:sp>
@@ -10177,11 +10313,11 @@
           <p:spPr>
             <a:xfrm>
               <a:off x="0" y="0"/>
-              <a:ext cx="1828800" cy="749808"/>
+              <a:ext cx="1828800" cy="1335024"/>
             </a:xfrm>
             <a:prstGeom prst="roundRect">
               <a:avLst>
-                <a:gd name="adj" fmla="val 7317"/>
+                <a:gd name="adj" fmla="val 4110"/>
               </a:avLst>
             </a:prstGeom>
             <a:solidFill>
@@ -10210,7 +10346,7 @@
           <p:spPr>
             <a:xfrm>
               <a:off x="109728" y="109728"/>
-              <a:ext cx="1609344" cy="387096"/>
+              <a:ext cx="1609344" cy="417576"/>
             </a:xfrm>
             <a:prstGeom prst="rect">
               <a:avLst/>
@@ -10235,7 +10371,7 @@
                 </a:spcAft>
               </a:pPr>
               <a:r>
-                <a:rPr sz="1400" b="1">
+                <a:rPr sz="1600" b="1">
                   <a:solidFill>
                     <a:schemeClr val="dk1"/>
                   </a:solidFill>
@@ -10247,35 +10383,84 @@
             </a:p>
           </p:txBody>
         </p:sp>
+        <p:sp>
+          <p:nvSpPr>
+            <p:cNvPr id="10" name="Cycle node 1 detail" descr="pptx-deck-generated"/>
+            <p:cNvSpPr txBox="1"/>
+            <p:nvPr/>
+          </p:nvSpPr>
+          <p:spPr>
+            <a:xfrm>
+              <a:off x="0" y="527304"/>
+              <a:ext cx="1828800" cy="697992"/>
+            </a:xfrm>
+            <a:prstGeom prst="rect">
+              <a:avLst/>
+            </a:prstGeom>
+            <a:noFill/>
+            <a:ln>
+              <a:noFill/>
+            </a:ln>
+          </p:spPr>
+          <p:txBody>
+            <a:bodyPr wrap="square" anchor="t" lIns="109728" rIns="109728" tIns="73152" bIns="73152">
+              <a:spAutoFit/>
+            </a:bodyPr>
+            <a:lstStyle/>
+            <a:p>
+              <a:pPr algn="ctr">
+                <a:lnSpc>
+                  <a:spcPct val="100000"/>
+                </a:lnSpc>
+                <a:spcAft>
+                  <a:spcPts val="0"/>
+                </a:spcAft>
+              </a:pPr>
+              <a:r>
+                <a:rPr sz="1600" b="0">
+                  <a:solidFill>
+                    <a:schemeClr val="dk1">
+                      <a:lumMod val="65000"/>
+                      <a:lumOff val="35000"/>
+                    </a:schemeClr>
+                  </a:solidFill>
+                  <a:latin typeface="Yu Gothic"/>
+                  <a:ea typeface="Yu Gothic"/>
+                </a:rPr>
+                <a:t>受付内容を台帳に記録する。</a:t>
+              </a:r>
+            </a:p>
+          </p:txBody>
+        </p:sp>
       </p:grpSp>
       <p:grpSp>
         <p:nvGrpSpPr>
-          <p:cNvPr id="10" name="Cycle 2" descr="pptx-deck-generated"/>
+          <p:cNvPr id="11" name="Cycle 2" descr="pptx-deck-generated"/>
           <p:cNvGrpSpPr/>
           <p:nvPr/>
         </p:nvGrpSpPr>
         <p:grpSpPr>
           <a:xfrm>
-            <a:off x="9238914" y="2551176"/>
-            <a:ext cx="1828800" cy="749808"/>
+            <a:off x="6775704" y="3241548"/>
+            <a:ext cx="1828800" cy="1335024"/>
             <a:chOff x="0" y="0"/>
-            <a:chExt cx="1828800" cy="749808"/>
+            <a:chExt cx="1828800" cy="1335024"/>
           </a:xfrm>
         </p:grpSpPr>
         <p:sp>
           <p:nvSpPr>
-            <p:cNvPr id="11" name="Cycle node 2" descr="pptx-deck-generated"/>
+            <p:cNvPr id="12" name="Cycle node 2" descr="pptx-deck-generated"/>
             <p:cNvSpPr/>
             <p:nvPr/>
           </p:nvSpPr>
           <p:spPr>
             <a:xfrm>
               <a:off x="0" y="0"/>
-              <a:ext cx="1828800" cy="749808"/>
+              <a:ext cx="1828800" cy="1335024"/>
             </a:xfrm>
             <a:prstGeom prst="roundRect">
               <a:avLst>
-                <a:gd name="adj" fmla="val 7317"/>
+                <a:gd name="adj" fmla="val 4110"/>
               </a:avLst>
             </a:prstGeom>
             <a:solidFill>
@@ -10297,14 +10482,14 @@
         </p:sp>
         <p:sp>
           <p:nvSpPr>
-            <p:cNvPr id="12" name="Cycle node 2 label" descr="pptx-deck-generated"/>
+            <p:cNvPr id="13" name="Cycle node 2 label" descr="pptx-deck-generated"/>
             <p:cNvSpPr txBox="1"/>
             <p:nvPr/>
           </p:nvSpPr>
           <p:spPr>
             <a:xfrm>
               <a:off x="109728" y="109728"/>
-              <a:ext cx="1609344" cy="387096"/>
+              <a:ext cx="1609344" cy="417576"/>
             </a:xfrm>
             <a:prstGeom prst="rect">
               <a:avLst/>
@@ -10329,7 +10514,7 @@
                 </a:spcAft>
               </a:pPr>
               <a:r>
-                <a:rPr sz="1400" b="1">
+                <a:rPr sz="1600" b="1">
                   <a:solidFill>
                     <a:schemeClr val="dk1"/>
                   </a:solidFill>
@@ -10341,35 +10526,84 @@
             </a:p>
           </p:txBody>
         </p:sp>
+        <p:sp>
+          <p:nvSpPr>
+            <p:cNvPr id="14" name="Cycle node 2 detail" descr="pptx-deck-generated"/>
+            <p:cNvSpPr txBox="1"/>
+            <p:nvPr/>
+          </p:nvSpPr>
+          <p:spPr>
+            <a:xfrm>
+              <a:off x="0" y="527304"/>
+              <a:ext cx="1828800" cy="697992"/>
+            </a:xfrm>
+            <a:prstGeom prst="rect">
+              <a:avLst/>
+            </a:prstGeom>
+            <a:noFill/>
+            <a:ln>
+              <a:noFill/>
+            </a:ln>
+          </p:spPr>
+          <p:txBody>
+            <a:bodyPr wrap="square" anchor="t" lIns="109728" rIns="109728" tIns="73152" bIns="73152">
+              <a:spAutoFit/>
+            </a:bodyPr>
+            <a:lstStyle/>
+            <a:p>
+              <a:pPr algn="ctr">
+                <a:lnSpc>
+                  <a:spcPct val="100000"/>
+                </a:lnSpc>
+                <a:spcAft>
+                  <a:spcPts val="0"/>
+                </a:spcAft>
+              </a:pPr>
+              <a:r>
+                <a:rPr sz="1600" b="0">
+                  <a:solidFill>
+                    <a:schemeClr val="dk1">
+                      <a:lumMod val="65000"/>
+                      <a:lumOff val="35000"/>
+                    </a:schemeClr>
+                  </a:solidFill>
+                  <a:latin typeface="Yu Gothic"/>
+                  <a:ea typeface="Yu Gothic"/>
+                </a:rPr>
+                <a:t>優先度に応じて担当へつなぐ。</a:t>
+              </a:r>
+            </a:p>
+          </p:txBody>
+        </p:sp>
       </p:grpSp>
       <p:grpSp>
         <p:nvGrpSpPr>
-          <p:cNvPr id="13" name="Cycle 3" descr="pptx-deck-generated"/>
+          <p:cNvPr id="15" name="Cycle 3" descr="pptx-deck-generated"/>
           <p:cNvGrpSpPr/>
           <p:nvPr/>
         </p:nvGrpSpPr>
         <p:grpSpPr>
           <a:xfrm>
-            <a:off x="5180076" y="3421684"/>
-            <a:ext cx="1828800" cy="749808"/>
+            <a:off x="5180076" y="4837176"/>
+            <a:ext cx="1828800" cy="1335024"/>
             <a:chOff x="0" y="0"/>
-            <a:chExt cx="1828800" cy="749808"/>
+            <a:chExt cx="1828800" cy="1335024"/>
           </a:xfrm>
         </p:grpSpPr>
         <p:sp>
           <p:nvSpPr>
-            <p:cNvPr id="14" name="Cycle node 3" descr="pptx-deck-generated"/>
+            <p:cNvPr id="16" name="Cycle node 3" descr="pptx-deck-generated"/>
             <p:cNvSpPr/>
             <p:nvPr/>
           </p:nvSpPr>
           <p:spPr>
             <a:xfrm>
               <a:off x="0" y="0"/>
-              <a:ext cx="1828800" cy="749808"/>
+              <a:ext cx="1828800" cy="1335024"/>
             </a:xfrm>
             <a:prstGeom prst="roundRect">
               <a:avLst>
-                <a:gd name="adj" fmla="val 7317"/>
+                <a:gd name="adj" fmla="val 4110"/>
               </a:avLst>
             </a:prstGeom>
             <a:solidFill>
@@ -10391,14 +10625,14 @@
         </p:sp>
         <p:sp>
           <p:nvSpPr>
-            <p:cNvPr id="15" name="Cycle node 3 label" descr="pptx-deck-generated"/>
+            <p:cNvPr id="17" name="Cycle node 3 label" descr="pptx-deck-generated"/>
             <p:cNvSpPr txBox="1"/>
             <p:nvPr/>
           </p:nvSpPr>
           <p:spPr>
             <a:xfrm>
               <a:off x="109728" y="109728"/>
-              <a:ext cx="1609344" cy="387096"/>
+              <a:ext cx="1609344" cy="417576"/>
             </a:xfrm>
             <a:prstGeom prst="rect">
               <a:avLst/>
@@ -10423,7 +10657,7 @@
                 </a:spcAft>
               </a:pPr>
               <a:r>
-                <a:rPr sz="1400" b="1">
+                <a:rPr sz="1600" b="1">
                   <a:solidFill>
                     <a:schemeClr val="dk1"/>
                   </a:solidFill>
@@ -10435,35 +10669,84 @@
             </a:p>
           </p:txBody>
         </p:sp>
+        <p:sp>
+          <p:nvSpPr>
+            <p:cNvPr id="18" name="Cycle node 3 detail" descr="pptx-deck-generated"/>
+            <p:cNvSpPr txBox="1"/>
+            <p:nvPr/>
+          </p:nvSpPr>
+          <p:spPr>
+            <a:xfrm>
+              <a:off x="0" y="527304"/>
+              <a:ext cx="1828800" cy="697992"/>
+            </a:xfrm>
+            <a:prstGeom prst="rect">
+              <a:avLst/>
+            </a:prstGeom>
+            <a:noFill/>
+            <a:ln>
+              <a:noFill/>
+            </a:ln>
+          </p:spPr>
+          <p:txBody>
+            <a:bodyPr wrap="square" anchor="t" lIns="109728" rIns="109728" tIns="73152" bIns="73152">
+              <a:spAutoFit/>
+            </a:bodyPr>
+            <a:lstStyle/>
+            <a:p>
+              <a:pPr algn="ctr">
+                <a:lnSpc>
+                  <a:spcPct val="100000"/>
+                </a:lnSpc>
+                <a:spcAft>
+                  <a:spcPts val="0"/>
+                </a:spcAft>
+              </a:pPr>
+              <a:r>
+                <a:rPr sz="1600" b="0">
+                  <a:solidFill>
+                    <a:schemeClr val="dk1">
+                      <a:lumMod val="65000"/>
+                      <a:lumOff val="35000"/>
+                    </a:schemeClr>
+                  </a:solidFill>
+                  <a:latin typeface="Yu Gothic"/>
+                  <a:ea typeface="Yu Gothic"/>
+                </a:rPr>
+                <a:t>調査結果を台帳へ記録する。</a:t>
+              </a:r>
+            </a:p>
+          </p:txBody>
+        </p:sp>
       </p:grpSp>
       <p:grpSp>
         <p:nvGrpSpPr>
-          <p:cNvPr id="16" name="Cycle 4" descr="pptx-deck-generated"/>
+          <p:cNvPr id="19" name="Cycle 4" descr="pptx-deck-generated"/>
           <p:cNvGrpSpPr/>
           <p:nvPr/>
         </p:nvGrpSpPr>
         <p:grpSpPr>
           <a:xfrm>
-            <a:off x="1121237" y="2551176"/>
-            <a:ext cx="1828800" cy="749808"/>
+            <a:off x="3584448" y="3241548"/>
+            <a:ext cx="1828800" cy="1335024"/>
             <a:chOff x="0" y="0"/>
-            <a:chExt cx="1828800" cy="749808"/>
+            <a:chExt cx="1828800" cy="1335024"/>
           </a:xfrm>
         </p:grpSpPr>
         <p:sp>
           <p:nvSpPr>
-            <p:cNvPr id="17" name="Cycle node 4" descr="pptx-deck-generated"/>
+            <p:cNvPr id="20" name="Cycle node 4" descr="pptx-deck-generated"/>
             <p:cNvSpPr/>
             <p:nvPr/>
           </p:nvSpPr>
           <p:spPr>
             <a:xfrm>
               <a:off x="0" y="0"/>
-              <a:ext cx="1828800" cy="749808"/>
+              <a:ext cx="1828800" cy="1335024"/>
             </a:xfrm>
             <a:prstGeom prst="roundRect">
               <a:avLst>
-                <a:gd name="adj" fmla="val 7317"/>
+                <a:gd name="adj" fmla="val 4110"/>
               </a:avLst>
             </a:prstGeom>
             <a:solidFill>
@@ -10485,14 +10768,14 @@
         </p:sp>
         <p:sp>
           <p:nvSpPr>
-            <p:cNvPr id="18" name="Cycle node 4 label" descr="pptx-deck-generated"/>
+            <p:cNvPr id="21" name="Cycle node 4 label" descr="pptx-deck-generated"/>
             <p:cNvSpPr txBox="1"/>
             <p:nvPr/>
           </p:nvSpPr>
           <p:spPr>
             <a:xfrm>
               <a:off x="109728" y="109728"/>
-              <a:ext cx="1609344" cy="387096"/>
+              <a:ext cx="1609344" cy="417576"/>
             </a:xfrm>
             <a:prstGeom prst="rect">
               <a:avLst/>
@@ -10517,7 +10800,7 @@
                 </a:spcAft>
               </a:pPr>
               <a:r>
-                <a:rPr sz="1400" b="1">
+                <a:rPr sz="1600" b="1">
                   <a:solidFill>
                     <a:schemeClr val="dk1"/>
                   </a:solidFill>
@@ -10529,17 +10812,66 @@
             </a:p>
           </p:txBody>
         </p:sp>
+        <p:sp>
+          <p:nvSpPr>
+            <p:cNvPr id="22" name="Cycle node 4 detail" descr="pptx-deck-generated"/>
+            <p:cNvSpPr txBox="1"/>
+            <p:nvPr/>
+          </p:nvSpPr>
+          <p:spPr>
+            <a:xfrm>
+              <a:off x="0" y="527304"/>
+              <a:ext cx="1828800" cy="697992"/>
+            </a:xfrm>
+            <a:prstGeom prst="rect">
+              <a:avLst/>
+            </a:prstGeom>
+            <a:noFill/>
+            <a:ln>
+              <a:noFill/>
+            </a:ln>
+          </p:spPr>
+          <p:txBody>
+            <a:bodyPr wrap="square" anchor="t" lIns="109728" rIns="109728" tIns="73152" bIns="73152">
+              <a:spAutoFit/>
+            </a:bodyPr>
+            <a:lstStyle/>
+            <a:p>
+              <a:pPr algn="ctr">
+                <a:lnSpc>
+                  <a:spcPct val="100000"/>
+                </a:lnSpc>
+                <a:spcAft>
+                  <a:spcPts val="0"/>
+                </a:spcAft>
+              </a:pPr>
+              <a:r>
+                <a:rPr sz="1600" b="0">
+                  <a:solidFill>
+                    <a:schemeClr val="dk1">
+                      <a:lumMod val="65000"/>
+                      <a:lumOff val="35000"/>
+                    </a:schemeClr>
+                  </a:solidFill>
+                  <a:latin typeface="Yu Gothic"/>
+                  <a:ea typeface="Yu Gothic"/>
+                </a:rPr>
+                <a:t>解決策をFAQへ反映する。</a:t>
+              </a:r>
+            </a:p>
+          </p:txBody>
+        </p:sp>
       </p:grpSp>
       <p:sp>
         <p:nvSpPr>
-          <p:cNvPr id="19" name="Cycle center" descr="pptx-deck-generated"/>
+          <p:cNvPr id="23" name="Cycle center" descr="pptx-deck-generated"/>
           <p:cNvSpPr/>
           <p:nvPr/>
         </p:nvSpPr>
         <p:spPr>
           <a:xfrm>
-            <a:off x="5710428" y="2542032"/>
-            <a:ext cx="768096" cy="768096"/>
+            <a:off x="5568696" y="3383280"/>
+            <a:ext cx="1051560" cy="1051560"/>
           </a:xfrm>
           <a:prstGeom prst="ellipse">
             <a:avLst/>
@@ -10561,7 +10893,7 @@
               </a:spcAft>
             </a:pPr>
             <a:r>
-              <a:rPr sz="1200" b="1">
+              <a:rPr sz="1300" b="1">
                 <a:solidFill>
                   <a:schemeClr val="lt1"/>
                 </a:solidFill>
@@ -10625,10 +10957,10 @@
         </p:nvGrpSpPr>
         <p:grpSpPr>
           <a:xfrm>
-            <a:off x="457200" y="1645920"/>
-            <a:ext cx="11274552" cy="640080"/>
+            <a:off x="457200" y="2839212"/>
+            <a:ext cx="11274551" cy="640080"/>
             <a:chOff x="0" y="0"/>
-            <a:chExt cx="11274552" cy="640080"/>
+            <a:chExt cx="11274551" cy="640080"/>
           </a:xfrm>
         </p:grpSpPr>
         <p:sp>
@@ -10662,7 +10994,7 @@
                 </a:spcAft>
               </a:pPr>
               <a:r>
-                <a:rPr sz="1400" b="1">
+                <a:rPr sz="1600" b="1">
                   <a:solidFill>
                     <a:schemeClr val="lt1"/>
                   </a:solidFill>
@@ -10683,7 +11015,7 @@
           <p:spPr>
             <a:xfrm>
               <a:off x="3001518" y="0"/>
-              <a:ext cx="2684526" cy="640080"/>
+              <a:ext cx="1985962" cy="640080"/>
             </a:xfrm>
             <a:prstGeom prst="rect">
               <a:avLst/>
@@ -10700,7 +11032,7 @@
             </a:ln>
           </p:spPr>
           <p:txBody>
-            <a:bodyPr rtlCol="0" anchor="t" wrap="square" lIns="109728" rIns="109728" tIns="73152" bIns="73152"/>
+            <a:bodyPr rtlCol="0" anchor="ctr" wrap="square" lIns="109728" rIns="109728" tIns="73152" bIns="73152"/>
             <a:lstStyle/>
             <a:p>
               <a:pPr algn="l">
@@ -10712,7 +11044,7 @@
                 </a:spcAft>
               </a:pPr>
               <a:r>
-                <a:rPr sz="1400" b="0">
+                <a:rPr sz="1600" b="0">
                   <a:solidFill>
                     <a:schemeClr val="dk1"/>
                   </a:solidFill>
@@ -10732,8 +11064,8 @@
           </p:nvSpPr>
           <p:spPr>
             <a:xfrm>
-              <a:off x="5795772" y="0"/>
-              <a:ext cx="2684526" cy="640080"/>
+              <a:off x="5097208" y="0"/>
+              <a:ext cx="1985962" cy="640080"/>
             </a:xfrm>
             <a:prstGeom prst="rect">
               <a:avLst/>
@@ -10750,7 +11082,7 @@
             </a:ln>
           </p:spPr>
           <p:txBody>
-            <a:bodyPr rtlCol="0" anchor="t" wrap="square" lIns="109728" rIns="109728" tIns="73152" bIns="73152"/>
+            <a:bodyPr rtlCol="0" anchor="ctr" wrap="square" lIns="109728" rIns="109728" tIns="73152" bIns="73152"/>
             <a:lstStyle/>
             <a:p>
               <a:pPr algn="l">
@@ -10762,7 +11094,7 @@
                 </a:spcAft>
               </a:pPr>
               <a:r>
-                <a:rPr sz="1400" b="0">
+                <a:rPr sz="1600" b="0">
                   <a:solidFill>
                     <a:schemeClr val="dk1"/>
                   </a:solidFill>
@@ -10782,8 +11114,8 @@
           </p:nvSpPr>
           <p:spPr>
             <a:xfrm>
-              <a:off x="8590026" y="0"/>
-              <a:ext cx="2684526" cy="640080"/>
+              <a:off x="7192899" y="0"/>
+              <a:ext cx="1985962" cy="640080"/>
             </a:xfrm>
             <a:prstGeom prst="rect">
               <a:avLst/>
@@ -10800,7 +11132,7 @@
             </a:ln>
           </p:spPr>
           <p:txBody>
-            <a:bodyPr rtlCol="0" anchor="t" wrap="square" lIns="109728" rIns="109728" tIns="73152" bIns="73152"/>
+            <a:bodyPr rtlCol="0" anchor="ctr" wrap="square" lIns="109728" rIns="109728" tIns="73152" bIns="73152"/>
             <a:lstStyle/>
             <a:p>
               <a:pPr algn="l">
@@ -10812,7 +11144,7 @@
                 </a:spcAft>
               </a:pPr>
               <a:r>
-                <a:rPr sz="1400" b="0">
+                <a:rPr sz="1600" b="0">
                   <a:solidFill>
                     <a:schemeClr val="dk1"/>
                   </a:solidFill>
@@ -10824,24 +11156,74 @@
             </a:p>
           </p:txBody>
         </p:sp>
+        <p:sp>
+          <p:nvSpPr>
+            <p:cNvPr id="8" name="Layer 1 item 4" descr="pptx-deck-generated"/>
+            <p:cNvSpPr/>
+            <p:nvPr/>
+          </p:nvSpPr>
+          <p:spPr>
+            <a:xfrm>
+              <a:off x="9288589" y="0"/>
+              <a:ext cx="1985962" cy="640080"/>
+            </a:xfrm>
+            <a:prstGeom prst="rect">
+              <a:avLst/>
+            </a:prstGeom>
+            <a:solidFill>
+              <a:schemeClr val="lt2"/>
+            </a:solidFill>
+            <a:ln w="9525">
+              <a:solidFill>
+                <a:schemeClr val="lt1">
+                  <a:lumMod val="85000"/>
+                </a:schemeClr>
+              </a:solidFill>
+            </a:ln>
+          </p:spPr>
+          <p:txBody>
+            <a:bodyPr rtlCol="0" anchor="ctr" wrap="square" lIns="109728" rIns="109728" tIns="73152" bIns="73152"/>
+            <a:lstStyle/>
+            <a:p>
+              <a:pPr algn="l">
+                <a:lnSpc>
+                  <a:spcPct val="100000"/>
+                </a:lnSpc>
+                <a:spcAft>
+                  <a:spcPts val="0"/>
+                </a:spcAft>
+              </a:pPr>
+              <a:r>
+                <a:rPr sz="1600" b="0">
+                  <a:solidFill>
+                    <a:schemeClr val="dk1"/>
+                  </a:solidFill>
+                  <a:latin typeface="Yu Gothic"/>
+                  <a:ea typeface="Yu Gothic"/>
+                </a:rPr>
+                <a:t>進捗通知</a:t>
+              </a:r>
+            </a:p>
+          </p:txBody>
+        </p:sp>
       </p:grpSp>
       <p:grpSp>
         <p:nvGrpSpPr>
-          <p:cNvPr id="8" name="Layers 2" descr="pptx-deck-generated"/>
+          <p:cNvPr id="9" name="Layers 2" descr="pptx-deck-generated"/>
           <p:cNvGrpSpPr/>
           <p:nvPr/>
         </p:nvGrpSpPr>
         <p:grpSpPr>
           <a:xfrm>
-            <a:off x="457200" y="2395728"/>
-            <a:ext cx="11274552" cy="640080"/>
+            <a:off x="457200" y="3589020"/>
+            <a:ext cx="11274551" cy="640080"/>
             <a:chOff x="0" y="0"/>
-            <a:chExt cx="11274552" cy="640080"/>
+            <a:chExt cx="11274551" cy="640080"/>
           </a:xfrm>
         </p:grpSpPr>
         <p:sp>
           <p:nvSpPr>
-            <p:cNvPr id="9" name="Layer 2 label" descr="pptx-deck-generated"/>
+            <p:cNvPr id="10" name="Layer 2 label" descr="pptx-deck-generated"/>
             <p:cNvSpPr/>
             <p:nvPr/>
           </p:nvSpPr>
@@ -10870,7 +11252,7 @@
                 </a:spcAft>
               </a:pPr>
               <a:r>
-                <a:rPr sz="1400" b="1">
+                <a:rPr sz="1600" b="1">
                   <a:solidFill>
                     <a:schemeClr val="lt1"/>
                   </a:solidFill>
@@ -10884,14 +11266,14 @@
         </p:sp>
         <p:sp>
           <p:nvSpPr>
-            <p:cNvPr id="10" name="Layer 2 item 1" descr="pptx-deck-generated"/>
+            <p:cNvPr id="11" name="Layer 2 item 1" descr="pptx-deck-generated"/>
             <p:cNvSpPr/>
             <p:nvPr/>
           </p:nvSpPr>
           <p:spPr>
             <a:xfrm>
               <a:off x="3001518" y="0"/>
-              <a:ext cx="2684526" cy="640080"/>
+              <a:ext cx="1985962" cy="640080"/>
             </a:xfrm>
             <a:prstGeom prst="rect">
               <a:avLst/>
@@ -10908,7 +11290,7 @@
             </a:ln>
           </p:spPr>
           <p:txBody>
-            <a:bodyPr rtlCol="0" anchor="t" wrap="square" lIns="109728" rIns="109728" tIns="73152" bIns="73152"/>
+            <a:bodyPr rtlCol="0" anchor="ctr" wrap="square" lIns="109728" rIns="109728" tIns="73152" bIns="73152"/>
             <a:lstStyle/>
             <a:p>
               <a:pPr algn="l">
@@ -10920,7 +11302,7 @@
                 </a:spcAft>
               </a:pPr>
               <a:r>
-                <a:rPr sz="1400" b="0">
+                <a:rPr sz="1600" b="0">
                   <a:solidFill>
                     <a:schemeClr val="dk1"/>
                   </a:solidFill>
@@ -10934,14 +11316,14 @@
         </p:sp>
         <p:sp>
           <p:nvSpPr>
-            <p:cNvPr id="11" name="Layer 2 item 2" descr="pptx-deck-generated"/>
+            <p:cNvPr id="12" name="Layer 2 item 2" descr="pptx-deck-generated"/>
             <p:cNvSpPr/>
             <p:nvPr/>
           </p:nvSpPr>
           <p:spPr>
             <a:xfrm>
-              <a:off x="5795772" y="0"/>
-              <a:ext cx="2684526" cy="640080"/>
+              <a:off x="5097208" y="0"/>
+              <a:ext cx="1985962" cy="640080"/>
             </a:xfrm>
             <a:prstGeom prst="rect">
               <a:avLst/>
@@ -10958,7 +11340,7 @@
             </a:ln>
           </p:spPr>
           <p:txBody>
-            <a:bodyPr rtlCol="0" anchor="t" wrap="square" lIns="109728" rIns="109728" tIns="73152" bIns="73152"/>
+            <a:bodyPr rtlCol="0" anchor="ctr" wrap="square" lIns="109728" rIns="109728" tIns="73152" bIns="73152"/>
             <a:lstStyle/>
             <a:p>
               <a:pPr algn="l">
@@ -10970,7 +11352,7 @@
                 </a:spcAft>
               </a:pPr>
               <a:r>
-                <a:rPr sz="1400" b="0">
+                <a:rPr sz="1600" b="0">
                   <a:solidFill>
                     <a:schemeClr val="dk1"/>
                   </a:solidFill>
@@ -10984,14 +11366,14 @@
         </p:sp>
         <p:sp>
           <p:nvSpPr>
-            <p:cNvPr id="12" name="Layer 2 item 3" descr="pptx-deck-generated"/>
+            <p:cNvPr id="13" name="Layer 2 item 3" descr="pptx-deck-generated"/>
             <p:cNvSpPr/>
             <p:nvPr/>
           </p:nvSpPr>
           <p:spPr>
             <a:xfrm>
-              <a:off x="8590026" y="0"/>
-              <a:ext cx="2684526" cy="640080"/>
+              <a:off x="7192899" y="0"/>
+              <a:ext cx="1985962" cy="640080"/>
             </a:xfrm>
             <a:prstGeom prst="rect">
               <a:avLst/>
@@ -11008,7 +11390,7 @@
             </a:ln>
           </p:spPr>
           <p:txBody>
-            <a:bodyPr rtlCol="0" anchor="t" wrap="square" lIns="109728" rIns="109728" tIns="73152" bIns="73152"/>
+            <a:bodyPr rtlCol="0" anchor="ctr" wrap="square" lIns="109728" rIns="109728" tIns="73152" bIns="73152"/>
             <a:lstStyle/>
             <a:p>
               <a:pPr algn="l">
@@ -11020,7 +11402,7 @@
                 </a:spcAft>
               </a:pPr>
               <a:r>
-                <a:rPr sz="1400" b="0">
+                <a:rPr sz="1600" b="0">
                   <a:solidFill>
                     <a:schemeClr val="dk1"/>
                   </a:solidFill>
@@ -11032,24 +11414,74 @@
             </a:p>
           </p:txBody>
         </p:sp>
+        <p:sp>
+          <p:nvSpPr>
+            <p:cNvPr id="14" name="Layer 2 item 4" descr="pptx-deck-generated"/>
+            <p:cNvSpPr/>
+            <p:nvPr/>
+          </p:nvSpPr>
+          <p:spPr>
+            <a:xfrm>
+              <a:off x="9288589" y="0"/>
+              <a:ext cx="1985962" cy="640080"/>
+            </a:xfrm>
+            <a:prstGeom prst="rect">
+              <a:avLst/>
+            </a:prstGeom>
+            <a:solidFill>
+              <a:schemeClr val="lt2"/>
+            </a:solidFill>
+            <a:ln w="9525">
+              <a:solidFill>
+                <a:schemeClr val="lt1">
+                  <a:lumMod val="85000"/>
+                </a:schemeClr>
+              </a:solidFill>
+            </a:ln>
+          </p:spPr>
+          <p:txBody>
+            <a:bodyPr rtlCol="0" anchor="ctr" wrap="square" lIns="109728" rIns="109728" tIns="73152" bIns="73152"/>
+            <a:lstStyle/>
+            <a:p>
+              <a:pPr algn="l">
+                <a:lnSpc>
+                  <a:spcPct val="100000"/>
+                </a:lnSpc>
+                <a:spcAft>
+                  <a:spcPts val="0"/>
+                </a:spcAft>
+              </a:pPr>
+              <a:r>
+                <a:rPr sz="1600" b="0">
+                  <a:solidFill>
+                    <a:schemeClr val="dk1"/>
+                  </a:solidFill>
+                  <a:latin typeface="Yu Gothic"/>
+                  <a:ea typeface="Yu Gothic"/>
+                </a:rPr>
+                <a:t>優先度設定</a:t>
+              </a:r>
+            </a:p>
+          </p:txBody>
+        </p:sp>
       </p:grpSp>
       <p:grpSp>
         <p:nvGrpSpPr>
-          <p:cNvPr id="13" name="Layers 3" descr="pptx-deck-generated"/>
+          <p:cNvPr id="15" name="Layers 3" descr="pptx-deck-generated"/>
           <p:cNvGrpSpPr/>
           <p:nvPr/>
         </p:nvGrpSpPr>
         <p:grpSpPr>
           <a:xfrm>
-            <a:off x="457200" y="3145536"/>
-            <a:ext cx="11274552" cy="640080"/>
+            <a:off x="457200" y="4338828"/>
+            <a:ext cx="11274551" cy="640080"/>
             <a:chOff x="0" y="0"/>
-            <a:chExt cx="11274552" cy="640080"/>
+            <a:chExt cx="11274551" cy="640080"/>
           </a:xfrm>
         </p:grpSpPr>
         <p:sp>
           <p:nvSpPr>
-            <p:cNvPr id="14" name="Layer 3 label" descr="pptx-deck-generated"/>
+            <p:cNvPr id="16" name="Layer 3 label" descr="pptx-deck-generated"/>
             <p:cNvSpPr/>
             <p:nvPr/>
           </p:nvSpPr>
@@ -11078,7 +11510,7 @@
                 </a:spcAft>
               </a:pPr>
               <a:r>
-                <a:rPr sz="1400" b="1">
+                <a:rPr sz="1600" b="1">
                   <a:solidFill>
                     <a:schemeClr val="lt1"/>
                   </a:solidFill>
@@ -11092,14 +11524,14 @@
         </p:sp>
         <p:sp>
           <p:nvSpPr>
-            <p:cNvPr id="15" name="Layer 3 item 1" descr="pptx-deck-generated"/>
+            <p:cNvPr id="17" name="Layer 3 item 1" descr="pptx-deck-generated"/>
             <p:cNvSpPr/>
             <p:nvPr/>
           </p:nvSpPr>
           <p:spPr>
             <a:xfrm>
               <a:off x="3001518" y="0"/>
-              <a:ext cx="2684526" cy="640080"/>
+              <a:ext cx="1985962" cy="640080"/>
             </a:xfrm>
             <a:prstGeom prst="rect">
               <a:avLst/>
@@ -11116,7 +11548,7 @@
             </a:ln>
           </p:spPr>
           <p:txBody>
-            <a:bodyPr rtlCol="0" anchor="t" wrap="square" lIns="109728" rIns="109728" tIns="73152" bIns="73152"/>
+            <a:bodyPr rtlCol="0" anchor="ctr" wrap="square" lIns="109728" rIns="109728" tIns="73152" bIns="73152"/>
             <a:lstStyle/>
             <a:p>
               <a:pPr algn="l">
@@ -11128,7 +11560,7 @@
                 </a:spcAft>
               </a:pPr>
               <a:r>
-                <a:rPr sz="1400" b="0">
+                <a:rPr sz="1600" b="0">
                   <a:solidFill>
                     <a:schemeClr val="dk1"/>
                   </a:solidFill>
@@ -11142,14 +11574,14 @@
         </p:sp>
         <p:sp>
           <p:nvSpPr>
-            <p:cNvPr id="16" name="Layer 3 item 2" descr="pptx-deck-generated"/>
+            <p:cNvPr id="18" name="Layer 3 item 2" descr="pptx-deck-generated"/>
             <p:cNvSpPr/>
             <p:nvPr/>
           </p:nvSpPr>
           <p:spPr>
             <a:xfrm>
-              <a:off x="5795772" y="0"/>
-              <a:ext cx="2684526" cy="640080"/>
+              <a:off x="5097208" y="0"/>
+              <a:ext cx="1985962" cy="640080"/>
             </a:xfrm>
             <a:prstGeom prst="rect">
               <a:avLst/>
@@ -11166,7 +11598,7 @@
             </a:ln>
           </p:spPr>
           <p:txBody>
-            <a:bodyPr rtlCol="0" anchor="t" wrap="square" lIns="109728" rIns="109728" tIns="73152" bIns="73152"/>
+            <a:bodyPr rtlCol="0" anchor="ctr" wrap="square" lIns="109728" rIns="109728" tIns="73152" bIns="73152"/>
             <a:lstStyle/>
             <a:p>
               <a:pPr algn="l">
@@ -11178,7 +11610,7 @@
                 </a:spcAft>
               </a:pPr>
               <a:r>
-                <a:rPr sz="1400" b="0">
+                <a:rPr sz="1600" b="0">
                   <a:solidFill>
                     <a:schemeClr val="dk1"/>
                   </a:solidFill>
@@ -11192,14 +11624,14 @@
         </p:sp>
         <p:sp>
           <p:nvSpPr>
-            <p:cNvPr id="17" name="Layer 3 item 3" descr="pptx-deck-generated"/>
+            <p:cNvPr id="19" name="Layer 3 item 3" descr="pptx-deck-generated"/>
             <p:cNvSpPr/>
             <p:nvPr/>
           </p:nvSpPr>
           <p:spPr>
             <a:xfrm>
-              <a:off x="8590026" y="0"/>
-              <a:ext cx="2684526" cy="640080"/>
+              <a:off x="7192899" y="0"/>
+              <a:ext cx="1985962" cy="640080"/>
             </a:xfrm>
             <a:prstGeom prst="rect">
               <a:avLst/>
@@ -11216,7 +11648,7 @@
             </a:ln>
           </p:spPr>
           <p:txBody>
-            <a:bodyPr rtlCol="0" anchor="t" wrap="square" lIns="109728" rIns="109728" tIns="73152" bIns="73152"/>
+            <a:bodyPr rtlCol="0" anchor="ctr" wrap="square" lIns="109728" rIns="109728" tIns="73152" bIns="73152"/>
             <a:lstStyle/>
             <a:p>
               <a:pPr algn="l">
@@ -11228,7 +11660,7 @@
                 </a:spcAft>
               </a:pPr>
               <a:r>
-                <a:rPr sz="1400" b="0">
+                <a:rPr sz="1600" b="0">
                   <a:solidFill>
                     <a:schemeClr val="dk1"/>
                   </a:solidFill>
@@ -11236,6 +11668,56 @@
                   <a:ea typeface="Yu Gothic"/>
                 </a:rPr>
                 <a:t>更新ルール</a:t>
+              </a:r>
+            </a:p>
+          </p:txBody>
+        </p:sp>
+        <p:sp>
+          <p:nvSpPr>
+            <p:cNvPr id="20" name="Layer 3 item 4" descr="pptx-deck-generated"/>
+            <p:cNvSpPr/>
+            <p:nvPr/>
+          </p:nvSpPr>
+          <p:spPr>
+            <a:xfrm>
+              <a:off x="9288589" y="0"/>
+              <a:ext cx="1985962" cy="640080"/>
+            </a:xfrm>
+            <a:prstGeom prst="rect">
+              <a:avLst/>
+            </a:prstGeom>
+            <a:solidFill>
+              <a:schemeClr val="lt2"/>
+            </a:solidFill>
+            <a:ln w="9525">
+              <a:solidFill>
+                <a:schemeClr val="lt1">
+                  <a:lumMod val="85000"/>
+                </a:schemeClr>
+              </a:solidFill>
+            </a:ln>
+          </p:spPr>
+          <p:txBody>
+            <a:bodyPr rtlCol="0" anchor="ctr" wrap="square" lIns="109728" rIns="109728" tIns="73152" bIns="73152"/>
+            <a:lstStyle/>
+            <a:p>
+              <a:pPr algn="l">
+                <a:lnSpc>
+                  <a:spcPct val="100000"/>
+                </a:lnSpc>
+                <a:spcAft>
+                  <a:spcPts val="0"/>
+                </a:spcAft>
+              </a:pPr>
+              <a:r>
+                <a:rPr sz="1600" b="0">
+                  <a:solidFill>
+                    <a:schemeClr val="dk1"/>
+                  </a:solidFill>
+                  <a:latin typeface="Yu Gothic"/>
+                  <a:ea typeface="Yu Gothic"/>
+                </a:rPr>
+                <a:t>参照権限</a:t>
               </a:r>
             </a:p>
           </p:txBody>
@@ -11294,7 +11776,7 @@
         <p:spPr>
           <a:xfrm>
             <a:off x="457200" y="1645920"/>
-            <a:ext cx="11274552" cy="420624"/>
+            <a:ext cx="11274552" cy="451104"/>
           </a:xfrm>
           <a:prstGeom prst="rect">
             <a:avLst/>
@@ -11319,7 +11801,7 @@
               </a:spcAft>
             </a:pPr>
             <a:r>
-              <a:rPr sz="1800" b="1">
+              <a:rPr sz="2000" b="1">
                 <a:solidFill>
                   <a:schemeClr val="dk1"/>
                 </a:solidFill>
@@ -11339,7 +11821,7 @@
         </p:nvSpPr>
         <p:spPr>
           <a:xfrm>
-            <a:off x="2468880" y="2176272"/>
+            <a:off x="2468880" y="2206752"/>
             <a:ext cx="2315718" cy="438912"/>
           </a:xfrm>
           <a:prstGeom prst="rect">
@@ -11362,7 +11844,7 @@
               </a:spcAft>
             </a:pPr>
             <a:r>
-              <a:rPr sz="1200" b="1">
+              <a:rPr sz="1300" b="1">
                 <a:solidFill>
                   <a:schemeClr val="lt1"/>
                 </a:solidFill>
@@ -11382,7 +11864,7 @@
         </p:nvSpPr>
         <p:spPr>
           <a:xfrm>
-            <a:off x="4784598" y="2176272"/>
+            <a:off x="4784598" y="2206752"/>
             <a:ext cx="2315718" cy="438912"/>
           </a:xfrm>
           <a:prstGeom prst="rect">
@@ -11405,7 +11887,7 @@
               </a:spcAft>
             </a:pPr>
             <a:r>
-              <a:rPr sz="1200" b="1">
+              <a:rPr sz="1300" b="1">
                 <a:solidFill>
                   <a:schemeClr val="lt1"/>
                 </a:solidFill>
@@ -11425,7 +11907,7 @@
         </p:nvSpPr>
         <p:spPr>
           <a:xfrm>
-            <a:off x="7100316" y="2176272"/>
+            <a:off x="7100316" y="2206752"/>
             <a:ext cx="2315718" cy="438912"/>
           </a:xfrm>
           <a:prstGeom prst="rect">
@@ -11448,7 +11930,7 @@
               </a:spcAft>
             </a:pPr>
             <a:r>
-              <a:rPr sz="1200" b="1">
+              <a:rPr sz="1300" b="1">
                 <a:solidFill>
                   <a:schemeClr val="lt1"/>
                 </a:solidFill>
@@ -11468,7 +11950,7 @@
         </p:nvSpPr>
         <p:spPr>
           <a:xfrm>
-            <a:off x="9416034" y="2176272"/>
+            <a:off x="9416034" y="2206752"/>
             <a:ext cx="2315718" cy="438912"/>
           </a:xfrm>
           <a:prstGeom prst="rect">
@@ -11491,7 +11973,7 @@
               </a:spcAft>
             </a:pPr>
             <a:r>
-              <a:rPr sz="1200" b="1">
+              <a:rPr sz="1300" b="1">
                 <a:solidFill>
                   <a:schemeClr val="lt1"/>
                 </a:solidFill>
@@ -11511,7 +11993,7 @@
         </p:nvSpPr>
         <p:spPr>
           <a:xfrm>
-            <a:off x="5860161" y="2642616"/>
+            <a:off x="5860161" y="2673096"/>
             <a:ext cx="164592" cy="164592"/>
           </a:xfrm>
           <a:prstGeom prst="diamond">
@@ -11537,7 +12019,7 @@
         </p:nvSpPr>
         <p:spPr>
           <a:xfrm>
-            <a:off x="5210937" y="2825496"/>
+            <a:off x="5210937" y="2855976"/>
             <a:ext cx="1463040" cy="347472"/>
           </a:xfrm>
           <a:prstGeom prst="rect">
@@ -11563,7 +12045,7 @@
               </a:spcAft>
             </a:pPr>
             <a:r>
-              <a:rPr sz="1200" b="0">
+              <a:rPr sz="1300" b="0">
                 <a:solidFill>
                   <a:schemeClr val="dk1"/>
                 </a:solidFill>
@@ -11583,7 +12065,7 @@
         </p:nvSpPr>
         <p:spPr>
           <a:xfrm>
-            <a:off x="10491597" y="2642616"/>
+            <a:off x="10491597" y="2673096"/>
             <a:ext cx="164592" cy="164592"/>
           </a:xfrm>
           <a:prstGeom prst="diamond">
@@ -11609,7 +12091,7 @@
         </p:nvSpPr>
         <p:spPr>
           <a:xfrm>
-            <a:off x="9842372" y="2825496"/>
+            <a:off x="9842372" y="2855976"/>
             <a:ext cx="1463040" cy="347472"/>
           </a:xfrm>
           <a:prstGeom prst="rect">
@@ -11635,7 +12117,7 @@
               </a:spcAft>
             </a:pPr>
             <a:r>
-              <a:rPr sz="1200" b="0">
+              <a:rPr sz="1300" b="0">
                 <a:solidFill>
                   <a:schemeClr val="dk1"/>
                 </a:solidFill>
@@ -11655,8 +12137,8 @@
         </p:nvSpPr>
         <p:spPr>
           <a:xfrm>
-            <a:off x="457200" y="3794760"/>
-            <a:ext cx="11274552" cy="594359"/>
+            <a:off x="457200" y="3819144"/>
+            <a:ext cx="11274552" cy="588263"/>
           </a:xfrm>
           <a:prstGeom prst="rect">
             <a:avLst/>
@@ -11681,8 +12163,8 @@
         </p:nvSpPr>
         <p:spPr>
           <a:xfrm>
-            <a:off x="457200" y="4983479"/>
-            <a:ext cx="11274552" cy="594359"/>
+            <a:off x="457200" y="4995672"/>
+            <a:ext cx="11274552" cy="588263"/>
           </a:xfrm>
           <a:prstGeom prst="rect">
             <a:avLst/>
@@ -11707,8 +12189,8 @@
         </p:nvCxnSpPr>
         <p:spPr>
           <a:xfrm>
-            <a:off x="2468880" y="3200400"/>
-            <a:ext cx="0" cy="2971800"/>
+            <a:off x="2468880" y="3230880"/>
+            <a:ext cx="0" cy="2941320"/>
           </a:xfrm>
           <a:prstGeom prst="line">
             <a:avLst/>
@@ -11730,8 +12212,8 @@
         </p:nvCxnSpPr>
         <p:spPr>
           <a:xfrm>
-            <a:off x="4784598" y="3200400"/>
-            <a:ext cx="0" cy="2971800"/>
+            <a:off x="4784598" y="3230880"/>
+            <a:ext cx="0" cy="2941320"/>
           </a:xfrm>
           <a:prstGeom prst="line">
             <a:avLst/>
@@ -11753,8 +12235,8 @@
         </p:nvCxnSpPr>
         <p:spPr>
           <a:xfrm>
-            <a:off x="7100316" y="3200400"/>
-            <a:ext cx="0" cy="2971800"/>
+            <a:off x="7100316" y="3230880"/>
+            <a:ext cx="0" cy="2941320"/>
           </a:xfrm>
           <a:prstGeom prst="line">
             <a:avLst/>
@@ -11776,8 +12258,8 @@
         </p:nvCxnSpPr>
         <p:spPr>
           <a:xfrm>
-            <a:off x="9416034" y="3200400"/>
-            <a:ext cx="0" cy="2971800"/>
+            <a:off x="9416034" y="3230880"/>
+            <a:ext cx="0" cy="2941320"/>
           </a:xfrm>
           <a:prstGeom prst="line">
             <a:avLst/>
@@ -11799,8 +12281,8 @@
         </p:nvCxnSpPr>
         <p:spPr>
           <a:xfrm>
-            <a:off x="11731751" y="3200400"/>
-            <a:ext cx="0" cy="2971800"/>
+            <a:off x="11731751" y="3230880"/>
+            <a:ext cx="0" cy="2941320"/>
           </a:xfrm>
           <a:prstGeom prst="line">
             <a:avLst/>
@@ -11822,8 +12304,8 @@
         </p:nvSpPr>
         <p:spPr>
           <a:xfrm>
-            <a:off x="493776" y="3227832"/>
-            <a:ext cx="1920240" cy="539495"/>
+            <a:off x="493776" y="3258312"/>
+            <a:ext cx="1920240" cy="533399"/>
           </a:xfrm>
           <a:prstGeom prst="rect">
             <a:avLst/>
@@ -11834,7 +12316,7 @@
           </a:ln>
         </p:spPr>
         <p:txBody>
-          <a:bodyPr wrap="square" anchor="t" lIns="109728" rIns="109728" tIns="73152" bIns="73152">
+          <a:bodyPr wrap="square" anchor="ctr" lIns="109728" rIns="109728" tIns="73152" bIns="73152">
             <a:spAutoFit/>
           </a:bodyPr>
           <a:lstStyle/>
@@ -11848,7 +12330,7 @@
               </a:spcAft>
             </a:pPr>
             <a:r>
-              <a:rPr sz="1400" b="1">
+              <a:rPr sz="1600" b="1">
                 <a:solidFill>
                   <a:schemeClr val="dk1"/>
                 </a:solidFill>
@@ -11868,7 +12350,7 @@
         </p:nvGrpSpPr>
         <p:grpSpPr>
           <a:xfrm>
-            <a:off x="2505456" y="3305556"/>
+            <a:off x="2505456" y="3332988"/>
             <a:ext cx="4558283" cy="384048"/>
             <a:chOff x="0" y="0"/>
             <a:chExt cx="4558283" cy="384048"/>
@@ -11907,7 +12389,7 @@
                 </a:spcAft>
               </a:pPr>
               <a:r>
-                <a:rPr sz="1200" b="1">
+                <a:rPr sz="1300" b="1">
                   <a:solidFill>
                     <a:schemeClr val="lt1"/>
                   </a:solidFill>
@@ -11928,8 +12410,8 @@
         </p:nvSpPr>
         <p:spPr>
           <a:xfrm>
-            <a:off x="493776" y="3822192"/>
-            <a:ext cx="1920240" cy="539495"/>
+            <a:off x="493776" y="3846576"/>
+            <a:ext cx="1920240" cy="533399"/>
           </a:xfrm>
           <a:prstGeom prst="rect">
             <a:avLst/>
@@ -11940,7 +12422,7 @@
           </a:ln>
         </p:spPr>
         <p:txBody>
-          <a:bodyPr wrap="square" anchor="t" lIns="109728" rIns="109728" tIns="73152" bIns="73152">
+          <a:bodyPr wrap="square" anchor="ctr" lIns="109728" rIns="109728" tIns="73152" bIns="73152">
             <a:spAutoFit/>
           </a:bodyPr>
           <a:lstStyle/>
@@ -11954,7 +12436,7 @@
               </a:spcAft>
             </a:pPr>
             <a:r>
-              <a:rPr sz="1400" b="1">
+              <a:rPr sz="1600" b="1">
                 <a:solidFill>
                   <a:schemeClr val="dk1"/>
                 </a:solidFill>
@@ -11974,7 +12456,7 @@
         </p:nvGrpSpPr>
         <p:grpSpPr>
           <a:xfrm>
-            <a:off x="2505456" y="3899916"/>
+            <a:off x="2505456" y="3921252"/>
             <a:ext cx="6874001" cy="384048"/>
             <a:chOff x="0" y="0"/>
             <a:chExt cx="6874001" cy="384048"/>
@@ -12013,7 +12495,7 @@
                 </a:spcAft>
               </a:pPr>
               <a:r>
-                <a:rPr sz="1200" b="1">
+                <a:rPr sz="1300" b="1">
                   <a:solidFill>
                     <a:schemeClr val="lt1"/>
                   </a:solidFill>
@@ -12034,8 +12516,8 @@
         </p:nvSpPr>
         <p:spPr>
           <a:xfrm>
-            <a:off x="493776" y="4416552"/>
-            <a:ext cx="1920240" cy="539495"/>
+            <a:off x="493776" y="4434840"/>
+            <a:ext cx="1920240" cy="533399"/>
           </a:xfrm>
           <a:prstGeom prst="rect">
             <a:avLst/>
@@ -12046,7 +12528,7 @@
           </a:ln>
         </p:spPr>
         <p:txBody>
-          <a:bodyPr wrap="square" anchor="t" lIns="109728" rIns="109728" tIns="73152" bIns="73152">
+          <a:bodyPr wrap="square" anchor="ctr" lIns="109728" rIns="109728" tIns="73152" bIns="73152">
             <a:spAutoFit/>
           </a:bodyPr>
           <a:lstStyle/>
@@ -12060,7 +12542,7 @@
               </a:spcAft>
             </a:pPr>
             <a:r>
-              <a:rPr sz="1400" b="1">
+              <a:rPr sz="1600" b="1">
                 <a:solidFill>
                   <a:schemeClr val="dk1"/>
                 </a:solidFill>
@@ -12080,7 +12562,7 @@
         </p:nvGrpSpPr>
         <p:grpSpPr>
           <a:xfrm>
-            <a:off x="4821174" y="4494276"/>
+            <a:off x="4821174" y="4509516"/>
             <a:ext cx="2242565" cy="384048"/>
             <a:chOff x="0" y="0"/>
             <a:chExt cx="2242565" cy="384048"/>
@@ -12119,7 +12601,7 @@
                 </a:spcAft>
               </a:pPr>
               <a:r>
-                <a:rPr sz="1200" b="1">
+                <a:rPr sz="1300" b="1">
                   <a:solidFill>
                     <a:schemeClr val="lt1"/>
                   </a:solidFill>
@@ -12140,7 +12622,7 @@
         </p:nvGrpSpPr>
         <p:grpSpPr>
           <a:xfrm>
-            <a:off x="7136892" y="4494276"/>
+            <a:off x="7136892" y="4509516"/>
             <a:ext cx="4558283" cy="384048"/>
             <a:chOff x="0" y="0"/>
             <a:chExt cx="4558283" cy="384048"/>
@@ -12179,7 +12661,7 @@
                 </a:spcAft>
               </a:pPr>
               <a:r>
-                <a:rPr sz="1200" b="1">
+                <a:rPr sz="1300" b="1">
                   <a:solidFill>
                     <a:schemeClr val="dk1"/>
                   </a:solidFill>
@@ -12200,8 +12682,8 @@
         </p:nvSpPr>
         <p:spPr>
           <a:xfrm>
-            <a:off x="493776" y="5010912"/>
-            <a:ext cx="1920240" cy="539495"/>
+            <a:off x="493776" y="5023104"/>
+            <a:ext cx="1920240" cy="533399"/>
           </a:xfrm>
           <a:prstGeom prst="rect">
             <a:avLst/>
@@ -12212,7 +12694,7 @@
           </a:ln>
         </p:spPr>
         <p:txBody>
-          <a:bodyPr wrap="square" anchor="t" lIns="109728" rIns="109728" tIns="73152" bIns="73152">
+          <a:bodyPr wrap="square" anchor="ctr" lIns="109728" rIns="109728" tIns="73152" bIns="73152">
             <a:spAutoFit/>
           </a:bodyPr>
           <a:lstStyle/>
@@ -12226,7 +12708,7 @@
               </a:spcAft>
             </a:pPr>
             <a:r>
-              <a:rPr sz="1400" b="1">
+              <a:rPr sz="1600" b="1">
                 <a:solidFill>
                   <a:schemeClr val="dk1"/>
                 </a:solidFill>
@@ -12246,7 +12728,7 @@
         </p:nvGrpSpPr>
         <p:grpSpPr>
           <a:xfrm>
-            <a:off x="4821174" y="5088636"/>
+            <a:off x="4821174" y="5097779"/>
             <a:ext cx="4558283" cy="384048"/>
             <a:chOff x="0" y="0"/>
             <a:chExt cx="4558283" cy="384048"/>
@@ -12285,7 +12767,7 @@
                 </a:spcAft>
               </a:pPr>
               <a:r>
-                <a:rPr sz="1200" b="1">
+                <a:rPr sz="1300" b="1">
                   <a:solidFill>
                     <a:schemeClr val="lt1"/>
                   </a:solidFill>
@@ -12306,8 +12788,8 @@
         </p:nvSpPr>
         <p:spPr>
           <a:xfrm>
-            <a:off x="493776" y="5605272"/>
-            <a:ext cx="1920240" cy="539495"/>
+            <a:off x="493776" y="5611368"/>
+            <a:ext cx="1920240" cy="533399"/>
           </a:xfrm>
           <a:prstGeom prst="rect">
             <a:avLst/>
@@ -12318,7 +12800,7 @@
           </a:ln>
         </p:spPr>
         <p:txBody>
-          <a:bodyPr wrap="square" anchor="t" lIns="109728" rIns="109728" tIns="73152" bIns="73152">
+          <a:bodyPr wrap="square" anchor="ctr" lIns="109728" rIns="109728" tIns="73152" bIns="73152">
             <a:spAutoFit/>
           </a:bodyPr>
           <a:lstStyle/>
@@ -12332,7 +12814,7 @@
               </a:spcAft>
             </a:pPr>
             <a:r>
-              <a:rPr sz="1400" b="1">
+              <a:rPr sz="1600" b="1">
                 <a:solidFill>
                   <a:schemeClr val="dk1"/>
                 </a:solidFill>
@@ -12352,7 +12834,7 @@
         </p:nvGrpSpPr>
         <p:grpSpPr>
           <a:xfrm>
-            <a:off x="7136892" y="5682996"/>
+            <a:off x="7136892" y="5686044"/>
             <a:ext cx="4558283" cy="384048"/>
             <a:chOff x="0" y="0"/>
             <a:chExt cx="4558283" cy="384048"/>
@@ -12391,7 +12873,7 @@
                 </a:spcAft>
               </a:pPr>
               <a:r>
-                <a:rPr sz="1200" b="1">
+                <a:rPr sz="1300" b="1">
                   <a:solidFill>
                     <a:schemeClr val="lt1"/>
                   </a:solidFill>
@@ -12456,7 +12938,7 @@
         </p:nvSpPr>
         <p:spPr>
           <a:xfrm>
-            <a:off x="457200" y="1645920"/>
+            <a:off x="457200" y="3076956"/>
             <a:ext cx="54864" cy="585215"/>
           </a:xfrm>
           <a:prstGeom prst="rect">
@@ -12482,7 +12964,7 @@
         </p:nvSpPr>
         <p:spPr>
           <a:xfrm>
-            <a:off x="640080" y="1645920"/>
+            <a:off x="640080" y="3076956"/>
             <a:ext cx="11091672" cy="585215"/>
           </a:xfrm>
           <a:prstGeom prst="rect">
@@ -12528,7 +13010,7 @@
         </p:nvGrpSpPr>
         <p:grpSpPr>
           <a:xfrm>
-            <a:off x="457200" y="2487168"/>
+            <a:off x="457200" y="3918204"/>
             <a:ext cx="3660647" cy="822960"/>
             <a:chOff x="0" y="0"/>
             <a:chExt cx="3660647" cy="822960"/>
@@ -12578,7 +13060,7 @@
           <p:spPr>
             <a:xfrm>
               <a:off x="109728" y="73152"/>
-              <a:ext cx="3441191" cy="432816"/>
+              <a:ext cx="3441191" cy="463296"/>
             </a:xfrm>
             <a:prstGeom prst="rect">
               <a:avLst/>
@@ -12603,7 +13085,7 @@
                 </a:spcAft>
               </a:pPr>
               <a:r>
-                <a:rPr sz="1400" b="0">
+                <a:rPr sz="1600" b="0">
                   <a:solidFill>
                     <a:schemeClr val="dk1"/>
                   </a:solidFill>
@@ -12624,7 +13106,7 @@
         </p:nvGrpSpPr>
         <p:grpSpPr>
           <a:xfrm>
-            <a:off x="4264152" y="2487168"/>
+            <a:off x="4264152" y="3918204"/>
             <a:ext cx="3660647" cy="822960"/>
             <a:chOff x="0" y="0"/>
             <a:chExt cx="3660647" cy="822960"/>
@@ -12674,7 +13156,7 @@
           <p:spPr>
             <a:xfrm>
               <a:off x="109728" y="73152"/>
-              <a:ext cx="3441191" cy="432816"/>
+              <a:ext cx="3441191" cy="463296"/>
             </a:xfrm>
             <a:prstGeom prst="rect">
               <a:avLst/>
@@ -12699,7 +13181,7 @@
                 </a:spcAft>
               </a:pPr>
               <a:r>
-                <a:rPr sz="1400" b="0">
+                <a:rPr sz="1600" b="0">
                   <a:solidFill>
                     <a:schemeClr val="dk1"/>
                   </a:solidFill>
@@ -12720,7 +13202,7 @@
         </p:nvGrpSpPr>
         <p:grpSpPr>
           <a:xfrm>
-            <a:off x="8071104" y="2487168"/>
+            <a:off x="8071104" y="3918204"/>
             <a:ext cx="3660647" cy="822960"/>
             <a:chOff x="0" y="0"/>
             <a:chExt cx="3660647" cy="822960"/>
@@ -12770,7 +13252,7 @@
           <p:spPr>
             <a:xfrm>
               <a:off x="109727" y="73152"/>
-              <a:ext cx="3441191" cy="432816"/>
+              <a:ext cx="3441191" cy="463296"/>
             </a:xfrm>
             <a:prstGeom prst="rect">
               <a:avLst/>
@@ -12795,7 +13277,7 @@
                 </a:spcAft>
               </a:pPr>
               <a:r>
-                <a:rPr sz="1400" b="0">
+                <a:rPr sz="1600" b="0">
                   <a:solidFill>
                     <a:schemeClr val="dk1"/>
                   </a:solidFill>
@@ -12860,7 +13342,7 @@
         </p:nvSpPr>
         <p:spPr>
           <a:xfrm>
-            <a:off x="457200" y="1645920"/>
+            <a:off x="457200" y="3084068"/>
             <a:ext cx="502920" cy="475488"/>
           </a:xfrm>
           <a:prstGeom prst="rect">
@@ -12906,7 +13388,7 @@
         </p:nvSpPr>
         <p:spPr>
           <a:xfrm>
-            <a:off x="932688" y="1645920"/>
+            <a:off x="932688" y="3084068"/>
             <a:ext cx="10634472" cy="731520"/>
           </a:xfrm>
           <a:prstGeom prst="rect">
@@ -12952,8 +13434,8 @@
         </p:nvSpPr>
         <p:spPr>
           <a:xfrm>
-            <a:off x="822960" y="2578608"/>
-            <a:ext cx="10543032" cy="686816"/>
+            <a:off x="822960" y="4016756"/>
+            <a:ext cx="10543032" cy="717296"/>
           </a:xfrm>
           <a:prstGeom prst="rect">
             <a:avLst/>
@@ -12979,7 +13461,7 @@
               <a:buChar char="•"/>
             </a:pPr>
             <a:r>
-              <a:rPr sz="1200" b="0">
+              <a:rPr sz="1300" b="0">
                 <a:solidFill>
                   <a:schemeClr val="dk1">
                     <a:lumMod val="65000"/>
@@ -13003,7 +13485,7 @@
               <a:buChar char="•"/>
             </a:pPr>
             <a:r>
-              <a:rPr sz="1200" b="0">
+              <a:rPr sz="1300" b="0">
                 <a:solidFill>
                   <a:schemeClr val="dk1">
                     <a:lumMod val="65000"/>
@@ -13070,7 +13552,7 @@
         </p:nvSpPr>
         <p:spPr>
           <a:xfrm>
-            <a:off x="932688" y="1645920"/>
+            <a:off x="932688" y="1988820"/>
             <a:ext cx="5975512" cy="347472"/>
           </a:xfrm>
           <a:prstGeom prst="rect">
@@ -13096,7 +13578,7 @@
               </a:spcAft>
             </a:pPr>
             <a:r>
-              <a:rPr sz="1200" b="1">
+              <a:rPr sz="1300" b="1">
                 <a:solidFill>
                   <a:schemeClr val="dk1"/>
                 </a:solidFill>
@@ -13116,7 +13598,7 @@
         </p:nvSpPr>
         <p:spPr>
           <a:xfrm>
-            <a:off x="8574877" y="1645920"/>
+            <a:off x="8574877" y="1988820"/>
             <a:ext cx="1691182" cy="347472"/>
           </a:xfrm>
           <a:prstGeom prst="rect">
@@ -13142,7 +13624,7 @@
               </a:spcAft>
             </a:pPr>
             <a:r>
-              <a:rPr sz="1200" b="1">
+              <a:rPr sz="1300" b="1">
                 <a:solidFill>
                   <a:schemeClr val="dk1"/>
                 </a:solidFill>
@@ -13162,7 +13644,7 @@
         </p:nvSpPr>
         <p:spPr>
           <a:xfrm>
-            <a:off x="10378805" y="1645920"/>
+            <a:off x="10378805" y="1988820"/>
             <a:ext cx="1240200" cy="347472"/>
           </a:xfrm>
           <a:prstGeom prst="rect">
@@ -13188,7 +13670,7 @@
               </a:spcAft>
             </a:pPr>
             <a:r>
-              <a:rPr sz="1200" b="1">
+              <a:rPr sz="1300" b="1">
                 <a:solidFill>
                   <a:schemeClr val="dk1"/>
                 </a:solidFill>
@@ -13208,7 +13690,7 @@
         </p:nvCxnSpPr>
         <p:spPr>
           <a:xfrm>
-            <a:off x="457200" y="1993392"/>
+            <a:off x="457200" y="2336292"/>
             <a:ext cx="11274552" cy="0"/>
           </a:xfrm>
           <a:prstGeom prst="line">
@@ -13231,7 +13713,7 @@
         </p:nvGrpSpPr>
         <p:grpSpPr>
           <a:xfrm>
-            <a:off x="484632" y="2011680"/>
+            <a:off x="484632" y="2354580"/>
             <a:ext cx="11134373" cy="548640"/>
             <a:chOff x="0" y="0"/>
             <a:chExt cx="11134373" cy="548640"/>
@@ -13256,7 +13738,7 @@
             </a:solidFill>
           </p:spPr>
           <p:txBody>
-            <a:bodyPr rtlCol="0" anchor="ctr" wrap="square" lIns="109728" rIns="109728" tIns="73152" bIns="73152"/>
+            <a:bodyPr rtlCol="0" anchor="ctr" wrap="square" lIns="36576" rIns="36576" tIns="36576" bIns="36576"/>
             <a:lstStyle/>
             <a:p>
               <a:pPr algn="ctr">
@@ -13268,7 +13750,7 @@
                 </a:spcAft>
               </a:pPr>
               <a:r>
-                <a:rPr sz="1200" b="1">
+                <a:rPr sz="1500" b="1">
                   <a:solidFill>
                     <a:schemeClr val="lt1"/>
                   </a:solidFill>
@@ -13300,7 +13782,7 @@
             </a:ln>
           </p:spPr>
           <p:txBody>
-            <a:bodyPr wrap="square" anchor="t" lIns="109728" rIns="109728" tIns="73152" bIns="73152">
+            <a:bodyPr wrap="square" anchor="ctr" lIns="109728" rIns="109728" tIns="73152" bIns="73152">
               <a:spAutoFit/>
             </a:bodyPr>
             <a:lstStyle/>
@@ -13314,7 +13796,7 @@
                 </a:spcAft>
               </a:pPr>
               <a:r>
-                <a:rPr sz="1400" b="0">
+                <a:rPr sz="1600" b="0">
                   <a:solidFill>
                     <a:schemeClr val="dk1"/>
                   </a:solidFill>
@@ -13346,7 +13828,7 @@
             </a:ln>
           </p:spPr>
           <p:txBody>
-            <a:bodyPr wrap="square" anchor="t" lIns="109728" rIns="109728" tIns="73152" bIns="73152">
+            <a:bodyPr wrap="square" anchor="ctr" lIns="109728" rIns="109728" tIns="73152" bIns="73152">
               <a:spAutoFit/>
             </a:bodyPr>
             <a:lstStyle/>
@@ -13360,7 +13842,7 @@
                 </a:spcAft>
               </a:pPr>
               <a:r>
-                <a:rPr sz="1400" b="0">
+                <a:rPr sz="1600" b="0">
                   <a:solidFill>
                     <a:schemeClr val="dk1"/>
                   </a:solidFill>
@@ -13392,7 +13874,7 @@
             </a:ln>
           </p:spPr>
           <p:txBody>
-            <a:bodyPr wrap="square" anchor="t" lIns="109728" rIns="109728" tIns="73152" bIns="73152">
+            <a:bodyPr wrap="square" anchor="ctr" lIns="109728" rIns="109728" tIns="73152" bIns="73152">
               <a:spAutoFit/>
             </a:bodyPr>
             <a:lstStyle/>
@@ -13406,7 +13888,7 @@
                 </a:spcAft>
               </a:pPr>
               <a:r>
-                <a:rPr sz="1400" b="0">
+                <a:rPr sz="1600" b="0">
                   <a:solidFill>
                     <a:schemeClr val="dk1"/>
                   </a:solidFill>
@@ -13427,7 +13909,7 @@
         </p:nvGrpSpPr>
         <p:grpSpPr>
           <a:xfrm>
-            <a:off x="484632" y="2596896"/>
+            <a:off x="484632" y="2939796"/>
             <a:ext cx="11134373" cy="548640"/>
             <a:chOff x="0" y="0"/>
             <a:chExt cx="11134373" cy="548640"/>
@@ -13484,7 +13966,7 @@
             </a:ln>
           </p:spPr>
           <p:txBody>
-            <a:bodyPr wrap="square" anchor="t" lIns="109728" rIns="109728" tIns="73152" bIns="73152">
+            <a:bodyPr wrap="square" anchor="ctr" lIns="109728" rIns="109728" tIns="73152" bIns="73152">
               <a:spAutoFit/>
             </a:bodyPr>
             <a:lstStyle/>
@@ -13498,7 +13980,7 @@
                 </a:spcAft>
               </a:pPr>
               <a:r>
-                <a:rPr sz="1400" b="0">
+                <a:rPr sz="1600" b="0">
                   <a:solidFill>
                     <a:schemeClr val="dk1"/>
                   </a:solidFill>
@@ -13530,7 +14012,7 @@
             </a:ln>
           </p:spPr>
           <p:txBody>
-            <a:bodyPr wrap="square" anchor="t" lIns="109728" rIns="109728" tIns="73152" bIns="73152">
+            <a:bodyPr wrap="square" anchor="ctr" lIns="109728" rIns="109728" tIns="73152" bIns="73152">
               <a:spAutoFit/>
             </a:bodyPr>
             <a:lstStyle/>
@@ -13544,7 +14026,7 @@
                 </a:spcAft>
               </a:pPr>
               <a:r>
-                <a:rPr sz="1400" b="0">
+                <a:rPr sz="1600" b="0">
                   <a:solidFill>
                     <a:schemeClr val="dk1"/>
                   </a:solidFill>
@@ -13576,7 +14058,7 @@
             </a:ln>
           </p:spPr>
           <p:txBody>
-            <a:bodyPr wrap="square" anchor="t" lIns="109728" rIns="109728" tIns="73152" bIns="73152">
+            <a:bodyPr wrap="square" anchor="ctr" lIns="109728" rIns="109728" tIns="73152" bIns="73152">
               <a:spAutoFit/>
             </a:bodyPr>
             <a:lstStyle/>
@@ -13590,7 +14072,7 @@
                 </a:spcAft>
               </a:pPr>
               <a:r>
-                <a:rPr sz="1400" b="0">
+                <a:rPr sz="1600" b="0">
                   <a:solidFill>
                     <a:schemeClr val="dk1"/>
                   </a:solidFill>
@@ -13611,7 +14093,7 @@
         </p:nvCxnSpPr>
         <p:spPr>
           <a:xfrm>
-            <a:off x="457200" y="2578608"/>
+            <a:off x="457200" y="2921508"/>
             <a:ext cx="11274552" cy="0"/>
           </a:xfrm>
           <a:prstGeom prst="line">
@@ -13634,7 +14116,7 @@
         </p:nvGrpSpPr>
         <p:grpSpPr>
           <a:xfrm>
-            <a:off x="484632" y="3182112"/>
+            <a:off x="484632" y="3525012"/>
             <a:ext cx="11134373" cy="548640"/>
             <a:chOff x="0" y="0"/>
             <a:chExt cx="11134373" cy="548640"/>
@@ -13659,7 +14141,7 @@
             </a:solidFill>
           </p:spPr>
           <p:txBody>
-            <a:bodyPr rtlCol="0" anchor="ctr" wrap="square" lIns="109728" rIns="109728" tIns="73152" bIns="73152"/>
+            <a:bodyPr rtlCol="0" anchor="ctr" wrap="square" lIns="36576" rIns="36576" tIns="36576" bIns="36576"/>
             <a:lstStyle/>
             <a:p>
               <a:pPr algn="ctr">
@@ -13671,7 +14153,7 @@
                 </a:spcAft>
               </a:pPr>
               <a:r>
-                <a:rPr sz="1200" b="1">
+                <a:rPr sz="1500" b="1">
                   <a:solidFill>
                     <a:schemeClr val="dk1"/>
                   </a:solidFill>
@@ -13703,7 +14185,7 @@
             </a:ln>
           </p:spPr>
           <p:txBody>
-            <a:bodyPr wrap="square" anchor="t" lIns="109728" rIns="109728" tIns="73152" bIns="73152">
+            <a:bodyPr wrap="square" anchor="ctr" lIns="109728" rIns="109728" tIns="73152" bIns="73152">
               <a:spAutoFit/>
             </a:bodyPr>
             <a:lstStyle/>
@@ -13717,7 +14199,7 @@
                 </a:spcAft>
               </a:pPr>
               <a:r>
-                <a:rPr sz="1400" b="0">
+                <a:rPr sz="1600" b="0">
                   <a:solidFill>
                     <a:schemeClr val="dk1"/>
                   </a:solidFill>
@@ -13749,7 +14231,7 @@
             </a:ln>
           </p:spPr>
           <p:txBody>
-            <a:bodyPr wrap="square" anchor="t" lIns="109728" rIns="109728" tIns="73152" bIns="73152">
+            <a:bodyPr wrap="square" anchor="ctr" lIns="109728" rIns="109728" tIns="73152" bIns="73152">
               <a:spAutoFit/>
             </a:bodyPr>
             <a:lstStyle/>
@@ -13763,7 +14245,7 @@
                 </a:spcAft>
               </a:pPr>
               <a:r>
-                <a:rPr sz="1400" b="0">
+                <a:rPr sz="1600" b="0">
                   <a:solidFill>
                     <a:schemeClr val="dk1"/>
                   </a:solidFill>
@@ -13795,7 +14277,7 @@
             </a:ln>
           </p:spPr>
           <p:txBody>
-            <a:bodyPr wrap="square" anchor="t" lIns="109728" rIns="109728" tIns="73152" bIns="73152">
+            <a:bodyPr wrap="square" anchor="ctr" lIns="109728" rIns="109728" tIns="73152" bIns="73152">
               <a:spAutoFit/>
             </a:bodyPr>
             <a:lstStyle/>
@@ -13809,7 +14291,7 @@
                 </a:spcAft>
               </a:pPr>
               <a:r>
-                <a:rPr sz="1400" b="0">
+                <a:rPr sz="1600" b="0">
                   <a:solidFill>
                     <a:schemeClr val="dk1"/>
                   </a:solidFill>
@@ -13830,7 +14312,7 @@
         </p:nvCxnSpPr>
         <p:spPr>
           <a:xfrm>
-            <a:off x="457200" y="3163824"/>
+            <a:off x="457200" y="3506724"/>
             <a:ext cx="11274552" cy="0"/>
           </a:xfrm>
           <a:prstGeom prst="line">
@@ -13853,7 +14335,7 @@
         </p:nvGrpSpPr>
         <p:grpSpPr>
           <a:xfrm>
-            <a:off x="484632" y="3767327"/>
+            <a:off x="484632" y="4110227"/>
             <a:ext cx="11134373" cy="548640"/>
             <a:chOff x="0" y="0"/>
             <a:chExt cx="11134373" cy="548640"/>
@@ -13910,7 +14392,7 @@
             </a:ln>
           </p:spPr>
           <p:txBody>
-            <a:bodyPr wrap="square" anchor="t" lIns="109728" rIns="109728" tIns="73152" bIns="73152">
+            <a:bodyPr wrap="square" anchor="ctr" lIns="109728" rIns="109728" tIns="73152" bIns="73152">
               <a:spAutoFit/>
             </a:bodyPr>
             <a:lstStyle/>
@@ -13924,7 +14406,7 @@
                 </a:spcAft>
               </a:pPr>
               <a:r>
-                <a:rPr sz="1400" b="0">
+                <a:rPr sz="1600" b="0">
                   <a:solidFill>
                     <a:schemeClr val="dk1"/>
                   </a:solidFill>
@@ -13956,7 +14438,7 @@
             </a:ln>
           </p:spPr>
           <p:txBody>
-            <a:bodyPr wrap="square" anchor="t" lIns="109728" rIns="109728" tIns="73152" bIns="73152">
+            <a:bodyPr wrap="square" anchor="ctr" lIns="109728" rIns="109728" tIns="73152" bIns="73152">
               <a:spAutoFit/>
             </a:bodyPr>
             <a:lstStyle/>
@@ -13970,7 +14452,7 @@
                 </a:spcAft>
               </a:pPr>
               <a:r>
-                <a:rPr sz="1400" b="0">
+                <a:rPr sz="1600" b="0">
                   <a:solidFill>
                     <a:schemeClr val="dk1"/>
                   </a:solidFill>
@@ -14002,7 +14484,7 @@
             </a:ln>
           </p:spPr>
           <p:txBody>
-            <a:bodyPr wrap="square" anchor="t" lIns="109728" rIns="109728" tIns="73152" bIns="73152">
+            <a:bodyPr wrap="square" anchor="ctr" lIns="109728" rIns="109728" tIns="73152" bIns="73152">
               <a:spAutoFit/>
             </a:bodyPr>
             <a:lstStyle/>
@@ -14016,7 +14498,7 @@
                 </a:spcAft>
               </a:pPr>
               <a:r>
-                <a:rPr sz="1400" b="0">
+                <a:rPr sz="1600" b="0">
                   <a:solidFill>
                     <a:schemeClr val="dk1"/>
                   </a:solidFill>
@@ -14037,7 +14519,7 @@
         </p:nvCxnSpPr>
         <p:spPr>
           <a:xfrm>
-            <a:off x="457200" y="3749039"/>
+            <a:off x="457200" y="4091939"/>
             <a:ext cx="11274552" cy="0"/>
           </a:xfrm>
           <a:prstGeom prst="line">
@@ -14060,7 +14542,7 @@
         </p:nvGrpSpPr>
         <p:grpSpPr>
           <a:xfrm>
-            <a:off x="484632" y="4352544"/>
+            <a:off x="484632" y="4695444"/>
             <a:ext cx="11134373" cy="548640"/>
             <a:chOff x="0" y="0"/>
             <a:chExt cx="11134373" cy="548640"/>
@@ -14117,7 +14599,7 @@
             </a:ln>
           </p:spPr>
           <p:txBody>
-            <a:bodyPr wrap="square" anchor="t" lIns="109728" rIns="109728" tIns="73152" bIns="73152">
+            <a:bodyPr wrap="square" anchor="ctr" lIns="109728" rIns="109728" tIns="73152" bIns="73152">
               <a:spAutoFit/>
             </a:bodyPr>
             <a:lstStyle/>
@@ -14131,7 +14613,7 @@
                 </a:spcAft>
               </a:pPr>
               <a:r>
-                <a:rPr sz="1400" b="0">
+                <a:rPr sz="1600" b="0">
                   <a:solidFill>
                     <a:schemeClr val="dk1"/>
                   </a:solidFill>
@@ -14163,7 +14645,7 @@
             </a:ln>
           </p:spPr>
           <p:txBody>
-            <a:bodyPr wrap="square" anchor="t" lIns="109728" rIns="109728" tIns="73152" bIns="73152">
+            <a:bodyPr wrap="square" anchor="ctr" lIns="109728" rIns="109728" tIns="73152" bIns="73152">
               <a:spAutoFit/>
             </a:bodyPr>
             <a:lstStyle/>
@@ -14177,7 +14659,7 @@
                 </a:spcAft>
               </a:pPr>
               <a:r>
-                <a:rPr sz="1400" b="0">
+                <a:rPr sz="1600" b="0">
                   <a:solidFill>
                     <a:schemeClr val="dk1"/>
                   </a:solidFill>
@@ -14209,7 +14691,7 @@
             </a:ln>
           </p:spPr>
           <p:txBody>
-            <a:bodyPr wrap="square" anchor="t" lIns="109728" rIns="109728" tIns="73152" bIns="73152">
+            <a:bodyPr wrap="square" anchor="ctr" lIns="109728" rIns="109728" tIns="73152" bIns="73152">
               <a:spAutoFit/>
             </a:bodyPr>
             <a:lstStyle/>
@@ -14223,7 +14705,7 @@
                 </a:spcAft>
               </a:pPr>
               <a:r>
-                <a:rPr sz="1400" b="0">
+                <a:rPr sz="1600" b="0">
                   <a:solidFill>
                     <a:schemeClr val="dk1"/>
                   </a:solidFill>
@@ -14244,7 +14726,7 @@
         </p:nvCxnSpPr>
         <p:spPr>
           <a:xfrm>
-            <a:off x="457200" y="4334256"/>
+            <a:off x="457200" y="4677156"/>
             <a:ext cx="11274552" cy="0"/>
           </a:xfrm>
           <a:prstGeom prst="line">
@@ -14267,7 +14749,7 @@
         </p:nvGrpSpPr>
         <p:grpSpPr>
           <a:xfrm>
-            <a:off x="484632" y="4937760"/>
+            <a:off x="484632" y="5280660"/>
             <a:ext cx="11134373" cy="548640"/>
             <a:chOff x="0" y="0"/>
             <a:chExt cx="11134373" cy="548640"/>
@@ -14292,7 +14774,7 @@
             </a:solidFill>
           </p:spPr>
           <p:txBody>
-            <a:bodyPr rtlCol="0" anchor="ctr" wrap="square" lIns="109728" rIns="109728" tIns="73152" bIns="73152"/>
+            <a:bodyPr rtlCol="0" anchor="ctr" wrap="square" lIns="36576" rIns="36576" tIns="36576" bIns="36576"/>
             <a:lstStyle/>
             <a:p>
               <a:pPr algn="ctr">
@@ -14304,7 +14786,7 @@
                 </a:spcAft>
               </a:pPr>
               <a:r>
-                <a:rPr sz="1200" b="1">
+                <a:rPr sz="1500" b="1">
                   <a:solidFill>
                     <a:schemeClr val="lt1"/>
                   </a:solidFill>
@@ -14336,7 +14818,7 @@
             </a:ln>
           </p:spPr>
           <p:txBody>
-            <a:bodyPr wrap="square" anchor="t" lIns="109728" rIns="109728" tIns="73152" bIns="73152">
+            <a:bodyPr wrap="square" anchor="ctr" lIns="109728" rIns="109728" tIns="73152" bIns="73152">
               <a:spAutoFit/>
             </a:bodyPr>
             <a:lstStyle/>
@@ -14350,7 +14832,7 @@
                 </a:spcAft>
               </a:pPr>
               <a:r>
-                <a:rPr sz="1400" b="0">
+                <a:rPr sz="1600" b="0">
                   <a:solidFill>
                     <a:schemeClr val="dk1"/>
                   </a:solidFill>
@@ -14382,7 +14864,7 @@
             </a:ln>
           </p:spPr>
           <p:txBody>
-            <a:bodyPr wrap="square" anchor="t" lIns="109728" rIns="109728" tIns="73152" bIns="73152">
+            <a:bodyPr wrap="square" anchor="ctr" lIns="109728" rIns="109728" tIns="73152" bIns="73152">
               <a:spAutoFit/>
             </a:bodyPr>
             <a:lstStyle/>
@@ -14396,7 +14878,7 @@
                 </a:spcAft>
               </a:pPr>
               <a:r>
-                <a:rPr sz="1400" b="0">
+                <a:rPr sz="1600" b="0">
                   <a:solidFill>
                     <a:schemeClr val="dk1"/>
                   </a:solidFill>
@@ -14428,7 +14910,7 @@
             </a:ln>
           </p:spPr>
           <p:txBody>
-            <a:bodyPr wrap="square" anchor="t" lIns="109728" rIns="109728" tIns="73152" bIns="73152">
+            <a:bodyPr wrap="square" anchor="ctr" lIns="109728" rIns="109728" tIns="73152" bIns="73152">
               <a:spAutoFit/>
             </a:bodyPr>
             <a:lstStyle/>
@@ -14442,7 +14924,7 @@
                 </a:spcAft>
               </a:pPr>
               <a:r>
-                <a:rPr sz="1400" b="0">
+                <a:rPr sz="1600" b="0">
                   <a:solidFill>
                     <a:schemeClr val="dk1"/>
                   </a:solidFill>
@@ -14463,7 +14945,7 @@
         </p:nvCxnSpPr>
         <p:spPr>
           <a:xfrm>
-            <a:off x="457200" y="4919472"/>
+            <a:off x="457200" y="5262372"/>
             <a:ext cx="11274552" cy="0"/>
           </a:xfrm>
           <a:prstGeom prst="line">
@@ -14532,7 +15014,7 @@
         </p:nvGraphicFramePr>
         <p:xfrm>
           <a:off x="457200" y="1645920"/>
-          <a:ext cx="6990222" cy="2468880"/>
+          <a:ext cx="6990222" cy="4526280"/>
         </p:xfrm>
         <a:graphic>
           <a:graphicData uri="http://schemas.openxmlformats.org/drawingml/2006/chart">
@@ -14548,7 +15030,7 @@
         </p:nvSpPr>
         <p:spPr>
           <a:xfrm>
-            <a:off x="7557150" y="1645920"/>
+            <a:off x="7557150" y="2967228"/>
             <a:ext cx="4174601" cy="1883664"/>
           </a:xfrm>
           <a:prstGeom prst="roundRect">
@@ -14583,7 +15065,7 @@
         </p:nvGrpSpPr>
         <p:grpSpPr>
           <a:xfrm>
-            <a:off x="7676022" y="1719072"/>
+            <a:off x="7676022" y="3040380"/>
             <a:ext cx="3946001" cy="554735"/>
             <a:chOff x="0" y="0"/>
             <a:chExt cx="3946001" cy="554735"/>
@@ -14597,8 +15079,8 @@
           </p:nvSpPr>
           <p:spPr>
             <a:xfrm>
-              <a:off x="0" y="121919"/>
-              <a:ext cx="310896" cy="310896"/>
+              <a:off x="0" y="85344"/>
+              <a:ext cx="384048" cy="384048"/>
             </a:xfrm>
             <a:prstGeom prst="ellipse">
               <a:avLst/>
@@ -14620,7 +15102,7 @@
                 </a:spcAft>
               </a:pPr>
               <a:r>
-                <a:rPr sz="1000" b="1">
+                <a:rPr sz="1300" b="1">
                   <a:solidFill>
                     <a:schemeClr val="lt1"/>
                   </a:solidFill>
@@ -14652,7 +15134,7 @@
             </a:ln>
           </p:spPr>
           <p:txBody>
-            <a:bodyPr wrap="square" anchor="t" lIns="109728" rIns="109728" tIns="73152" bIns="73152">
+            <a:bodyPr wrap="square" anchor="ctr" lIns="109728" rIns="109728" tIns="73152" bIns="73152">
               <a:spAutoFit/>
             </a:bodyPr>
             <a:lstStyle/>
@@ -14666,7 +15148,7 @@
                 </a:spcAft>
               </a:pPr>
               <a:r>
-                <a:rPr sz="1400" b="0">
+                <a:rPr sz="1600" b="0">
                   <a:solidFill>
                     <a:schemeClr val="dk1"/>
                   </a:solidFill>
@@ -14687,7 +15169,7 @@
         </p:nvGrpSpPr>
         <p:grpSpPr>
           <a:xfrm>
-            <a:off x="7676022" y="2310384"/>
+            <a:off x="7676022" y="3631692"/>
             <a:ext cx="3946001" cy="554735"/>
             <a:chOff x="0" y="0"/>
             <a:chExt cx="3946001" cy="554735"/>
@@ -14701,8 +15183,8 @@
           </p:nvSpPr>
           <p:spPr>
             <a:xfrm>
-              <a:off x="0" y="121920"/>
-              <a:ext cx="310896" cy="310896"/>
+              <a:off x="0" y="85344"/>
+              <a:ext cx="384048" cy="384048"/>
             </a:xfrm>
             <a:prstGeom prst="ellipse">
               <a:avLst/>
@@ -14724,7 +15206,7 @@
                 </a:spcAft>
               </a:pPr>
               <a:r>
-                <a:rPr sz="1000" b="1">
+                <a:rPr sz="1300" b="1">
                   <a:solidFill>
                     <a:schemeClr val="lt1"/>
                   </a:solidFill>
@@ -14756,7 +15238,7 @@
             </a:ln>
           </p:spPr>
           <p:txBody>
-            <a:bodyPr wrap="square" anchor="t" lIns="109728" rIns="109728" tIns="73152" bIns="73152">
+            <a:bodyPr wrap="square" anchor="ctr" lIns="109728" rIns="109728" tIns="73152" bIns="73152">
               <a:spAutoFit/>
             </a:bodyPr>
             <a:lstStyle/>
@@ -14770,7 +15252,7 @@
                 </a:spcAft>
               </a:pPr>
               <a:r>
-                <a:rPr sz="1400" b="0">
+                <a:rPr sz="1600" b="0">
                   <a:solidFill>
                     <a:schemeClr val="dk1"/>
                   </a:solidFill>
@@ -14791,7 +15273,7 @@
         </p:nvGrpSpPr>
         <p:grpSpPr>
           <a:xfrm>
-            <a:off x="7676022" y="2901696"/>
+            <a:off x="7676022" y="4223004"/>
             <a:ext cx="3946001" cy="554735"/>
             <a:chOff x="0" y="0"/>
             <a:chExt cx="3946001" cy="554735"/>
@@ -14805,8 +15287,8 @@
           </p:nvSpPr>
           <p:spPr>
             <a:xfrm>
-              <a:off x="0" y="121920"/>
-              <a:ext cx="310896" cy="310896"/>
+              <a:off x="0" y="85344"/>
+              <a:ext cx="384048" cy="384048"/>
             </a:xfrm>
             <a:prstGeom prst="ellipse">
               <a:avLst/>
@@ -14828,7 +15310,7 @@
                 </a:spcAft>
               </a:pPr>
               <a:r>
-                <a:rPr sz="1000" b="1">
+                <a:rPr sz="1300" b="1">
                   <a:solidFill>
                     <a:schemeClr val="lt1"/>
                   </a:solidFill>
@@ -14860,7 +15342,7 @@
             </a:ln>
           </p:spPr>
           <p:txBody>
-            <a:bodyPr wrap="square" anchor="t" lIns="109728" rIns="109728" tIns="73152" bIns="73152">
+            <a:bodyPr wrap="square" anchor="ctr" lIns="109728" rIns="109728" tIns="73152" bIns="73152">
               <a:spAutoFit/>
             </a:bodyPr>
             <a:lstStyle/>
@@ -14874,7 +15356,7 @@
                 </a:spcAft>
               </a:pPr>
               <a:r>
-                <a:rPr sz="1400" b="0">
+                <a:rPr sz="1600" b="0">
                   <a:solidFill>
                     <a:schemeClr val="dk1"/>
                   </a:solidFill>
@@ -14941,7 +15423,7 @@
         </p:nvGraphicFramePr>
         <p:xfrm>
           <a:off x="457200" y="1645920"/>
-          <a:ext cx="11274552" cy="3154680"/>
+          <a:ext cx="11274552" cy="4526280"/>
         </p:xfrm>
         <a:graphic>
           <a:graphicData uri="http://schemas.openxmlformats.org/drawingml/2006/chart">
@@ -14979,8 +15461,8 @@
         </p:nvSpPr>
         <p:spPr>
           <a:xfrm>
-            <a:off x="457200" y="365760"/>
-            <a:ext cx="11274552" cy="1051560"/>
+            <a:off x="822960" y="2377440"/>
+            <a:ext cx="10515600" cy="685800"/>
           </a:xfrm>
         </p:spPr>
         <p:txBody>
@@ -15005,8 +15487,8 @@
         </p:nvSpPr>
         <p:spPr>
           <a:xfrm>
-            <a:off x="1371600" y="3886200"/>
-            <a:ext cx="6400800" cy="1752600"/>
+            <a:off x="822960" y="3172968"/>
+            <a:ext cx="10515600" cy="502920"/>
           </a:xfrm>
         </p:spPr>
         <p:txBody>
@@ -15072,7 +15554,7 @@
         <p:spPr>
           <a:xfrm>
             <a:off x="457200" y="1645920"/>
-            <a:ext cx="11274552" cy="420624"/>
+            <a:ext cx="11274552" cy="451104"/>
           </a:xfrm>
           <a:prstGeom prst="rect">
             <a:avLst/>
@@ -15097,7 +15579,7 @@
               </a:spcAft>
             </a:pPr>
             <a:r>
-              <a:rPr sz="1800" b="1">
+              <a:rPr sz="2000" b="1">
                 <a:solidFill>
                   <a:schemeClr val="dk1"/>
                 </a:solidFill>
@@ -15117,10 +15599,10 @@
         </p:nvGrpSpPr>
         <p:grpSpPr>
           <a:xfrm>
-            <a:off x="457200" y="2176272"/>
-            <a:ext cx="3648456" cy="1674368"/>
+            <a:off x="457200" y="3022092"/>
+            <a:ext cx="3648456" cy="2334768"/>
             <a:chOff x="0" y="0"/>
-            <a:chExt cx="3648456" cy="1674368"/>
+            <a:chExt cx="3648456" cy="2334768"/>
           </a:xfrm>
         </p:grpSpPr>
         <p:sp>
@@ -15132,11 +15614,11 @@
           <p:spPr>
             <a:xfrm>
               <a:off x="0" y="0"/>
-              <a:ext cx="3648456" cy="1674368"/>
+              <a:ext cx="3648456" cy="2334768"/>
             </a:xfrm>
             <a:prstGeom prst="roundRect">
               <a:avLst>
-                <a:gd name="adj" fmla="val 3277"/>
+                <a:gd name="adj" fmla="val 2350"/>
               </a:avLst>
             </a:prstGeom>
             <a:solidFill>
@@ -15167,7 +15649,7 @@
           <p:spPr>
             <a:xfrm>
               <a:off x="0" y="0"/>
-              <a:ext cx="3648456" cy="530352"/>
+              <a:ext cx="3648456" cy="560832"/>
             </a:xfrm>
             <a:prstGeom prst="rect">
               <a:avLst/>
@@ -15189,7 +15671,7 @@
                 </a:spcAft>
               </a:pPr>
               <a:r>
-                <a:rPr sz="1800" b="1">
+                <a:rPr sz="2000" b="1">
                   <a:solidFill>
                     <a:schemeClr val="lt1"/>
                   </a:solidFill>
@@ -15209,8 +15691,8 @@
           </p:nvSpPr>
           <p:spPr>
             <a:xfrm>
-              <a:off x="109728" y="530352"/>
-              <a:ext cx="3429000" cy="1070864"/>
+              <a:off x="109728" y="560832"/>
+              <a:ext cx="3429000" cy="1700784"/>
             </a:xfrm>
             <a:prstGeom prst="rect">
               <a:avLst/>
@@ -15236,7 +15718,7 @@
                 <a:buChar char="•"/>
               </a:pPr>
               <a:r>
-                <a:rPr sz="1400" b="0">
+                <a:rPr sz="1600" b="0">
                   <a:solidFill>
                     <a:schemeClr val="dk1"/>
                   </a:solidFill>
@@ -15257,7 +15739,7 @@
                 <a:buChar char="•"/>
               </a:pPr>
               <a:r>
-                <a:rPr sz="1400" b="0">
+                <a:rPr sz="1600" b="0">
                   <a:solidFill>
                     <a:schemeClr val="dk1"/>
                   </a:solidFill>
@@ -15265,6 +15747,27 @@
                   <a:ea typeface="Yu Gothic"/>
                 </a:rPr>
                 <a:t>受付通知を自動で返し、受領状況を明確にする</a:t>
+              </a:r>
+            </a:p>
+            <a:p>
+              <a:pPr algn="l" marL="201168" indent="-109728">
+                <a:lnSpc>
+                  <a:spcPct val="100000"/>
+                </a:lnSpc>
+                <a:spcAft>
+                  <a:spcPts val="400"/>
+                </a:spcAft>
+                <a:buChar char="•"/>
+              </a:pPr>
+              <a:r>
+                <a:rPr sz="1600" b="0">
+                  <a:solidFill>
+                    <a:schemeClr val="dk1"/>
+                  </a:solidFill>
+                  <a:latin typeface="Yu Gothic"/>
+                  <a:ea typeface="Yu Gothic"/>
+                </a:rPr>
+                <a:t>対応状況を同じ窓口で確認する</a:t>
               </a:r>
             </a:p>
           </p:txBody>
@@ -15278,10 +15781,10 @@
         </p:nvGrpSpPr>
         <p:grpSpPr>
           <a:xfrm>
-            <a:off x="4270248" y="2176272"/>
-            <a:ext cx="3648456" cy="1674368"/>
+            <a:off x="4270248" y="3022092"/>
+            <a:ext cx="3648456" cy="2334768"/>
             <a:chOff x="0" y="0"/>
-            <a:chExt cx="3648456" cy="1674368"/>
+            <a:chExt cx="3648456" cy="2334768"/>
           </a:xfrm>
         </p:grpSpPr>
         <p:sp>
@@ -15293,11 +15796,11 @@
           <p:spPr>
             <a:xfrm>
               <a:off x="0" y="0"/>
-              <a:ext cx="3648456" cy="1674368"/>
+              <a:ext cx="3648456" cy="2334768"/>
             </a:xfrm>
             <a:prstGeom prst="roundRect">
               <a:avLst>
-                <a:gd name="adj" fmla="val 3277"/>
+                <a:gd name="adj" fmla="val 2350"/>
               </a:avLst>
             </a:prstGeom>
             <a:solidFill>
@@ -15326,7 +15829,7 @@
           <p:spPr>
             <a:xfrm>
               <a:off x="0" y="0"/>
-              <a:ext cx="3648456" cy="530352"/>
+              <a:ext cx="3648456" cy="560832"/>
             </a:xfrm>
             <a:prstGeom prst="rect">
               <a:avLst/>
@@ -15348,7 +15851,7 @@
                 </a:spcAft>
               </a:pPr>
               <a:r>
-                <a:rPr sz="1800" b="1">
+                <a:rPr sz="2000" b="1">
                   <a:solidFill>
                     <a:schemeClr val="lt1"/>
                   </a:solidFill>
@@ -15368,8 +15871,8 @@
           </p:nvSpPr>
           <p:spPr>
             <a:xfrm>
-              <a:off x="109728" y="530352"/>
-              <a:ext cx="3429000" cy="1070864"/>
+              <a:off x="109728" y="560832"/>
+              <a:ext cx="3429000" cy="1700784"/>
             </a:xfrm>
             <a:prstGeom prst="rect">
               <a:avLst/>
@@ -15395,7 +15898,7 @@
                 <a:buChar char="•"/>
               </a:pPr>
               <a:r>
-                <a:rPr sz="1400" b="0">
+                <a:rPr sz="1600" b="0">
                   <a:solidFill>
                     <a:schemeClr val="dk1"/>
                   </a:solidFill>
@@ -15416,7 +15919,7 @@
                 <a:buChar char="•"/>
               </a:pPr>
               <a:r>
-                <a:rPr sz="1400" b="0">
+                <a:rPr sz="1600" b="0">
                   <a:solidFill>
                     <a:schemeClr val="dk1"/>
                   </a:solidFill>
@@ -15424,6 +15927,27 @@
                   <a:ea typeface="Yu Gothic"/>
                 </a:rPr>
                 <a:t>必要情報をそろえて担当へ引き継ぐ</a:t>
+              </a:r>
+            </a:p>
+            <a:p>
+              <a:pPr algn="l" marL="201168" indent="-109728">
+                <a:lnSpc>
+                  <a:spcPct val="100000"/>
+                </a:lnSpc>
+                <a:spcAft>
+                  <a:spcPts val="400"/>
+                </a:spcAft>
+                <a:buChar char="•"/>
+              </a:pPr>
+              <a:r>
+                <a:rPr sz="1600" b="0">
+                  <a:solidFill>
+                    <a:schemeClr val="dk1"/>
+                  </a:solidFill>
+                  <a:latin typeface="Yu Gothic"/>
+                  <a:ea typeface="Yu Gothic"/>
+                </a:rPr>
+                <a:t>緊急度に応じた対応順を決める</a:t>
               </a:r>
             </a:p>
           </p:txBody>
@@ -15437,10 +15961,10 @@
         </p:nvGrpSpPr>
         <p:grpSpPr>
           <a:xfrm>
-            <a:off x="8083296" y="2176272"/>
-            <a:ext cx="3648456" cy="1674368"/>
+            <a:off x="8083296" y="3022092"/>
+            <a:ext cx="3648456" cy="2334768"/>
             <a:chOff x="0" y="0"/>
-            <a:chExt cx="3648456" cy="1674368"/>
+            <a:chExt cx="3648456" cy="2334768"/>
           </a:xfrm>
         </p:grpSpPr>
         <p:sp>
@@ -15452,11 +15976,11 @@
           <p:spPr>
             <a:xfrm>
               <a:off x="0" y="0"/>
-              <a:ext cx="3648456" cy="1674368"/>
+              <a:ext cx="3648456" cy="2334768"/>
             </a:xfrm>
             <a:prstGeom prst="roundRect">
               <a:avLst>
-                <a:gd name="adj" fmla="val 3277"/>
+                <a:gd name="adj" fmla="val 2350"/>
               </a:avLst>
             </a:prstGeom>
             <a:solidFill>
@@ -15487,7 +16011,7 @@
           <p:spPr>
             <a:xfrm>
               <a:off x="0" y="0"/>
-              <a:ext cx="3648456" cy="530352"/>
+              <a:ext cx="3648456" cy="560832"/>
             </a:xfrm>
             <a:prstGeom prst="rect">
               <a:avLst/>
@@ -15509,7 +16033,7 @@
                 </a:spcAft>
               </a:pPr>
               <a:r>
-                <a:rPr sz="1800" b="1">
+                <a:rPr sz="2000" b="1">
                   <a:solidFill>
                     <a:schemeClr val="lt1"/>
                   </a:solidFill>
@@ -15529,8 +16053,8 @@
           </p:nvSpPr>
           <p:spPr>
             <a:xfrm>
-              <a:off x="109727" y="530352"/>
-              <a:ext cx="3429000" cy="1070864"/>
+              <a:off x="109727" y="560832"/>
+              <a:ext cx="3429000" cy="1700784"/>
             </a:xfrm>
             <a:prstGeom prst="rect">
               <a:avLst/>
@@ -15556,7 +16080,7 @@
                 <a:buChar char="•"/>
               </a:pPr>
               <a:r>
-                <a:rPr sz="1400" b="0">
+                <a:rPr sz="1600" b="0">
                   <a:solidFill>
                     <a:schemeClr val="dk1"/>
                   </a:solidFill>
@@ -15577,7 +16101,7 @@
                 <a:buChar char="•"/>
               </a:pPr>
               <a:r>
-                <a:rPr sz="1400" b="0">
+                <a:rPr sz="1600" b="0">
                   <a:solidFill>
                     <a:schemeClr val="dk1"/>
                   </a:solidFill>
@@ -15585,6 +16109,27 @@
                   <a:ea typeface="Yu Gothic"/>
                 </a:rPr>
                 <a:t>解決内容を記録して次の回答に活用する</a:t>
+              </a:r>
+            </a:p>
+            <a:p>
+              <a:pPr algn="l" marL="201168" indent="-109728">
+                <a:lnSpc>
+                  <a:spcPct val="100000"/>
+                </a:lnSpc>
+                <a:spcAft>
+                  <a:spcPts val="400"/>
+                </a:spcAft>
+                <a:buChar char="•"/>
+              </a:pPr>
+              <a:r>
+                <a:rPr sz="1600" b="0">
+                  <a:solidFill>
+                    <a:schemeClr val="dk1"/>
+                  </a:solidFill>
+                  <a:latin typeface="Yu Gothic"/>
+                  <a:ea typeface="Yu Gothic"/>
+                </a:rPr>
+                <a:t>同じ質問への再回答を減らす</a:t>
               </a:r>
             </a:p>
           </p:txBody>
@@ -15642,10 +16187,10 @@
         </p:nvGrpSpPr>
         <p:grpSpPr>
           <a:xfrm>
-            <a:off x="457200" y="1645920"/>
-            <a:ext cx="3648456" cy="1461008"/>
+            <a:off x="457200" y="2520696"/>
+            <a:ext cx="3648456" cy="2090928"/>
             <a:chOff x="0" y="0"/>
-            <a:chExt cx="3648456" cy="1461008"/>
+            <a:chExt cx="3648456" cy="2090928"/>
           </a:xfrm>
         </p:grpSpPr>
         <p:sp>
@@ -15657,11 +16202,11 @@
           <p:spPr>
             <a:xfrm>
               <a:off x="0" y="0"/>
-              <a:ext cx="3648456" cy="1461008"/>
+              <a:ext cx="3648456" cy="2090928"/>
             </a:xfrm>
             <a:prstGeom prst="roundRect">
               <a:avLst>
-                <a:gd name="adj" fmla="val 3755"/>
+                <a:gd name="adj" fmla="val 2624"/>
               </a:avLst>
             </a:prstGeom>
             <a:solidFill>
@@ -15692,7 +16237,7 @@
           <p:spPr>
             <a:xfrm>
               <a:off x="109728" y="73152"/>
-              <a:ext cx="3429000" cy="457200"/>
+              <a:ext cx="3429000" cy="487680"/>
             </a:xfrm>
             <a:prstGeom prst="rect">
               <a:avLst/>
@@ -15717,7 +16262,7 @@
                 </a:spcAft>
               </a:pPr>
               <a:r>
-                <a:rPr sz="1800" b="1">
+                <a:rPr sz="2000" b="1">
                   <a:solidFill>
                     <a:schemeClr val="accent1"/>
                   </a:solidFill>
@@ -15737,8 +16282,8 @@
           </p:nvSpPr>
           <p:spPr>
             <a:xfrm>
-              <a:off x="109728" y="530352"/>
-              <a:ext cx="3429000" cy="747776"/>
+              <a:off x="109728" y="560832"/>
+              <a:ext cx="3429000" cy="1103376"/>
             </a:xfrm>
             <a:prstGeom prst="rect">
               <a:avLst/>
@@ -15764,7 +16309,7 @@
                 <a:buChar char="•"/>
               </a:pPr>
               <a:r>
-                <a:rPr sz="1400" b="0">
+                <a:rPr sz="1600" b="0">
                   <a:solidFill>
                     <a:schemeClr val="dk1"/>
                   </a:solidFill>
@@ -15785,7 +16330,7 @@
                 <a:buChar char="•"/>
               </a:pPr>
               <a:r>
-                <a:rPr sz="1400" b="0">
+                <a:rPr sz="1600" b="0">
                   <a:solidFill>
                     <a:schemeClr val="dk1"/>
                   </a:solidFill>
@@ -15793,6 +16338,27 @@
                   <a:ea typeface="Yu Gothic"/>
                 </a:rPr>
                 <a:t>受付通知を自動送信</a:t>
+              </a:r>
+            </a:p>
+            <a:p>
+              <a:pPr algn="l" marL="201168" indent="-109728">
+                <a:lnSpc>
+                  <a:spcPct val="100000"/>
+                </a:lnSpc>
+                <a:spcAft>
+                  <a:spcPts val="400"/>
+                </a:spcAft>
+                <a:buChar char="•"/>
+              </a:pPr>
+              <a:r>
+                <a:rPr sz="1600" b="0">
+                  <a:solidFill>
+                    <a:schemeClr val="dk1"/>
+                  </a:solidFill>
+                  <a:latin typeface="Yu Gothic"/>
+                  <a:ea typeface="Yu Gothic"/>
+                </a:rPr>
+                <a:t>対応状況を受付台帳に記録</a:t>
               </a:r>
             </a:p>
           </p:txBody>
@@ -15832,10 +16398,10 @@
         </p:nvGrpSpPr>
         <p:grpSpPr>
           <a:xfrm>
-            <a:off x="4270248" y="1645920"/>
-            <a:ext cx="3648456" cy="1461008"/>
+            <a:off x="4270248" y="2520696"/>
+            <a:ext cx="3648456" cy="2090928"/>
             <a:chOff x="0" y="0"/>
-            <a:chExt cx="3648456" cy="1461008"/>
+            <a:chExt cx="3648456" cy="2090928"/>
           </a:xfrm>
         </p:grpSpPr>
         <p:sp>
@@ -15847,11 +16413,11 @@
           <p:spPr>
             <a:xfrm>
               <a:off x="0" y="0"/>
-              <a:ext cx="3648456" cy="1461008"/>
+              <a:ext cx="3648456" cy="2090928"/>
             </a:xfrm>
             <a:prstGeom prst="roundRect">
               <a:avLst>
-                <a:gd name="adj" fmla="val 3755"/>
+                <a:gd name="adj" fmla="val 2624"/>
               </a:avLst>
             </a:prstGeom>
             <a:solidFill>
@@ -15882,7 +16448,7 @@
           <p:spPr>
             <a:xfrm>
               <a:off x="109728" y="73152"/>
-              <a:ext cx="3429000" cy="457200"/>
+              <a:ext cx="3429000" cy="487680"/>
             </a:xfrm>
             <a:prstGeom prst="rect">
               <a:avLst/>
@@ -15907,7 +16473,7 @@
                 </a:spcAft>
               </a:pPr>
               <a:r>
-                <a:rPr sz="1800" b="1">
+                <a:rPr sz="2000" b="1">
                   <a:solidFill>
                     <a:schemeClr val="accent1"/>
                   </a:solidFill>
@@ -15927,8 +16493,8 @@
           </p:nvSpPr>
           <p:spPr>
             <a:xfrm>
-              <a:off x="109728" y="530352"/>
-              <a:ext cx="3429000" cy="747776"/>
+              <a:off x="109728" y="560832"/>
+              <a:ext cx="3429000" cy="1347216"/>
             </a:xfrm>
             <a:prstGeom prst="rect">
               <a:avLst/>
@@ -15954,7 +16520,7 @@
                 <a:buChar char="•"/>
               </a:pPr>
               <a:r>
-                <a:rPr sz="1400" b="0">
+                <a:rPr sz="1600" b="0">
                   <a:solidFill>
                     <a:schemeClr val="dk1"/>
                   </a:solidFill>
@@ -15975,7 +16541,7 @@
                 <a:buChar char="•"/>
               </a:pPr>
               <a:r>
-                <a:rPr sz="1400" b="0">
+                <a:rPr sz="1600" b="0">
                   <a:solidFill>
                     <a:schemeClr val="dk1"/>
                   </a:solidFill>
@@ -15983,6 +16549,27 @@
                   <a:ea typeface="Yu Gothic"/>
                 </a:rPr>
                 <a:t>担当チームへ割り当て</a:t>
+              </a:r>
+            </a:p>
+            <a:p>
+              <a:pPr algn="l" marL="201168" indent="-109728">
+                <a:lnSpc>
+                  <a:spcPct val="100000"/>
+                </a:lnSpc>
+                <a:spcAft>
+                  <a:spcPts val="400"/>
+                </a:spcAft>
+                <a:buChar char="•"/>
+              </a:pPr>
+              <a:r>
+                <a:rPr sz="1600" b="0">
+                  <a:solidFill>
+                    <a:schemeClr val="dk1"/>
+                  </a:solidFill>
+                  <a:latin typeface="Yu Gothic"/>
+                  <a:ea typeface="Yu Gothic"/>
+                </a:rPr>
+                <a:t>緊急度を確認して優先順位を決める</a:t>
               </a:r>
             </a:p>
           </p:txBody>
@@ -16022,10 +16609,10 @@
         </p:nvGrpSpPr>
         <p:grpSpPr>
           <a:xfrm>
-            <a:off x="8083296" y="1645920"/>
-            <a:ext cx="3648456" cy="1461008"/>
+            <a:off x="8083296" y="2520696"/>
+            <a:ext cx="3648456" cy="2090928"/>
             <a:chOff x="0" y="0"/>
-            <a:chExt cx="3648456" cy="1461008"/>
+            <a:chExt cx="3648456" cy="2090928"/>
           </a:xfrm>
         </p:grpSpPr>
         <p:sp>
@@ -16037,11 +16624,11 @@
           <p:spPr>
             <a:xfrm>
               <a:off x="0" y="0"/>
-              <a:ext cx="3648456" cy="1461008"/>
+              <a:ext cx="3648456" cy="2090928"/>
             </a:xfrm>
             <a:prstGeom prst="roundRect">
               <a:avLst>
-                <a:gd name="adj" fmla="val 3755"/>
+                <a:gd name="adj" fmla="val 2624"/>
               </a:avLst>
             </a:prstGeom>
             <a:solidFill>
@@ -16072,7 +16659,7 @@
           <p:spPr>
             <a:xfrm>
               <a:off x="109727" y="73152"/>
-              <a:ext cx="3429000" cy="457200"/>
+              <a:ext cx="3429000" cy="487680"/>
             </a:xfrm>
             <a:prstGeom prst="rect">
               <a:avLst/>
@@ -16097,7 +16684,7 @@
                 </a:spcAft>
               </a:pPr>
               <a:r>
-                <a:rPr sz="1800" b="1">
+                <a:rPr sz="2000" b="1">
                   <a:solidFill>
                     <a:schemeClr val="accent1"/>
                   </a:solidFill>
@@ -16117,8 +16704,8 @@
           </p:nvSpPr>
           <p:spPr>
             <a:xfrm>
-              <a:off x="109727" y="530352"/>
-              <a:ext cx="3429000" cy="747776"/>
+              <a:off x="109727" y="560832"/>
+              <a:ext cx="3429000" cy="1103376"/>
             </a:xfrm>
             <a:prstGeom prst="rect">
               <a:avLst/>
@@ -16144,7 +16731,7 @@
                 <a:buChar char="•"/>
               </a:pPr>
               <a:r>
-                <a:rPr sz="1400" b="0">
+                <a:rPr sz="1600" b="0">
                   <a:solidFill>
                     <a:schemeClr val="dk1"/>
                   </a:solidFill>
@@ -16165,7 +16752,7 @@
                 <a:buChar char="•"/>
               </a:pPr>
               <a:r>
-                <a:rPr sz="1400" b="0">
+                <a:rPr sz="1600" b="0">
                   <a:solidFill>
                     <a:schemeClr val="dk1"/>
                   </a:solidFill>
@@ -16173,6 +16760,27 @@
                   <a:ea typeface="Yu Gothic"/>
                 </a:rPr>
                 <a:t>解決内容を記録</a:t>
+              </a:r>
+            </a:p>
+            <a:p>
+              <a:pPr algn="l" marL="201168" indent="-109728">
+                <a:lnSpc>
+                  <a:spcPct val="100000"/>
+                </a:lnSpc>
+                <a:spcAft>
+                  <a:spcPts val="400"/>
+                </a:spcAft>
+                <a:buChar char="•"/>
+              </a:pPr>
+              <a:r>
+                <a:rPr sz="1600" b="0">
+                  <a:solidFill>
+                    <a:schemeClr val="dk1"/>
+                  </a:solidFill>
+                  <a:latin typeface="Yu Gothic"/>
+                  <a:ea typeface="Yu Gothic"/>
+                </a:rPr>
+                <a:t>再利用できる知見をFAQへ反映</a:t>
               </a:r>
             </a:p>
           </p:txBody>
@@ -16212,7 +16820,7 @@
         </p:nvSpPr>
         <p:spPr>
           <a:xfrm>
-            <a:off x="457200" y="3335528"/>
+            <a:off x="457200" y="4840224"/>
             <a:ext cx="11274552" cy="457200"/>
           </a:xfrm>
           <a:prstGeom prst="roundRect">
@@ -16247,7 +16855,7 @@
         </p:nvSpPr>
         <p:spPr>
           <a:xfrm>
-            <a:off x="457200" y="3335528"/>
+            <a:off x="457200" y="4840224"/>
             <a:ext cx="82296" cy="457200"/>
           </a:xfrm>
           <a:prstGeom prst="rect">
@@ -16273,7 +16881,7 @@
         </p:nvSpPr>
         <p:spPr>
           <a:xfrm>
-            <a:off x="603504" y="3335528"/>
+            <a:off x="603504" y="4840224"/>
             <a:ext cx="11073384" cy="457200"/>
           </a:xfrm>
           <a:prstGeom prst="rect">
@@ -16299,7 +16907,7 @@
               </a:spcAft>
             </a:pPr>
             <a:r>
-              <a:rPr sz="1400" b="1">
+              <a:rPr sz="1600" b="1">
                 <a:solidFill>
                   <a:schemeClr val="dk1"/>
                 </a:solidFill>
@@ -16363,10 +16971,10 @@
         </p:nvGrpSpPr>
         <p:grpSpPr>
           <a:xfrm>
-            <a:off x="457200" y="1645920"/>
-            <a:ext cx="3648456" cy="1674368"/>
+            <a:off x="457200" y="2619756"/>
+            <a:ext cx="3648456" cy="2578608"/>
             <a:chOff x="0" y="0"/>
-            <a:chExt cx="3648456" cy="1674368"/>
+            <a:chExt cx="3648456" cy="2578608"/>
           </a:xfrm>
         </p:grpSpPr>
         <p:sp>
@@ -16378,11 +16986,11 @@
           <p:spPr>
             <a:xfrm>
               <a:off x="0" y="0"/>
-              <a:ext cx="3648456" cy="1674368"/>
+              <a:ext cx="3648456" cy="2578608"/>
             </a:xfrm>
             <a:prstGeom prst="roundRect">
               <a:avLst>
-                <a:gd name="adj" fmla="val 3277"/>
+                <a:gd name="adj" fmla="val 2128"/>
               </a:avLst>
             </a:prstGeom>
             <a:solidFill>
@@ -16435,7 +17043,7 @@
                 </a:spcAft>
               </a:pPr>
               <a:r>
-                <a:rPr sz="1200" b="1">
+                <a:rPr sz="1300" b="1">
                   <a:solidFill>
                     <a:schemeClr val="lt1"/>
                   </a:solidFill>
@@ -16456,7 +17064,7 @@
           <p:spPr>
             <a:xfrm>
               <a:off x="585216" y="91440"/>
-              <a:ext cx="2935224" cy="530352"/>
+              <a:ext cx="2935224" cy="560832"/>
             </a:xfrm>
             <a:prstGeom prst="rect">
               <a:avLst/>
@@ -16481,7 +17089,7 @@
                 </a:spcAft>
               </a:pPr>
               <a:r>
-                <a:rPr sz="1800" b="1">
+                <a:rPr sz="2000" b="1">
                   <a:solidFill>
                     <a:schemeClr val="accent1"/>
                   </a:solidFill>
@@ -16502,7 +17110,7 @@
           <p:spPr>
             <a:xfrm>
               <a:off x="146304" y="640080"/>
-              <a:ext cx="3355848" cy="961136"/>
+              <a:ext cx="3355848" cy="1865376"/>
             </a:xfrm>
             <a:prstGeom prst="rect">
               <a:avLst/>
@@ -16528,7 +17136,7 @@
                 <a:buChar char="•"/>
               </a:pPr>
               <a:r>
-                <a:rPr sz="1400" b="0">
+                <a:rPr sz="1600" b="0">
                   <a:solidFill>
                     <a:schemeClr val="dk1"/>
                   </a:solidFill>
@@ -16549,7 +17157,7 @@
                 <a:buChar char="•"/>
               </a:pPr>
               <a:r>
-                <a:rPr sz="1400" b="0">
+                <a:rPr sz="1600" b="0">
                   <a:solidFill>
                     <a:schemeClr val="dk1"/>
                   </a:solidFill>
@@ -16557,6 +17165,27 @@
                   <a:ea typeface="Yu Gothic"/>
                 </a:rPr>
                 <a:t>利用者の声を集め、入力負荷を確認</a:t>
+              </a:r>
+            </a:p>
+            <a:p>
+              <a:pPr algn="l" marL="201168" indent="-109728">
+                <a:lnSpc>
+                  <a:spcPct val="100000"/>
+                </a:lnSpc>
+                <a:spcAft>
+                  <a:spcPts val="400"/>
+                </a:spcAft>
+                <a:buChar char="•"/>
+              </a:pPr>
+              <a:r>
+                <a:rPr sz="1600" b="0">
+                  <a:solidFill>
+                    <a:schemeClr val="dk1"/>
+                  </a:solidFill>
+                  <a:latin typeface="Yu Gothic"/>
+                  <a:ea typeface="Yu Gothic"/>
+                </a:rPr>
+                <a:t>問い合わせ件数と内容を記録</a:t>
               </a:r>
             </a:p>
           </p:txBody>
@@ -16570,10 +17199,10 @@
         </p:nvGrpSpPr>
         <p:grpSpPr>
           <a:xfrm>
-            <a:off x="4270248" y="1645920"/>
-            <a:ext cx="3648456" cy="1674368"/>
+            <a:off x="4270248" y="2619756"/>
+            <a:ext cx="3648456" cy="2578608"/>
             <a:chOff x="0" y="0"/>
-            <a:chExt cx="3648456" cy="1674368"/>
+            <a:chExt cx="3648456" cy="2578608"/>
           </a:xfrm>
         </p:grpSpPr>
         <p:sp>
@@ -16585,11 +17214,11 @@
           <p:spPr>
             <a:xfrm>
               <a:off x="0" y="0"/>
-              <a:ext cx="3648456" cy="1674368"/>
+              <a:ext cx="3648456" cy="2578608"/>
             </a:xfrm>
             <a:prstGeom prst="roundRect">
               <a:avLst>
-                <a:gd name="adj" fmla="val 3277"/>
+                <a:gd name="adj" fmla="val 2128"/>
               </a:avLst>
             </a:prstGeom>
             <a:solidFill>
@@ -16642,7 +17271,7 @@
                 </a:spcAft>
               </a:pPr>
               <a:r>
-                <a:rPr sz="1200" b="1">
+                <a:rPr sz="1300" b="1">
                   <a:solidFill>
                     <a:schemeClr val="lt1"/>
                   </a:solidFill>
@@ -16663,7 +17292,7 @@
           <p:spPr>
             <a:xfrm>
               <a:off x="585216" y="91440"/>
-              <a:ext cx="2935224" cy="530352"/>
+              <a:ext cx="2935224" cy="560832"/>
             </a:xfrm>
             <a:prstGeom prst="rect">
               <a:avLst/>
@@ -16688,7 +17317,7 @@
                 </a:spcAft>
               </a:pPr>
               <a:r>
-                <a:rPr sz="1800" b="1">
+                <a:rPr sz="2000" b="1">
                   <a:solidFill>
                     <a:schemeClr val="accent1"/>
                   </a:solidFill>
@@ -16709,7 +17338,7 @@
           <p:spPr>
             <a:xfrm>
               <a:off x="146304" y="640080"/>
-              <a:ext cx="3355848" cy="961136"/>
+              <a:ext cx="3355848" cy="1865376"/>
             </a:xfrm>
             <a:prstGeom prst="rect">
               <a:avLst/>
@@ -16735,7 +17364,7 @@
                 <a:buChar char="•"/>
               </a:pPr>
               <a:r>
-                <a:rPr sz="1400" b="0">
+                <a:rPr sz="1600" b="0">
                   <a:solidFill>
                     <a:schemeClr val="dk1"/>
                   </a:solidFill>
@@ -16756,7 +17385,7 @@
                 <a:buChar char="•"/>
               </a:pPr>
               <a:r>
-                <a:rPr sz="1400" b="0">
+                <a:rPr sz="1600" b="0">
                   <a:solidFill>
                     <a:schemeClr val="dk1"/>
                   </a:solidFill>
@@ -16764,6 +17393,27 @@
                   <a:ea typeface="Yu Gothic"/>
                 </a:rPr>
                 <a:t>運用状況を見ながら対象を段階的に広げる</a:t>
+              </a:r>
+            </a:p>
+            <a:p>
+              <a:pPr algn="l" marL="201168" indent="-109728">
+                <a:lnSpc>
+                  <a:spcPct val="100000"/>
+                </a:lnSpc>
+                <a:spcAft>
+                  <a:spcPts val="400"/>
+                </a:spcAft>
+                <a:buChar char="•"/>
+              </a:pPr>
+              <a:r>
+                <a:rPr sz="1600" b="0">
+                  <a:solidFill>
+                    <a:schemeClr val="dk1"/>
+                  </a:solidFill>
+                  <a:latin typeface="Yu Gothic"/>
+                  <a:ea typeface="Yu Gothic"/>
+                </a:rPr>
+                <a:t>部門別の利用状況を確認する</a:t>
               </a:r>
             </a:p>
           </p:txBody>
@@ -16777,10 +17427,10 @@
         </p:nvGrpSpPr>
         <p:grpSpPr>
           <a:xfrm>
-            <a:off x="8083296" y="1645920"/>
-            <a:ext cx="3648456" cy="1674368"/>
+            <a:off x="8083296" y="2619756"/>
+            <a:ext cx="3648456" cy="2578608"/>
             <a:chOff x="0" y="0"/>
-            <a:chExt cx="3648456" cy="1674368"/>
+            <a:chExt cx="3648456" cy="2578608"/>
           </a:xfrm>
         </p:grpSpPr>
         <p:sp>
@@ -16792,11 +17442,11 @@
           <p:spPr>
             <a:xfrm>
               <a:off x="0" y="0"/>
-              <a:ext cx="3648456" cy="1674368"/>
+              <a:ext cx="3648456" cy="2578608"/>
             </a:xfrm>
             <a:prstGeom prst="roundRect">
               <a:avLst>
-                <a:gd name="adj" fmla="val 3277"/>
+                <a:gd name="adj" fmla="val 2128"/>
               </a:avLst>
             </a:prstGeom>
             <a:solidFill>
@@ -16847,7 +17497,7 @@
                 </a:spcAft>
               </a:pPr>
               <a:r>
-                <a:rPr sz="1200" b="1">
+                <a:rPr sz="1300" b="1">
                   <a:solidFill>
                     <a:schemeClr val="dk1"/>
                   </a:solidFill>
@@ -16868,7 +17518,7 @@
           <p:spPr>
             <a:xfrm>
               <a:off x="585216" y="91440"/>
-              <a:ext cx="2935224" cy="530352"/>
+              <a:ext cx="2935224" cy="560832"/>
             </a:xfrm>
             <a:prstGeom prst="rect">
               <a:avLst/>
@@ -16893,7 +17543,7 @@
                 </a:spcAft>
               </a:pPr>
               <a:r>
-                <a:rPr sz="1800" b="1">
+                <a:rPr sz="2000" b="1">
                   <a:solidFill>
                     <a:schemeClr val="accent2"/>
                   </a:solidFill>
@@ -16914,7 +17564,7 @@
           <p:spPr>
             <a:xfrm>
               <a:off x="146304" y="640080"/>
-              <a:ext cx="3355848" cy="961136"/>
+              <a:ext cx="3355848" cy="1865376"/>
             </a:xfrm>
             <a:prstGeom prst="rect">
               <a:avLst/>
@@ -16940,7 +17590,7 @@
                 <a:buChar char="•"/>
               </a:pPr>
               <a:r>
-                <a:rPr sz="1400" b="0">
+                <a:rPr sz="1600" b="0">
                   <a:solidFill>
                     <a:schemeClr val="dk1"/>
                   </a:solidFill>
@@ -16961,7 +17611,7 @@
                 <a:buChar char="•"/>
               </a:pPr>
               <a:r>
-                <a:rPr sz="1400" b="0">
+                <a:rPr sz="1600" b="0">
                   <a:solidFill>
                     <a:schemeClr val="dk1"/>
                   </a:solidFill>
@@ -16969,6 +17619,27 @@
                   <a:ea typeface="Yu Gothic"/>
                 </a:rPr>
                 <a:t>定期的に課題を確認し、改善を続ける</a:t>
+              </a:r>
+            </a:p>
+            <a:p>
+              <a:pPr algn="l" marL="201168" indent="-109728">
+                <a:lnSpc>
+                  <a:spcPct val="100000"/>
+                </a:lnSpc>
+                <a:spcAft>
+                  <a:spcPts val="400"/>
+                </a:spcAft>
+                <a:buChar char="•"/>
+              </a:pPr>
+              <a:r>
+                <a:rPr sz="1600" b="0">
+                  <a:solidFill>
+                    <a:schemeClr val="dk1"/>
+                  </a:solidFill>
+                  <a:latin typeface="Yu Gothic"/>
+                  <a:ea typeface="Yu Gothic"/>
+                </a:rPr>
+                <a:t>問い合わせ傾向から改善テーマを決める</a:t>
               </a:r>
             </a:p>
           </p:txBody>
@@ -17026,10 +17697,10 @@
         </p:nvGrpSpPr>
         <p:grpSpPr>
           <a:xfrm>
-            <a:off x="457200" y="1645920"/>
-            <a:ext cx="2708910" cy="1786127"/>
+            <a:off x="457200" y="2883408"/>
+            <a:ext cx="2708910" cy="2051304"/>
             <a:chOff x="0" y="0"/>
-            <a:chExt cx="2708910" cy="1786127"/>
+            <a:chExt cx="2708910" cy="2051304"/>
           </a:xfrm>
         </p:grpSpPr>
         <p:sp>
@@ -17041,11 +17712,11 @@
           <p:spPr>
             <a:xfrm>
               <a:off x="0" y="0"/>
-              <a:ext cx="2708910" cy="1786127"/>
+              <a:ext cx="2708910" cy="2051304"/>
             </a:xfrm>
             <a:prstGeom prst="roundRect">
               <a:avLst>
-                <a:gd name="adj" fmla="val 3072"/>
+                <a:gd name="adj" fmla="val 2675"/>
               </a:avLst>
             </a:prstGeom>
             <a:solidFill>
@@ -17101,8 +17772,8 @@
           </p:nvSpPr>
           <p:spPr>
             <a:xfrm>
-              <a:off x="109728" y="91440"/>
-              <a:ext cx="2489454" cy="768096"/>
+              <a:off x="18288" y="91440"/>
+              <a:ext cx="2672334" cy="987552"/>
             </a:xfrm>
             <a:prstGeom prst="rect">
               <a:avLst/>
@@ -17113,7 +17784,7 @@
             </a:ln>
           </p:spPr>
           <p:txBody>
-            <a:bodyPr wrap="square" anchor="ctr" lIns="109728" rIns="109728" tIns="73152" bIns="73152">
+            <a:bodyPr wrap="square" anchor="ctr" lIns="18288" rIns="18288" tIns="73152" bIns="73152">
               <a:spAutoFit/>
             </a:bodyPr>
             <a:lstStyle/>
@@ -17127,7 +17798,7 @@
                 </a:spcAft>
               </a:pPr>
               <a:r>
-                <a:rPr sz="4000" b="1">
+                <a:rPr sz="4800" b="1">
                   <a:solidFill>
                     <a:schemeClr val="accent1"/>
                   </a:solidFill>
@@ -17137,7 +17808,7 @@
                 <a:t>1</a:t>
               </a:r>
               <a:r>
-                <a:rPr sz="1800" b="1">
+                <a:rPr sz="2200" b="1">
                   <a:solidFill>
                     <a:schemeClr val="dk1">
                       <a:lumMod val="65000"/>
@@ -17160,8 +17831,8 @@
           </p:nvSpPr>
           <p:spPr>
             <a:xfrm>
-              <a:off x="109728" y="877824"/>
-              <a:ext cx="2489454" cy="432816"/>
+              <a:off x="109728" y="1097280"/>
+              <a:ext cx="2489454" cy="463296"/>
             </a:xfrm>
             <a:prstGeom prst="rect">
               <a:avLst/>
@@ -17186,7 +17857,7 @@
                 </a:spcAft>
               </a:pPr>
               <a:r>
-                <a:rPr sz="1400" b="1">
+                <a:rPr sz="1600" b="1">
                   <a:solidFill>
                     <a:schemeClr val="dk1"/>
                   </a:solidFill>
@@ -17207,10 +17878,10 @@
         </p:nvGrpSpPr>
         <p:grpSpPr>
           <a:xfrm>
-            <a:off x="3312414" y="1645920"/>
-            <a:ext cx="2708910" cy="1786127"/>
+            <a:off x="3312414" y="2883408"/>
+            <a:ext cx="2708910" cy="2051304"/>
             <a:chOff x="0" y="0"/>
-            <a:chExt cx="2708910" cy="1786127"/>
+            <a:chExt cx="2708910" cy="2051304"/>
           </a:xfrm>
         </p:grpSpPr>
         <p:sp>
@@ -17222,11 +17893,11 @@
           <p:spPr>
             <a:xfrm>
               <a:off x="0" y="0"/>
-              <a:ext cx="2708910" cy="1786127"/>
+              <a:ext cx="2708910" cy="2051304"/>
             </a:xfrm>
             <a:prstGeom prst="roundRect">
               <a:avLst>
-                <a:gd name="adj" fmla="val 3072"/>
+                <a:gd name="adj" fmla="val 2675"/>
               </a:avLst>
             </a:prstGeom>
             <a:solidFill>
@@ -17282,8 +17953,8 @@
           </p:nvSpPr>
           <p:spPr>
             <a:xfrm>
-              <a:off x="109728" y="91440"/>
-              <a:ext cx="2489454" cy="768096"/>
+              <a:off x="18288" y="91440"/>
+              <a:ext cx="2672334" cy="987552"/>
             </a:xfrm>
             <a:prstGeom prst="rect">
               <a:avLst/>
@@ -17294,7 +17965,7 @@
             </a:ln>
           </p:spPr>
           <p:txBody>
-            <a:bodyPr wrap="square" anchor="ctr" lIns="109728" rIns="109728" tIns="73152" bIns="73152">
+            <a:bodyPr wrap="square" anchor="ctr" lIns="18288" rIns="18288" tIns="73152" bIns="73152">
               <a:spAutoFit/>
             </a:bodyPr>
             <a:lstStyle/>
@@ -17308,7 +17979,7 @@
                 </a:spcAft>
               </a:pPr>
               <a:r>
-                <a:rPr sz="4000" b="1">
+                <a:rPr sz="4800" b="1">
                   <a:solidFill>
                     <a:schemeClr val="accent1"/>
                   </a:solidFill>
@@ -17318,7 +17989,7 @@
                 <a:t>3</a:t>
               </a:r>
               <a:r>
-                <a:rPr sz="1800" b="1">
+                <a:rPr sz="2200" b="1">
                   <a:solidFill>
                     <a:schemeClr val="dk1">
                       <a:lumMod val="65000"/>
@@ -17341,8 +18012,8 @@
           </p:nvSpPr>
           <p:spPr>
             <a:xfrm>
-              <a:off x="109728" y="877824"/>
-              <a:ext cx="2489454" cy="432816"/>
+              <a:off x="109728" y="1097280"/>
+              <a:ext cx="2489454" cy="463296"/>
             </a:xfrm>
             <a:prstGeom prst="rect">
               <a:avLst/>
@@ -17367,7 +18038,7 @@
                 </a:spcAft>
               </a:pPr>
               <a:r>
-                <a:rPr sz="1400" b="1">
+                <a:rPr sz="1600" b="1">
                   <a:solidFill>
                     <a:schemeClr val="dk1"/>
                   </a:solidFill>
@@ -17388,10 +18059,10 @@
         </p:nvGrpSpPr>
         <p:grpSpPr>
           <a:xfrm>
-            <a:off x="6167628" y="1645920"/>
-            <a:ext cx="2708910" cy="1786127"/>
+            <a:off x="6167628" y="2883408"/>
+            <a:ext cx="2708910" cy="2051304"/>
             <a:chOff x="0" y="0"/>
-            <a:chExt cx="2708910" cy="1786127"/>
+            <a:chExt cx="2708910" cy="2051304"/>
           </a:xfrm>
         </p:grpSpPr>
         <p:sp>
@@ -17403,11 +18074,11 @@
           <p:spPr>
             <a:xfrm>
               <a:off x="0" y="0"/>
-              <a:ext cx="2708910" cy="1786127"/>
+              <a:ext cx="2708910" cy="2051304"/>
             </a:xfrm>
             <a:prstGeom prst="roundRect">
               <a:avLst>
-                <a:gd name="adj" fmla="val 3072"/>
+                <a:gd name="adj" fmla="val 2675"/>
               </a:avLst>
             </a:prstGeom>
             <a:solidFill>
@@ -17463,8 +18134,8 @@
           </p:nvSpPr>
           <p:spPr>
             <a:xfrm>
-              <a:off x="109728" y="91440"/>
-              <a:ext cx="2489454" cy="768096"/>
+              <a:off x="18288" y="91440"/>
+              <a:ext cx="2672334" cy="987552"/>
             </a:xfrm>
             <a:prstGeom prst="rect">
               <a:avLst/>
@@ -17475,7 +18146,7 @@
             </a:ln>
           </p:spPr>
           <p:txBody>
-            <a:bodyPr wrap="square" anchor="ctr" lIns="109728" rIns="109728" tIns="73152" bIns="73152">
+            <a:bodyPr wrap="square" anchor="ctr" lIns="18288" rIns="18288" tIns="73152" bIns="73152">
               <a:spAutoFit/>
             </a:bodyPr>
             <a:lstStyle/>
@@ -17489,7 +18160,7 @@
                 </a:spcAft>
               </a:pPr>
               <a:r>
-                <a:rPr sz="4000" b="1">
+                <a:rPr sz="4800" b="1">
                   <a:solidFill>
                     <a:schemeClr val="accent1"/>
                   </a:solidFill>
@@ -17499,7 +18170,7 @@
                 <a:t>80</a:t>
               </a:r>
               <a:r>
-                <a:rPr sz="1800" b="1">
+                <a:rPr sz="2200" b="1">
                   <a:solidFill>
                     <a:schemeClr val="dk1">
                       <a:lumMod val="65000"/>
@@ -17522,8 +18193,8 @@
           </p:nvSpPr>
           <p:spPr>
             <a:xfrm>
-              <a:off x="109728" y="877824"/>
-              <a:ext cx="2489454" cy="432816"/>
+              <a:off x="109728" y="1097280"/>
+              <a:ext cx="2489454" cy="463296"/>
             </a:xfrm>
             <a:prstGeom prst="rect">
               <a:avLst/>
@@ -17548,7 +18219,7 @@
                 </a:spcAft>
               </a:pPr>
               <a:r>
-                <a:rPr sz="1400" b="1">
+                <a:rPr sz="1600" b="1">
                   <a:solidFill>
                     <a:schemeClr val="dk1"/>
                   </a:solidFill>
@@ -17568,8 +18239,8 @@
           </p:nvSpPr>
           <p:spPr>
             <a:xfrm>
-              <a:off x="109728" y="1383791"/>
-              <a:ext cx="2489454" cy="365759"/>
+              <a:off x="109728" y="1633728"/>
+              <a:ext cx="2489454" cy="380999"/>
             </a:xfrm>
             <a:prstGeom prst="rect">
               <a:avLst/>
@@ -17594,7 +18265,7 @@
                 </a:spcAft>
               </a:pPr>
               <a:r>
-                <a:rPr sz="1200" b="0">
+                <a:rPr sz="1300" b="0">
                   <a:solidFill>
                     <a:schemeClr val="dk1">
                       <a:lumMod val="65000"/>
@@ -17618,10 +18289,10 @@
         </p:nvGrpSpPr>
         <p:grpSpPr>
           <a:xfrm>
-            <a:off x="9022842" y="1645920"/>
-            <a:ext cx="2708910" cy="1786127"/>
+            <a:off x="9022842" y="2883408"/>
+            <a:ext cx="2708910" cy="2051304"/>
             <a:chOff x="0" y="0"/>
-            <a:chExt cx="2708910" cy="1786127"/>
+            <a:chExt cx="2708910" cy="2051304"/>
           </a:xfrm>
         </p:grpSpPr>
         <p:sp>
@@ -17633,11 +18304,11 @@
           <p:spPr>
             <a:xfrm>
               <a:off x="0" y="0"/>
-              <a:ext cx="2708910" cy="1786127"/>
+              <a:ext cx="2708910" cy="2051304"/>
             </a:xfrm>
             <a:prstGeom prst="roundRect">
               <a:avLst>
-                <a:gd name="adj" fmla="val 3072"/>
+                <a:gd name="adj" fmla="val 2675"/>
               </a:avLst>
             </a:prstGeom>
             <a:solidFill>
@@ -17693,8 +18364,8 @@
           </p:nvSpPr>
           <p:spPr>
             <a:xfrm>
-              <a:off x="109727" y="91440"/>
-              <a:ext cx="2489454" cy="768096"/>
+              <a:off x="18288" y="91440"/>
+              <a:ext cx="2672334" cy="987552"/>
             </a:xfrm>
             <a:prstGeom prst="rect">
               <a:avLst/>
@@ -17705,7 +18376,7 @@
             </a:ln>
           </p:spPr>
           <p:txBody>
-            <a:bodyPr wrap="square" anchor="ctr" lIns="109728" rIns="109728" tIns="73152" bIns="73152">
+            <a:bodyPr wrap="square" anchor="ctr" lIns="18288" rIns="18288" tIns="73152" bIns="73152">
               <a:spAutoFit/>
             </a:bodyPr>
             <a:lstStyle/>
@@ -17719,7 +18390,7 @@
                 </a:spcAft>
               </a:pPr>
               <a:r>
-                <a:rPr sz="4000" b="1">
+                <a:rPr sz="4800" b="1">
                   <a:solidFill>
                     <a:schemeClr val="accent1"/>
                   </a:solidFill>
@@ -17729,7 +18400,7 @@
                 <a:t>100</a:t>
               </a:r>
               <a:r>
-                <a:rPr sz="1800" b="1">
+                <a:rPr sz="2200" b="1">
                   <a:solidFill>
                     <a:schemeClr val="dk1">
                       <a:lumMod val="65000"/>
@@ -17752,8 +18423,8 @@
           </p:nvSpPr>
           <p:spPr>
             <a:xfrm>
-              <a:off x="109727" y="877824"/>
-              <a:ext cx="2489454" cy="432816"/>
+              <a:off x="109727" y="1097280"/>
+              <a:ext cx="2489454" cy="463296"/>
             </a:xfrm>
             <a:prstGeom prst="rect">
               <a:avLst/>
@@ -17778,7 +18449,7 @@
                 </a:spcAft>
               </a:pPr>
               <a:r>
-                <a:rPr sz="1400" b="1">
+                <a:rPr sz="1600" b="1">
                   <a:solidFill>
                     <a:schemeClr val="dk1"/>
                   </a:solidFill>
@@ -17843,10 +18514,10 @@
         </p:nvGrpSpPr>
         <p:grpSpPr>
           <a:xfrm>
-            <a:off x="457200" y="1645920"/>
-            <a:ext cx="11274552" cy="1383791"/>
+            <a:off x="457200" y="2749296"/>
+            <a:ext cx="11274552" cy="1633728"/>
             <a:chOff x="0" y="0"/>
-            <a:chExt cx="11274552" cy="1383791"/>
+            <a:chExt cx="11274552" cy="1633728"/>
           </a:xfrm>
         </p:grpSpPr>
         <p:sp>
@@ -17858,11 +18529,11 @@
           <p:spPr>
             <a:xfrm>
               <a:off x="0" y="0"/>
-              <a:ext cx="11274552" cy="1383791"/>
+              <a:ext cx="11274552" cy="1633728"/>
             </a:xfrm>
             <a:prstGeom prst="roundRect">
               <a:avLst>
-                <a:gd name="adj" fmla="val 3965"/>
+                <a:gd name="adj" fmla="val 3358"/>
               </a:avLst>
             </a:prstGeom>
             <a:solidFill>
@@ -17893,7 +18564,7 @@
           <p:spPr>
             <a:xfrm>
               <a:off x="73152" y="73152"/>
-              <a:ext cx="3514343" cy="768096"/>
+              <a:ext cx="3514343" cy="987552"/>
             </a:xfrm>
             <a:prstGeom prst="rect">
               <a:avLst/>
@@ -17904,7 +18575,7 @@
             </a:ln>
           </p:spPr>
           <p:txBody>
-            <a:bodyPr wrap="square" anchor="ctr" lIns="109728" rIns="109728" tIns="73152" bIns="73152">
+            <a:bodyPr wrap="square" anchor="ctr" lIns="18288" rIns="18288" tIns="73152" bIns="73152">
               <a:spAutoFit/>
             </a:bodyPr>
             <a:lstStyle/>
@@ -17918,7 +18589,7 @@
                 </a:spcAft>
               </a:pPr>
               <a:r>
-                <a:rPr sz="4000" b="1">
+                <a:rPr sz="4800" b="1">
                   <a:solidFill>
                     <a:schemeClr val="accent1"/>
                   </a:solidFill>
@@ -17928,7 +18599,7 @@
                 <a:t>1</a:t>
               </a:r>
               <a:r>
-                <a:rPr sz="1800" b="1">
+                <a:rPr sz="2200" b="1">
                   <a:solidFill>
                     <a:schemeClr val="dk1">
                       <a:lumMod val="65000"/>
@@ -17951,8 +18622,8 @@
           </p:nvSpPr>
           <p:spPr>
             <a:xfrm>
-              <a:off x="73152" y="877824"/>
-              <a:ext cx="3514343" cy="432816"/>
+              <a:off x="73152" y="1097280"/>
+              <a:ext cx="3514343" cy="463296"/>
             </a:xfrm>
             <a:prstGeom prst="rect">
               <a:avLst/>
@@ -17977,7 +18648,7 @@
                 </a:spcAft>
               </a:pPr>
               <a:r>
-                <a:rPr sz="1400" b="1">
+                <a:rPr sz="1600" b="1">
                   <a:solidFill>
                     <a:schemeClr val="dk1"/>
                   </a:solidFill>
@@ -17998,10 +18669,10 @@
         </p:nvGrpSpPr>
         <p:grpSpPr>
           <a:xfrm>
-            <a:off x="4190999" y="1719072"/>
-            <a:ext cx="3660648" cy="1237488"/>
+            <a:off x="4190999" y="2822448"/>
+            <a:ext cx="3660648" cy="1487424"/>
             <a:chOff x="0" y="0"/>
-            <a:chExt cx="3660648" cy="1237488"/>
+            <a:chExt cx="3660648" cy="1487424"/>
           </a:xfrm>
         </p:grpSpPr>
         <p:sp>
@@ -18013,7 +18684,7 @@
           <p:spPr>
             <a:xfrm>
               <a:off x="0" y="36576"/>
-              <a:ext cx="9144" cy="1164336"/>
+              <a:ext cx="9144" cy="1414272"/>
             </a:xfrm>
             <a:prstGeom prst="rect">
               <a:avLst/>
@@ -18041,7 +18712,7 @@
           <p:spPr>
             <a:xfrm>
               <a:off x="146305" y="0"/>
-              <a:ext cx="3514343" cy="768096"/>
+              <a:ext cx="3514343" cy="987552"/>
             </a:xfrm>
             <a:prstGeom prst="rect">
               <a:avLst/>
@@ -18052,7 +18723,7 @@
             </a:ln>
           </p:spPr>
           <p:txBody>
-            <a:bodyPr wrap="square" anchor="ctr" lIns="109728" rIns="109728" tIns="73152" bIns="73152">
+            <a:bodyPr wrap="square" anchor="ctr" lIns="18288" rIns="18288" tIns="73152" bIns="73152">
               <a:spAutoFit/>
             </a:bodyPr>
             <a:lstStyle/>
@@ -18066,7 +18737,7 @@
                 </a:spcAft>
               </a:pPr>
               <a:r>
-                <a:rPr sz="4000" b="1">
+                <a:rPr sz="4800" b="1">
                   <a:solidFill>
                     <a:schemeClr val="accent1"/>
                   </a:solidFill>
@@ -18076,7 +18747,7 @@
                 <a:t>3</a:t>
               </a:r>
               <a:r>
-                <a:rPr sz="1800" b="1">
+                <a:rPr sz="2200" b="1">
                   <a:solidFill>
                     <a:schemeClr val="dk1">
                       <a:lumMod val="65000"/>
@@ -18099,8 +18770,8 @@
           </p:nvSpPr>
           <p:spPr>
             <a:xfrm>
-              <a:off x="146305" y="804672"/>
-              <a:ext cx="3514343" cy="432816"/>
+              <a:off x="146305" y="1024128"/>
+              <a:ext cx="3514343" cy="463296"/>
             </a:xfrm>
             <a:prstGeom prst="rect">
               <a:avLst/>
@@ -18125,7 +18796,7 @@
                 </a:spcAft>
               </a:pPr>
               <a:r>
-                <a:rPr sz="1400" b="1">
+                <a:rPr sz="1600" b="1">
                   <a:solidFill>
                     <a:schemeClr val="dk1"/>
                   </a:solidFill>
@@ -18146,10 +18817,10 @@
         </p:nvGrpSpPr>
         <p:grpSpPr>
           <a:xfrm>
-            <a:off x="7997951" y="1719072"/>
-            <a:ext cx="3660648" cy="1237488"/>
+            <a:off x="7997951" y="2822448"/>
+            <a:ext cx="3660648" cy="1487424"/>
             <a:chOff x="0" y="0"/>
-            <a:chExt cx="3660648" cy="1237488"/>
+            <a:chExt cx="3660648" cy="1487424"/>
           </a:xfrm>
         </p:grpSpPr>
         <p:sp>
@@ -18161,7 +18832,7 @@
           <p:spPr>
             <a:xfrm>
               <a:off x="0" y="36576"/>
-              <a:ext cx="9144" cy="1164336"/>
+              <a:ext cx="9144" cy="1414272"/>
             </a:xfrm>
             <a:prstGeom prst="rect">
               <a:avLst/>
@@ -18189,7 +18860,7 @@
           <p:spPr>
             <a:xfrm>
               <a:off x="146305" y="0"/>
-              <a:ext cx="3514343" cy="768096"/>
+              <a:ext cx="3514343" cy="987552"/>
             </a:xfrm>
             <a:prstGeom prst="rect">
               <a:avLst/>
@@ -18200,7 +18871,7 @@
             </a:ln>
           </p:spPr>
           <p:txBody>
-            <a:bodyPr wrap="square" anchor="ctr" lIns="109728" rIns="109728" tIns="73152" bIns="73152">
+            <a:bodyPr wrap="square" anchor="ctr" lIns="18288" rIns="18288" tIns="73152" bIns="73152">
               <a:spAutoFit/>
             </a:bodyPr>
             <a:lstStyle/>
@@ -18214,7 +18885,7 @@
                 </a:spcAft>
               </a:pPr>
               <a:r>
-                <a:rPr sz="4000" b="1">
+                <a:rPr sz="4800" b="1">
                   <a:solidFill>
                     <a:schemeClr val="accent1"/>
                   </a:solidFill>
@@ -18224,7 +18895,7 @@
                 <a:t>80</a:t>
               </a:r>
               <a:r>
-                <a:rPr sz="1800" b="1">
+                <a:rPr sz="2200" b="1">
                   <a:solidFill>
                     <a:schemeClr val="dk1">
                       <a:lumMod val="65000"/>
@@ -18247,8 +18918,8 @@
           </p:nvSpPr>
           <p:spPr>
             <a:xfrm>
-              <a:off x="146305" y="804672"/>
-              <a:ext cx="3514343" cy="432816"/>
+              <a:off x="146305" y="1024128"/>
+              <a:ext cx="3514343" cy="463296"/>
             </a:xfrm>
             <a:prstGeom prst="rect">
               <a:avLst/>
@@ -18273,7 +18944,7 @@
                 </a:spcAft>
               </a:pPr>
               <a:r>
-                <a:rPr sz="1400" b="1">
+                <a:rPr sz="1600" b="1">
                   <a:solidFill>
                     <a:schemeClr val="dk1"/>
                   </a:solidFill>
@@ -18294,7 +18965,7 @@
         </p:nvSpPr>
         <p:spPr>
           <a:xfrm>
-            <a:off x="457200" y="3258312"/>
+            <a:off x="457200" y="4611624"/>
             <a:ext cx="11274552" cy="457200"/>
           </a:xfrm>
           <a:prstGeom prst="roundRect">
@@ -18329,7 +19000,7 @@
         </p:nvSpPr>
         <p:spPr>
           <a:xfrm>
-            <a:off x="457200" y="3258312"/>
+            <a:off x="457200" y="4611624"/>
             <a:ext cx="82296" cy="457200"/>
           </a:xfrm>
           <a:prstGeom prst="rect">
@@ -18355,7 +19026,7 @@
         </p:nvSpPr>
         <p:spPr>
           <a:xfrm>
-            <a:off x="603504" y="3258312"/>
+            <a:off x="603504" y="4611624"/>
             <a:ext cx="11073384" cy="457200"/>
           </a:xfrm>
           <a:prstGeom prst="rect">
@@ -18381,7 +19052,7 @@
               </a:spcAft>
             </a:pPr>
             <a:r>
-              <a:rPr sz="1400" b="1">
+              <a:rPr sz="1600" b="1">
                 <a:solidFill>
                   <a:schemeClr val="dk1"/>
                 </a:solidFill>
